--- a/visor/public/entregables/Pitch_El_miedo_que_no_baja_The_data_squad.pptx
+++ b/visor/public/entregables/Pitch_El_miedo_que_no_baja_The_data_squad.pptx
@@ -6,13 +6,13 @@
   </p:sldMasterIdLst>
   <p:sldIdLst>
     <p:sldId id="256" r:id="rId7"/>
-    <p:sldId id="257" r:id="rId8"/>
-    <p:sldId id="258" r:id="rId9"/>
-    <p:sldId id="259" r:id="rId10"/>
-    <p:sldId id="260" r:id="rId11"/>
-    <p:sldId id="261" r:id="rId12"/>
-    <p:sldId id="262" r:id="rId13"/>
-    <p:sldId id="263" r:id="rId14"/>
+    <p:sldId id="257" r:id="rId9"/>
+    <p:sldId id="258" r:id="rId10"/>
+    <p:sldId id="259" r:id="rId11"/>
+    <p:sldId id="260" r:id="rId12"/>
+    <p:sldId id="261" r:id="rId13"/>
+    <p:sldId id="262" r:id="rId14"/>
+    <p:sldId id="263" r:id="rId15"/>
   </p:sldIdLst>
   <p:sldSz cx="12191695" cy="6858000" type="screen4x3"/>
   <p:notesSz cx="6858000" cy="9144000"/>
@@ -112,6 +112,916 @@
     </a:lvl9pPr>
   </p:defaultTextStyle>
 </p:presentation>
+</file>
+
+<file path=ppt/notesMasters/notesMaster1.xml><?xml version="1.0" encoding="utf-8"?>
+<p:notesMaster xmlns:a="http://schemas.openxmlformats.org/drawingml/2006/main" xmlns:p="http://schemas.openxmlformats.org/presentationml/2006/main" xmlns:r="http://schemas.openxmlformats.org/officeDocument/2006/relationships">
+  <p:cSld>
+    <p:bg>
+      <p:bgRef idx="1001">
+        <a:schemeClr val="bg1"/>
+      </p:bgRef>
+    </p:bg>
+    <p:spTree>
+      <p:nvGrpSpPr>
+        <p:cNvPr id="1" name=""/>
+        <p:cNvGrpSpPr/>
+        <p:nvPr/>
+      </p:nvGrpSpPr>
+      <p:grpSpPr>
+        <a:xfrm>
+          <a:off x="0" y="0"/>
+          <a:ext cx="0" cy="0"/>
+          <a:chOff x="0" y="0"/>
+          <a:chExt cx="0" cy="0"/>
+        </a:xfrm>
+      </p:grpSpPr>
+      <p:sp>
+        <p:nvSpPr>
+          <p:cNvPr id="2" name="Header Placeholder 1"/>
+          <p:cNvSpPr>
+            <a:spLocks noGrp="1"/>
+          </p:cNvSpPr>
+          <p:nvPr>
+            <p:ph type="hdr" sz="quarter"/>
+          </p:nvPr>
+        </p:nvSpPr>
+        <p:spPr>
+          <a:xfrm>
+            <a:off x="0" y="0"/>
+            <a:ext cx="2971800" cy="457200"/>
+          </a:xfrm>
+          <a:prstGeom prst="rect">
+            <a:avLst/>
+          </a:prstGeom>
+        </p:spPr>
+        <p:txBody>
+          <a:bodyPr vert="horz" lIns="91440" tIns="45720" rIns="91440" bIns="45720" rtlCol="0"/>
+          <a:lstStyle>
+            <a:lvl1pPr algn="l">
+              <a:defRPr sz="1200"/>
+            </a:lvl1pPr>
+          </a:lstStyle>
+          <a:p>
+            <a:endParaRPr lang="en-US"/>
+          </a:p>
+        </p:txBody>
+      </p:sp>
+      <p:sp>
+        <p:nvSpPr>
+          <p:cNvPr id="3" name="Date Placeholder 2"/>
+          <p:cNvSpPr>
+            <a:spLocks noGrp="1"/>
+          </p:cNvSpPr>
+          <p:nvPr>
+            <p:ph type="dt" idx="1"/>
+          </p:nvPr>
+        </p:nvSpPr>
+        <p:spPr>
+          <a:xfrm>
+            <a:off x="3884613" y="0"/>
+            <a:ext cx="2971800" cy="457200"/>
+          </a:xfrm>
+          <a:prstGeom prst="rect">
+            <a:avLst/>
+          </a:prstGeom>
+        </p:spPr>
+        <p:txBody>
+          <a:bodyPr vert="horz" lIns="91440" tIns="45720" rIns="91440" bIns="45720" rtlCol="0"/>
+          <a:lstStyle>
+            <a:lvl1pPr algn="r">
+              <a:defRPr sz="1200"/>
+            </a:lvl1pPr>
+          </a:lstStyle>
+          <a:p>
+            <a:fld id="{0F89C1C7-3DCD-1040-A9CF-14679D8B5DDD}" type="datetimeFigureOut">
+              <a:rPr lang="en-US" smtClean="0"/>
+              <a:t>10/17/16</a:t>
+            </a:fld>
+            <a:endParaRPr lang="en-US"/>
+          </a:p>
+        </p:txBody>
+      </p:sp>
+      <p:sp>
+        <p:nvSpPr>
+          <p:cNvPr id="4" name="Slide Image Placeholder 3"/>
+          <p:cNvSpPr>
+            <a:spLocks noGrp="1" noRot="1" noChangeAspect="1"/>
+          </p:cNvSpPr>
+          <p:nvPr>
+            <p:ph type="sldImg" idx="2"/>
+          </p:nvPr>
+        </p:nvSpPr>
+        <p:spPr>
+          <a:xfrm>
+            <a:off x="1143000" y="685800"/>
+            <a:ext cx="4572000" cy="3429000"/>
+          </a:xfrm>
+          <a:prstGeom prst="rect">
+            <a:avLst/>
+          </a:prstGeom>
+          <a:noFill/>
+          <a:ln w="12700">
+            <a:solidFill>
+              <a:prstClr val="black"/>
+            </a:solidFill>
+          </a:ln>
+        </p:spPr>
+        <p:txBody>
+          <a:bodyPr vert="horz" lIns="91440" tIns="45720" rIns="91440" bIns="45720" rtlCol="0" anchor="ctr"/>
+          <a:lstStyle/>
+          <a:p>
+            <a:endParaRPr lang="en-US"/>
+          </a:p>
+        </p:txBody>
+      </p:sp>
+      <p:sp>
+        <p:nvSpPr>
+          <p:cNvPr id="5" name="Notes Placeholder 4"/>
+          <p:cNvSpPr>
+            <a:spLocks noGrp="1"/>
+          </p:cNvSpPr>
+          <p:nvPr>
+            <p:ph type="body" sz="quarter" idx="3"/>
+          </p:nvPr>
+        </p:nvSpPr>
+        <p:spPr>
+          <a:xfrm>
+            <a:off x="685800" y="4343400"/>
+            <a:ext cx="5486400" cy="4114800"/>
+          </a:xfrm>
+          <a:prstGeom prst="rect">
+            <a:avLst/>
+          </a:prstGeom>
+        </p:spPr>
+        <p:txBody>
+          <a:bodyPr vert="horz" lIns="91440" tIns="45720" rIns="91440" bIns="45720" rtlCol="0"/>
+          <a:lstStyle/>
+          <a:p>
+            <a:pPr lvl="0"/>
+            <a:r>
+              <a:rPr lang="en-US" smtClean="0"/>
+              <a:t>Click to edit Master text styles</a:t>
+            </a:r>
+          </a:p>
+          <a:p>
+            <a:pPr lvl="1"/>
+            <a:r>
+              <a:rPr lang="en-US" smtClean="0"/>
+              <a:t>Second level</a:t>
+            </a:r>
+          </a:p>
+          <a:p>
+            <a:pPr lvl="2"/>
+            <a:r>
+              <a:rPr lang="en-US" smtClean="0"/>
+              <a:t>Third level</a:t>
+            </a:r>
+          </a:p>
+          <a:p>
+            <a:pPr lvl="3"/>
+            <a:r>
+              <a:rPr lang="en-US" smtClean="0"/>
+              <a:t>Fourth level</a:t>
+            </a:r>
+          </a:p>
+          <a:p>
+            <a:pPr lvl="4"/>
+            <a:r>
+              <a:rPr lang="en-US" smtClean="0"/>
+              <a:t>Fifth level</a:t>
+            </a:r>
+            <a:endParaRPr lang="en-US"/>
+          </a:p>
+        </p:txBody>
+      </p:sp>
+      <p:sp>
+        <p:nvSpPr>
+          <p:cNvPr id="6" name="Footer Placeholder 5"/>
+          <p:cNvSpPr>
+            <a:spLocks noGrp="1"/>
+          </p:cNvSpPr>
+          <p:nvPr>
+            <p:ph type="ftr" sz="quarter" idx="4"/>
+          </p:nvPr>
+        </p:nvSpPr>
+        <p:spPr>
+          <a:xfrm>
+            <a:off x="0" y="8685213"/>
+            <a:ext cx="2971800" cy="457200"/>
+          </a:xfrm>
+          <a:prstGeom prst="rect">
+            <a:avLst/>
+          </a:prstGeom>
+        </p:spPr>
+        <p:txBody>
+          <a:bodyPr vert="horz" lIns="91440" tIns="45720" rIns="91440" bIns="45720" rtlCol="0" anchor="b"/>
+          <a:lstStyle>
+            <a:lvl1pPr algn="l">
+              <a:defRPr sz="1200"/>
+            </a:lvl1pPr>
+          </a:lstStyle>
+          <a:p>
+            <a:endParaRPr lang="en-US"/>
+          </a:p>
+        </p:txBody>
+      </p:sp>
+      <p:sp>
+        <p:nvSpPr>
+          <p:cNvPr id="7" name="Slide Number Placeholder 6"/>
+          <p:cNvSpPr>
+            <a:spLocks noGrp="1"/>
+          </p:cNvSpPr>
+          <p:nvPr>
+            <p:ph type="sldNum" sz="quarter" idx="5"/>
+          </p:nvPr>
+        </p:nvSpPr>
+        <p:spPr>
+          <a:xfrm>
+            <a:off x="3884613" y="8685213"/>
+            <a:ext cx="2971800" cy="457200"/>
+          </a:xfrm>
+          <a:prstGeom prst="rect">
+            <a:avLst/>
+          </a:prstGeom>
+        </p:spPr>
+        <p:txBody>
+          <a:bodyPr vert="horz" lIns="91440" tIns="45720" rIns="91440" bIns="45720" rtlCol="0" anchor="b"/>
+          <a:lstStyle>
+            <a:lvl1pPr algn="r">
+              <a:defRPr sz="1200"/>
+            </a:lvl1pPr>
+          </a:lstStyle>
+          <a:p>
+            <a:fld id="{BB5E49A5-4136-284D-997B-48E1D791AD67}" type="slidenum">
+              <a:rPr lang="en-US" smtClean="0"/>
+              <a:t>‹#›</a:t>
+            </a:fld>
+            <a:endParaRPr lang="en-US"/>
+          </a:p>
+        </p:txBody>
+      </p:sp>
+    </p:spTree>
+    <p:extLst>
+      <p:ext uri="{BB962C8B-B14F-4D97-AF65-F5344CB8AC3E}">
+        <p14:creationId xmlns:p14="http://schemas.microsoft.com/office/powerpoint/2010/main" val="2623252185"/>
+      </p:ext>
+    </p:extLst>
+  </p:cSld>
+  <p:clrMap bg1="lt1" tx1="dk1" bg2="lt2" tx2="dk2" accent1="accent1" accent2="accent2" accent3="accent3" accent4="accent4" accent5="accent5" accent6="accent6" hlink="hlink" folHlink="folHlink"/>
+  <p:notesStyle>
+    <a:lvl1pPr marL="0" algn="l" defTabSz="457200" rtl="0" eaLnBrk="1" latinLnBrk="0" hangingPunct="1">
+      <a:defRPr sz="1200" kern="1200">
+        <a:solidFill>
+          <a:schemeClr val="tx1"/>
+        </a:solidFill>
+        <a:latin typeface="+mn-lt"/>
+        <a:ea typeface="+mn-ea"/>
+        <a:cs typeface="+mn-cs"/>
+      </a:defRPr>
+    </a:lvl1pPr>
+    <a:lvl2pPr marL="457200" algn="l" defTabSz="457200" rtl="0" eaLnBrk="1" latinLnBrk="0" hangingPunct="1">
+      <a:defRPr sz="1200" kern="1200">
+        <a:solidFill>
+          <a:schemeClr val="tx1"/>
+        </a:solidFill>
+        <a:latin typeface="+mn-lt"/>
+        <a:ea typeface="+mn-ea"/>
+        <a:cs typeface="+mn-cs"/>
+      </a:defRPr>
+    </a:lvl2pPr>
+    <a:lvl3pPr marL="914400" algn="l" defTabSz="457200" rtl="0" eaLnBrk="1" latinLnBrk="0" hangingPunct="1">
+      <a:defRPr sz="1200" kern="1200">
+        <a:solidFill>
+          <a:schemeClr val="tx1"/>
+        </a:solidFill>
+        <a:latin typeface="+mn-lt"/>
+        <a:ea typeface="+mn-ea"/>
+        <a:cs typeface="+mn-cs"/>
+      </a:defRPr>
+    </a:lvl3pPr>
+    <a:lvl4pPr marL="1371600" algn="l" defTabSz="457200" rtl="0" eaLnBrk="1" latinLnBrk="0" hangingPunct="1">
+      <a:defRPr sz="1200" kern="1200">
+        <a:solidFill>
+          <a:schemeClr val="tx1"/>
+        </a:solidFill>
+        <a:latin typeface="+mn-lt"/>
+        <a:ea typeface="+mn-ea"/>
+        <a:cs typeface="+mn-cs"/>
+      </a:defRPr>
+    </a:lvl4pPr>
+    <a:lvl5pPr marL="1828800" algn="l" defTabSz="457200" rtl="0" eaLnBrk="1" latinLnBrk="0" hangingPunct="1">
+      <a:defRPr sz="1200" kern="1200">
+        <a:solidFill>
+          <a:schemeClr val="tx1"/>
+        </a:solidFill>
+        <a:latin typeface="+mn-lt"/>
+        <a:ea typeface="+mn-ea"/>
+        <a:cs typeface="+mn-cs"/>
+      </a:defRPr>
+    </a:lvl5pPr>
+    <a:lvl6pPr marL="2286000" algn="l" defTabSz="457200" rtl="0" eaLnBrk="1" latinLnBrk="0" hangingPunct="1">
+      <a:defRPr sz="1200" kern="1200">
+        <a:solidFill>
+          <a:schemeClr val="tx1"/>
+        </a:solidFill>
+        <a:latin typeface="+mn-lt"/>
+        <a:ea typeface="+mn-ea"/>
+        <a:cs typeface="+mn-cs"/>
+      </a:defRPr>
+    </a:lvl6pPr>
+    <a:lvl7pPr marL="2743200" algn="l" defTabSz="457200" rtl="0" eaLnBrk="1" latinLnBrk="0" hangingPunct="1">
+      <a:defRPr sz="1200" kern="1200">
+        <a:solidFill>
+          <a:schemeClr val="tx1"/>
+        </a:solidFill>
+        <a:latin typeface="+mn-lt"/>
+        <a:ea typeface="+mn-ea"/>
+        <a:cs typeface="+mn-cs"/>
+      </a:defRPr>
+    </a:lvl7pPr>
+    <a:lvl8pPr marL="3200400" algn="l" defTabSz="457200" rtl="0" eaLnBrk="1" latinLnBrk="0" hangingPunct="1">
+      <a:defRPr sz="1200" kern="1200">
+        <a:solidFill>
+          <a:schemeClr val="tx1"/>
+        </a:solidFill>
+        <a:latin typeface="+mn-lt"/>
+        <a:ea typeface="+mn-ea"/>
+        <a:cs typeface="+mn-cs"/>
+      </a:defRPr>
+    </a:lvl8pPr>
+    <a:lvl9pPr marL="3657600" algn="l" defTabSz="457200" rtl="0" eaLnBrk="1" latinLnBrk="0" hangingPunct="1">
+      <a:defRPr sz="1200" kern="1200">
+        <a:solidFill>
+          <a:schemeClr val="tx1"/>
+        </a:solidFill>
+        <a:latin typeface="+mn-lt"/>
+        <a:ea typeface="+mn-ea"/>
+        <a:cs typeface="+mn-cs"/>
+      </a:defRPr>
+    </a:lvl9pPr>
+  </p:notesStyle>
+</p:notesMaster>
+</file>
+
+<file path=ppt/notesSlides/notesSlide1.xml><?xml version="1.0" encoding="utf-8"?>
+<p:notes xmlns:a="http://schemas.openxmlformats.org/drawingml/2006/main" xmlns:p="http://schemas.openxmlformats.org/presentationml/2006/main" xmlns:r="http://schemas.openxmlformats.org/officeDocument/2006/relationships">
+  <p:cSld>
+    <p:spTree>
+      <p:nvGrpSpPr>
+        <p:cNvPr id="1" name=""/>
+        <p:cNvGrpSpPr/>
+        <p:nvPr/>
+      </p:nvGrpSpPr>
+      <p:grpSpPr>
+        <a:xfrm>
+          <a:off x="0" y="0"/>
+          <a:ext cx="0" cy="0"/>
+          <a:chOff x="0" y="0"/>
+          <a:chExt cx="0" cy="0"/>
+        </a:xfrm>
+      </p:grpSpPr>
+      <p:sp>
+        <p:nvSpPr>
+          <p:cNvPr id="2" name="Slide Image Placeholder 1"/>
+          <p:cNvSpPr>
+            <a:spLocks noGrp="1"/>
+          </p:cNvSpPr>
+          <p:nvPr>
+            <p:ph type="sldImg" idx="2"/>
+          </p:nvPr>
+        </p:nvSpPr>
+        <p:spPr/>
+      </p:sp>
+      <p:sp>
+        <p:nvSpPr>
+          <p:cNvPr id="3" name="Notes Placeholder 2"/>
+          <p:cNvSpPr>
+            <a:spLocks noGrp="1"/>
+          </p:cNvSpPr>
+          <p:nvPr>
+            <p:ph type="body" idx="3" sz="quarter"/>
+          </p:nvPr>
+        </p:nvSpPr>
+        <p:spPr/>
+        <p:txBody>
+          <a:bodyPr/>
+          <a:lstStyle/>
+          <a:p>
+            <a:r>
+              <a:t>Brandow: Somos The data squad. Nuestra pregunta es por qué la gente en Bogotá no se siente más segura aunque las cifras de delito bajan, y dónde debería actuar primero el Distrito. (0:00-0:20)</a:t>
+            </a:r>
+          </a:p>
+        </p:txBody>
+      </p:sp>
+      <p:sp>
+        <p:nvSpPr>
+          <p:cNvPr id="4" name="Slide Number Placeholder 3"/>
+          <p:cNvSpPr>
+            <a:spLocks noGrp="1"/>
+          </p:cNvSpPr>
+          <p:nvPr>
+            <p:ph type="sldNum" idx="5" sz="quarter"/>
+          </p:nvPr>
+        </p:nvSpPr>
+        <p:spPr/>
+      </p:sp>
+    </p:spTree>
+  </p:cSld>
+  <p:clrMapOvr>
+    <a:masterClrMapping/>
+  </p:clrMapOvr>
+</p:notes>
+</file>
+
+<file path=ppt/notesSlides/notesSlide2.xml><?xml version="1.0" encoding="utf-8"?>
+<p:notes xmlns:a="http://schemas.openxmlformats.org/drawingml/2006/main" xmlns:p="http://schemas.openxmlformats.org/presentationml/2006/main" xmlns:r="http://schemas.openxmlformats.org/officeDocument/2006/relationships">
+  <p:cSld>
+    <p:spTree>
+      <p:nvGrpSpPr>
+        <p:cNvPr id="1" name=""/>
+        <p:cNvGrpSpPr/>
+        <p:nvPr/>
+      </p:nvGrpSpPr>
+      <p:grpSpPr>
+        <a:xfrm>
+          <a:off x="0" y="0"/>
+          <a:ext cx="0" cy="0"/>
+          <a:chOff x="0" y="0"/>
+          <a:chExt cx="0" cy="0"/>
+        </a:xfrm>
+      </p:grpSpPr>
+      <p:sp>
+        <p:nvSpPr>
+          <p:cNvPr id="2" name="Slide Image Placeholder 1"/>
+          <p:cNvSpPr>
+            <a:spLocks noGrp="1"/>
+          </p:cNvSpPr>
+          <p:nvPr>
+            <p:ph type="sldImg" idx="2"/>
+          </p:nvPr>
+        </p:nvSpPr>
+        <p:spPr/>
+      </p:sp>
+      <p:sp>
+        <p:nvSpPr>
+          <p:cNvPr id="3" name="Notes Placeholder 2"/>
+          <p:cNvSpPr>
+            <a:spLocks noGrp="1"/>
+          </p:cNvSpPr>
+          <p:nvPr>
+            <p:ph type="body" idx="3" sz="quarter"/>
+          </p:nvPr>
+        </p:nvSpPr>
+        <p:spPr/>
+        <p:txBody>
+          <a:bodyPr/>
+          <a:lstStyle/>
+          <a:p>
+            <a:r>
+              <a:t>Brandow: Entre enero y agosto, el hurto a personas registrado cayó 65 % desde 2019. Pero el 74 % de los adultos dice que la ciudad es insegura. La política se planea con el registro y la gente vive otra cosa. Señalar que la violencia intrafamiliar y los delitos sexuales van en sentido contrario. (0:20-1:00)</a:t>
+            </a:r>
+          </a:p>
+        </p:txBody>
+      </p:sp>
+      <p:sp>
+        <p:nvSpPr>
+          <p:cNvPr id="4" name="Slide Number Placeholder 3"/>
+          <p:cNvSpPr>
+            <a:spLocks noGrp="1"/>
+          </p:cNvSpPr>
+          <p:nvPr>
+            <p:ph type="sldNum" idx="5" sz="quarter"/>
+          </p:nvPr>
+        </p:nvSpPr>
+        <p:spPr/>
+      </p:sp>
+    </p:spTree>
+  </p:cSld>
+  <p:clrMapOvr>
+    <a:masterClrMapping/>
+  </p:clrMapOvr>
+</p:notes>
+</file>
+
+<file path=ppt/notesSlides/notesSlide3.xml><?xml version="1.0" encoding="utf-8"?>
+<p:notes xmlns:a="http://schemas.openxmlformats.org/drawingml/2006/main" xmlns:p="http://schemas.openxmlformats.org/presentationml/2006/main" xmlns:r="http://schemas.openxmlformats.org/officeDocument/2006/relationships">
+  <p:cSld>
+    <p:spTree>
+      <p:nvGrpSpPr>
+        <p:cNvPr id="1" name=""/>
+        <p:cNvGrpSpPr/>
+        <p:nvPr/>
+      </p:nvGrpSpPr>
+      <p:grpSpPr>
+        <a:xfrm>
+          <a:off x="0" y="0"/>
+          <a:ext cx="0" cy="0"/>
+          <a:chOff x="0" y="0"/>
+          <a:chExt cx="0" cy="0"/>
+        </a:xfrm>
+      </p:grpSpPr>
+      <p:sp>
+        <p:nvSpPr>
+          <p:cNvPr id="2" name="Slide Image Placeholder 1"/>
+          <p:cNvSpPr>
+            <a:spLocks noGrp="1"/>
+          </p:cNvSpPr>
+          <p:nvPr>
+            <p:ph type="sldImg" idx="2"/>
+          </p:nvPr>
+        </p:nvSpPr>
+        <p:spPr/>
+      </p:sp>
+      <p:sp>
+        <p:nvSpPr>
+          <p:cNvPr id="3" name="Notes Placeholder 2"/>
+          <p:cNvSpPr>
+            <a:spLocks noGrp="1"/>
+          </p:cNvSpPr>
+          <p:nvPr>
+            <p:ph type="body" idx="3" sz="quarter"/>
+          </p:nvPr>
+        </p:nvSpPr>
+        <p:spPr/>
+        <p:txBody>
+          <a:bodyPr/>
+          <a:lstStyle/>
+          <a:p>
+            <a:r>
+              <a:t>Rafael: Integramos siete fuentes públicas y las unimos por el código de localidad, con tasas por 100.000 habitantes. Subimos la escalera completa: descripción, diagnóstico con un logit ponderado, predicción fuera de muestra y escenarios. (1:00-1:50)</a:t>
+            </a:r>
+          </a:p>
+        </p:txBody>
+      </p:sp>
+      <p:sp>
+        <p:nvSpPr>
+          <p:cNvPr id="4" name="Slide Number Placeholder 3"/>
+          <p:cNvSpPr>
+            <a:spLocks noGrp="1"/>
+          </p:cNvSpPr>
+          <p:nvPr>
+            <p:ph type="sldNum" idx="5" sz="quarter"/>
+          </p:nvPr>
+        </p:nvSpPr>
+        <p:spPr/>
+      </p:sp>
+    </p:spTree>
+  </p:cSld>
+  <p:clrMapOvr>
+    <a:masterClrMapping/>
+  </p:clrMapOvr>
+</p:notes>
+</file>
+
+<file path=ppt/notesSlides/notesSlide4.xml><?xml version="1.0" encoding="utf-8"?>
+<p:notes xmlns:a="http://schemas.openxmlformats.org/drawingml/2006/main" xmlns:p="http://schemas.openxmlformats.org/presentationml/2006/main" xmlns:r="http://schemas.openxmlformats.org/officeDocument/2006/relationships">
+  <p:cSld>
+    <p:spTree>
+      <p:nvGrpSpPr>
+        <p:cNvPr id="1" name=""/>
+        <p:cNvGrpSpPr/>
+        <p:nvPr/>
+      </p:nvGrpSpPr>
+      <p:grpSpPr>
+        <a:xfrm>
+          <a:off x="0" y="0"/>
+          <a:ext cx="0" cy="0"/>
+          <a:chOff x="0" y="0"/>
+          <a:chExt cx="0" cy="0"/>
+        </a:xfrm>
+      </p:grpSpPr>
+      <p:sp>
+        <p:nvSpPr>
+          <p:cNvPr id="2" name="Slide Image Placeholder 1"/>
+          <p:cNvSpPr>
+            <a:spLocks noGrp="1"/>
+          </p:cNvSpPr>
+          <p:nvPr>
+            <p:ph type="sldImg" idx="2"/>
+          </p:nvPr>
+        </p:nvSpPr>
+        <p:spPr/>
+      </p:sp>
+      <p:sp>
+        <p:nvSpPr>
+          <p:cNvPr id="3" name="Notes Placeholder 2"/>
+          <p:cNvSpPr>
+            <a:spLocks noGrp="1"/>
+          </p:cNvSpPr>
+          <p:nvPr>
+            <p:ph type="body" idx="3" sz="quarter"/>
+          </p:nvPr>
+        </p:nvSpPr>
+        <p:spPr/>
+        <p:txBody>
+          <a:bodyPr/>
+          <a:lstStyle/>
+          <a:p>
+            <a:r>
+              <a:t>Rafael: Por cada delito registrado hay unas 5,6 víctimas. En Bosa más de 10; en Los Mártires menos de 1. Donde hay más miedo que delito registrado, más delito queda sin registrar: correlación de 0,72, la única que sobrevive a la corrección por pruebas múltiples. El miedo de la periferia no es exagerado. (1:50-2:40)</a:t>
+            </a:r>
+          </a:p>
+        </p:txBody>
+      </p:sp>
+      <p:sp>
+        <p:nvSpPr>
+          <p:cNvPr id="4" name="Slide Number Placeholder 3"/>
+          <p:cNvSpPr>
+            <a:spLocks noGrp="1"/>
+          </p:cNvSpPr>
+          <p:nvPr>
+            <p:ph type="sldNum" idx="5" sz="quarter"/>
+          </p:nvPr>
+        </p:nvSpPr>
+        <p:spPr/>
+      </p:sp>
+    </p:spTree>
+  </p:cSld>
+  <p:clrMapOvr>
+    <a:masterClrMapping/>
+  </p:clrMapOvr>
+</p:notes>
+</file>
+
+<file path=ppt/notesSlides/notesSlide5.xml><?xml version="1.0" encoding="utf-8"?>
+<p:notes xmlns:a="http://schemas.openxmlformats.org/drawingml/2006/main" xmlns:p="http://schemas.openxmlformats.org/presentationml/2006/main" xmlns:r="http://schemas.openxmlformats.org/officeDocument/2006/relationships">
+  <p:cSld>
+    <p:spTree>
+      <p:nvGrpSpPr>
+        <p:cNvPr id="1" name=""/>
+        <p:cNvGrpSpPr/>
+        <p:nvPr/>
+      </p:nvGrpSpPr>
+      <p:grpSpPr>
+        <a:xfrm>
+          <a:off x="0" y="0"/>
+          <a:ext cx="0" cy="0"/>
+          <a:chOff x="0" y="0"/>
+          <a:chExt cx="0" cy="0"/>
+        </a:xfrm>
+      </p:grpSpPr>
+      <p:sp>
+        <p:nvSpPr>
+          <p:cNvPr id="2" name="Slide Image Placeholder 1"/>
+          <p:cNvSpPr>
+            <a:spLocks noGrp="1"/>
+          </p:cNvSpPr>
+          <p:nvPr>
+            <p:ph type="sldImg" idx="2"/>
+          </p:nvPr>
+        </p:nvSpPr>
+        <p:spPr/>
+      </p:sp>
+      <p:sp>
+        <p:nvSpPr>
+          <p:cNvPr id="3" name="Notes Placeholder 2"/>
+          <p:cNvSpPr>
+            <a:spLocks noGrp="1"/>
+          </p:cNvSpPr>
+          <p:nvPr>
+            <p:ph type="body" idx="3" sz="quarter"/>
+          </p:nvPr>
+        </p:nvSpPr>
+        <p:spPr/>
+        <p:txBody>
+          <a:bodyPr/>
+          <a:lstStyle/>
+          <a:p>
+            <a:r>
+              <a:t>Rafael: Ver atracos en el parque cercano suma 13,3 puntos; los conflictos vecinales, hasta 14,7. El hurto registrado no suma nada. Agregar el delito registrado no mejora la predicción (0,609 a 0,611); el entorno la sube a 0,78. (2:40-3:30)</a:t>
+            </a:r>
+          </a:p>
+        </p:txBody>
+      </p:sp>
+      <p:sp>
+        <p:nvSpPr>
+          <p:cNvPr id="4" name="Slide Number Placeholder 3"/>
+          <p:cNvSpPr>
+            <a:spLocks noGrp="1"/>
+          </p:cNvSpPr>
+          <p:nvPr>
+            <p:ph type="sldNum" idx="5" sz="quarter"/>
+          </p:nvPr>
+        </p:nvSpPr>
+        <p:spPr/>
+      </p:sp>
+    </p:spTree>
+  </p:cSld>
+  <p:clrMapOvr>
+    <a:masterClrMapping/>
+  </p:clrMapOvr>
+</p:notes>
+</file>
+
+<file path=ppt/notesSlides/notesSlide6.xml><?xml version="1.0" encoding="utf-8"?>
+<p:notes xmlns:a="http://schemas.openxmlformats.org/drawingml/2006/main" xmlns:p="http://schemas.openxmlformats.org/presentationml/2006/main" xmlns:r="http://schemas.openxmlformats.org/officeDocument/2006/relationships">
+  <p:cSld>
+    <p:spTree>
+      <p:nvGrpSpPr>
+        <p:cNvPr id="1" name=""/>
+        <p:cNvGrpSpPr/>
+        <p:nvPr/>
+      </p:nvGrpSpPr>
+      <p:grpSpPr>
+        <a:xfrm>
+          <a:off x="0" y="0"/>
+          <a:ext cx="0" cy="0"/>
+          <a:chOff x="0" y="0"/>
+          <a:chExt cx="0" cy="0"/>
+        </a:xfrm>
+      </p:grpSpPr>
+      <p:sp>
+        <p:nvSpPr>
+          <p:cNvPr id="2" name="Slide Image Placeholder 1"/>
+          <p:cNvSpPr>
+            <a:spLocks noGrp="1"/>
+          </p:cNvSpPr>
+          <p:nvPr>
+            <p:ph type="sldImg" idx="2"/>
+          </p:nvPr>
+        </p:nvSpPr>
+        <p:spPr/>
+      </p:sp>
+      <p:sp>
+        <p:nvSpPr>
+          <p:cNvPr id="3" name="Notes Placeholder 2"/>
+          <p:cNvSpPr>
+            <a:spLocks noGrp="1"/>
+          </p:cNvSpPr>
+          <p:nvPr>
+            <p:ph type="body" idx="3" sz="quarter"/>
+          </p:nvPr>
+        </p:nvSpPr>
+        <p:spPr/>
+        <p:txBody>
+          <a:bodyPr/>
+          <a:lstStyle/>
+          <a:p>
+            <a:r>
+              <a:t>Samuel: Las mujeres reportan menos delitos, pero a igual edad, estrato y victimización tienen 18,0 puntos más de temor al acoso sexual y 6,5 más de evitar salir de noche. El costo del miedo se paga en autonomía. (3:30-4:15)</a:t>
+            </a:r>
+          </a:p>
+        </p:txBody>
+      </p:sp>
+      <p:sp>
+        <p:nvSpPr>
+          <p:cNvPr id="4" name="Slide Number Placeholder 3"/>
+          <p:cNvSpPr>
+            <a:spLocks noGrp="1"/>
+          </p:cNvSpPr>
+          <p:nvPr>
+            <p:ph type="sldNum" idx="5" sz="quarter"/>
+          </p:nvPr>
+        </p:nvSpPr>
+        <p:spPr/>
+      </p:sp>
+    </p:spTree>
+  </p:cSld>
+  <p:clrMapOvr>
+    <a:masterClrMapping/>
+  </p:clrMapOvr>
+</p:notes>
+</file>
+
+<file path=ppt/notesSlides/notesSlide7.xml><?xml version="1.0" encoding="utf-8"?>
+<p:notes xmlns:a="http://schemas.openxmlformats.org/drawingml/2006/main" xmlns:p="http://schemas.openxmlformats.org/presentationml/2006/main" xmlns:r="http://schemas.openxmlformats.org/officeDocument/2006/relationships">
+  <p:cSld>
+    <p:spTree>
+      <p:nvGrpSpPr>
+        <p:cNvPr id="1" name=""/>
+        <p:cNvGrpSpPr/>
+        <p:nvPr/>
+      </p:nvGrpSpPr>
+      <p:grpSpPr>
+        <a:xfrm>
+          <a:off x="0" y="0"/>
+          <a:ext cx="0" cy="0"/>
+          <a:chOff x="0" y="0"/>
+          <a:chExt cx="0" cy="0"/>
+        </a:xfrm>
+      </p:grpSpPr>
+      <p:sp>
+        <p:nvSpPr>
+          <p:cNvPr id="2" name="Slide Image Placeholder 1"/>
+          <p:cNvSpPr>
+            <a:spLocks noGrp="1"/>
+          </p:cNvSpPr>
+          <p:nvPr>
+            <p:ph type="sldImg" idx="2"/>
+          </p:nvPr>
+        </p:nvSpPr>
+        <p:spPr/>
+      </p:sp>
+      <p:sp>
+        <p:nvSpPr>
+          <p:cNvPr id="3" name="Notes Placeholder 2"/>
+          <p:cNvSpPr>
+            <a:spLocks noGrp="1"/>
+          </p:cNvSpPr>
+          <p:nvPr>
+            <p:ph type="body" idx="3" sz="quarter"/>
+          </p:nvPr>
+        </p:nvSpPr>
+        <p:spPr/>
+        <p:txBody>
+          <a:bodyPr/>
+          <a:lstStyle/>
+          <a:p>
+            <a:r>
+              <a:t>Brandow: Cuatro recomendaciones, una frase cada una: medir con victimización por UPL; entornos que se sienten seguros en Usme, Ciudad Bolívar, Bosa, Kennedy, San Cristóbal; la autonomía de las mujeres como indicador; y publicar alumbrado georreferenciado y delitos por UPZ. (4:15-5:10)</a:t>
+            </a:r>
+          </a:p>
+        </p:txBody>
+      </p:sp>
+      <p:sp>
+        <p:nvSpPr>
+          <p:cNvPr id="4" name="Slide Number Placeholder 3"/>
+          <p:cNvSpPr>
+            <a:spLocks noGrp="1"/>
+          </p:cNvSpPr>
+          <p:nvPr>
+            <p:ph type="sldNum" idx="5" sz="quarter"/>
+          </p:nvPr>
+        </p:nvSpPr>
+        <p:spPr/>
+      </p:sp>
+    </p:spTree>
+  </p:cSld>
+  <p:clrMapOvr>
+    <a:masterClrMapping/>
+  </p:clrMapOvr>
+</p:notes>
+</file>
+
+<file path=ppt/notesSlides/notesSlide8.xml><?xml version="1.0" encoding="utf-8"?>
+<p:notes xmlns:a="http://schemas.openxmlformats.org/drawingml/2006/main" xmlns:p="http://schemas.openxmlformats.org/presentationml/2006/main" xmlns:r="http://schemas.openxmlformats.org/officeDocument/2006/relationships">
+  <p:cSld>
+    <p:spTree>
+      <p:nvGrpSpPr>
+        <p:cNvPr id="1" name=""/>
+        <p:cNvGrpSpPr/>
+        <p:nvPr/>
+      </p:nvGrpSpPr>
+      <p:grpSpPr>
+        <a:xfrm>
+          <a:off x="0" y="0"/>
+          <a:ext cx="0" cy="0"/>
+          <a:chOff x="0" y="0"/>
+          <a:chExt cx="0" cy="0"/>
+        </a:xfrm>
+      </p:grpSpPr>
+      <p:sp>
+        <p:nvSpPr>
+          <p:cNvPr id="2" name="Slide Image Placeholder 1"/>
+          <p:cNvSpPr>
+            <a:spLocks noGrp="1"/>
+          </p:cNvSpPr>
+          <p:nvPr>
+            <p:ph type="sldImg" idx="2"/>
+          </p:nvPr>
+        </p:nvSpPr>
+        <p:spPr/>
+      </p:sp>
+      <p:sp>
+        <p:nvSpPr>
+          <p:cNvPr id="3" name="Notes Placeholder 2"/>
+          <p:cNvSpPr>
+            <a:spLocks noGrp="1"/>
+          </p:cNvSpPr>
+          <p:nvPr>
+            <p:ph type="body" idx="3" sz="quarter"/>
+          </p:nvPr>
+        </p:nvSpPr>
+        <p:spPr/>
+        <p:txBody>
+          <a:bodyPr/>
+          <a:lstStyle/>
+          <a:p>
+            <a:r>
+              <a:t>Samuel: Proponemos el Índice de Brecha de Seguridad: se calcula cada semestre con fuentes que ya existen. Todo está en el visor (QR) y en el repositorio, reproducible de punta a punta. Si sobra tiempo, abrir el simulador. Cierre (Brandow): Bogotá ya produce los datos para cerrar esta brecha; solo hay que leerlos juntos. Gracias. (5:10-5:55)</a:t>
+            </a:r>
+          </a:p>
+        </p:txBody>
+      </p:sp>
+      <p:sp>
+        <p:nvSpPr>
+          <p:cNvPr id="4" name="Slide Number Placeholder 3"/>
+          <p:cNvSpPr>
+            <a:spLocks noGrp="1"/>
+          </p:cNvSpPr>
+          <p:nvPr>
+            <p:ph type="sldNum" idx="5" sz="quarter"/>
+          </p:nvPr>
+        </p:nvSpPr>
+        <p:spPr/>
+      </p:sp>
+    </p:spTree>
+  </p:cSld>
+  <p:clrMapOvr>
+    <a:masterClrMapping/>
+  </p:clrMapOvr>
+</p:notes>
 </file>
 
 <file path=ppt/slideLayouts/slideLayout1.xml><?xml version="1.0" encoding="utf-8"?>
@@ -3091,7 +4001,7 @@
     <p:bg>
       <p:bgPr>
         <a:solidFill>
-          <a:srgbClr val="0F1729"/>
+          <a:srgbClr val="BF0A00"/>
         </a:solidFill>
         <a:effectLst/>
       </p:bgPr>
@@ -3105,14 +4015,58 @@
       <p:grpSpPr/>
       <p:sp>
         <p:nvSpPr>
-          <p:cNvPr id="2" name="TextBox 1"/>
+          <p:cNvPr id="2" name="Rectangle 1"/>
+          <p:cNvSpPr/>
+          <p:nvPr/>
+        </p:nvSpPr>
+        <p:spPr>
+          <a:xfrm>
+            <a:off x="8778020" y="0"/>
+            <a:ext cx="3413674" cy="82296"/>
+          </a:xfrm>
+          <a:prstGeom prst="rect">
+            <a:avLst/>
+          </a:prstGeom>
+          <a:solidFill>
+            <a:srgbClr val="E9A924"/>
+          </a:solidFill>
+          <a:ln>
+            <a:noFill/>
+          </a:ln>
+          <a:effectLst/>
+        </p:spPr>
+        <p:style>
+          <a:lnRef idx="1">
+            <a:schemeClr val="accent1"/>
+          </a:lnRef>
+          <a:fillRef idx="3">
+            <a:schemeClr val="accent1"/>
+          </a:fillRef>
+          <a:effectRef idx="2">
+            <a:schemeClr val="accent1"/>
+          </a:effectRef>
+          <a:fontRef idx="minor">
+            <a:schemeClr val="lt1"/>
+          </a:fontRef>
+        </p:style>
+        <p:txBody>
+          <a:bodyPr rtlCol="0" anchor="ctr"/>
+          <a:lstStyle/>
+          <a:p>
+            <a:pPr algn="ctr"/>
+          </a:p>
+        </p:txBody>
+      </p:sp>
+      <p:sp>
+        <p:nvSpPr>
+          <p:cNvPr id="3" name="TextBox 2"/>
           <p:cNvSpPr txBox="1"/>
           <p:nvPr/>
         </p:nvSpPr>
         <p:spPr>
           <a:xfrm>
-            <a:off x="731520" y="640080"/>
-            <a:ext cx="10058400" cy="365760"/>
+            <a:off x="731520" y="731520"/>
+            <a:ext cx="10515600" cy="365760"/>
           </a:xfrm>
           <a:prstGeom prst="rect">
             <a:avLst/>
@@ -3134,9 +4088,9 @@
               </a:spcAft>
             </a:pPr>
             <a:r>
-              <a:rPr sz="1200" b="0">
-                <a:solidFill>
-                  <a:srgbClr val="A9B3C9"/>
+              <a:rPr sz="1200" b="1">
+                <a:solidFill>
+                  <a:srgbClr val="FFD98A"/>
                 </a:solidFill>
                 <a:latin typeface="Segoe UI"/>
               </a:rPr>
@@ -3147,14 +4101,119 @@
       </p:sp>
       <p:sp>
         <p:nvSpPr>
-          <p:cNvPr id="3" name="TextBox 2"/>
+          <p:cNvPr id="4" name="TextBox 3"/>
           <p:cNvSpPr txBox="1"/>
           <p:nvPr/>
         </p:nvSpPr>
         <p:spPr>
           <a:xfrm>
-            <a:off x="731520" y="1463040"/>
-            <a:ext cx="10515600" cy="1463040"/>
+            <a:off x="731520" y="1234440"/>
+            <a:ext cx="10515600" cy="2194560"/>
+          </a:xfrm>
+          <a:prstGeom prst="rect">
+            <a:avLst/>
+          </a:prstGeom>
+          <a:noFill/>
+        </p:spPr>
+        <p:txBody>
+          <a:bodyPr wrap="square" anchor="t" lIns="18288" rIns="18288">
+            <a:spAutoFit/>
+          </a:bodyPr>
+          <a:lstStyle/>
+          <a:p>
+            <a:pPr algn="l">
+              <a:lnSpc>
+                <a:spcPct val="90000"/>
+              </a:lnSpc>
+              <a:spcAft>
+                <a:spcPts val="600"/>
+              </a:spcAft>
+            </a:pPr>
+            <a:r>
+              <a:rPr sz="6800" b="0">
+                <a:solidFill>
+                  <a:srgbClr val="FFFFFF"/>
+                </a:solidFill>
+                <a:latin typeface="Segoe UI Black"/>
+              </a:rPr>
+              <a:t>El miedo</a:t>
+            </a:r>
+          </a:p>
+          <a:p>
+            <a:pPr algn="l">
+              <a:lnSpc>
+                <a:spcPct val="90000"/>
+              </a:lnSpc>
+              <a:spcAft>
+                <a:spcPts val="600"/>
+              </a:spcAft>
+            </a:pPr>
+            <a:r>
+              <a:rPr sz="6800" b="0">
+                <a:solidFill>
+                  <a:srgbClr val="E9A924"/>
+                </a:solidFill>
+                <a:latin typeface="Segoe UI Black"/>
+              </a:rPr>
+              <a:t>que no baja</a:t>
+            </a:r>
+          </a:p>
+        </p:txBody>
+      </p:sp>
+      <p:sp>
+        <p:nvSpPr>
+          <p:cNvPr id="5" name="Rectangle 4"/>
+          <p:cNvSpPr/>
+          <p:nvPr/>
+        </p:nvSpPr>
+        <p:spPr>
+          <a:xfrm>
+            <a:off x="777240" y="3520440"/>
+            <a:ext cx="1280160" cy="73152"/>
+          </a:xfrm>
+          <a:prstGeom prst="rect">
+            <a:avLst/>
+          </a:prstGeom>
+          <a:solidFill>
+            <a:srgbClr val="E9A924"/>
+          </a:solidFill>
+          <a:ln>
+            <a:noFill/>
+          </a:ln>
+          <a:effectLst/>
+        </p:spPr>
+        <p:style>
+          <a:lnRef idx="1">
+            <a:schemeClr val="accent1"/>
+          </a:lnRef>
+          <a:fillRef idx="3">
+            <a:schemeClr val="accent1"/>
+          </a:fillRef>
+          <a:effectRef idx="2">
+            <a:schemeClr val="accent1"/>
+          </a:effectRef>
+          <a:fontRef idx="minor">
+            <a:schemeClr val="lt1"/>
+          </a:fontRef>
+        </p:style>
+        <p:txBody>
+          <a:bodyPr rtlCol="0" anchor="ctr"/>
+          <a:lstStyle/>
+          <a:p>
+            <a:pPr algn="ctr"/>
+          </a:p>
+        </p:txBody>
+      </p:sp>
+      <p:sp>
+        <p:nvSpPr>
+          <p:cNvPr id="6" name="TextBox 5"/>
+          <p:cNvSpPr txBox="1"/>
+          <p:nvPr/>
+        </p:nvSpPr>
+        <p:spPr>
+          <a:xfrm>
+            <a:off x="731520" y="3794760"/>
+            <a:ext cx="9875520" cy="1280160"/>
           </a:xfrm>
           <a:prstGeom prst="rect">
             <a:avLst/>
@@ -3176,27 +4235,27 @@
               </a:spcAft>
             </a:pPr>
             <a:r>
-              <a:rPr sz="6000" b="1">
+              <a:rPr sz="2200" b="0">
                 <a:solidFill>
                   <a:srgbClr val="FFFFFF"/>
                 </a:solidFill>
                 <a:latin typeface="Segoe UI"/>
               </a:rPr>
-              <a:t>El miedo que no baja</a:t>
-            </a:r>
-          </a:p>
-        </p:txBody>
-      </p:sp>
-      <p:sp>
-        <p:nvSpPr>
-          <p:cNvPr id="4" name="TextBox 3"/>
+              <a:t>¿Por qué la inseguridad percibida no baja cuando el delito registrado sí, y en qué territorios debe intervenir primero el Distrito?</a:t>
+            </a:r>
+          </a:p>
+        </p:txBody>
+      </p:sp>
+      <p:sp>
+        <p:nvSpPr>
+          <p:cNvPr id="7" name="TextBox 6"/>
           <p:cNvSpPr txBox="1"/>
           <p:nvPr/>
         </p:nvSpPr>
         <p:spPr>
           <a:xfrm>
-            <a:off x="731520" y="2743200"/>
-            <a:ext cx="9601200" cy="1280160"/>
+            <a:off x="731520" y="5349240"/>
+            <a:ext cx="10515600" cy="914400"/>
           </a:xfrm>
           <a:prstGeom prst="rect">
             <a:avLst/>
@@ -3218,38 +4277,15 @@
               </a:spcAft>
             </a:pPr>
             <a:r>
-              <a:rPr sz="2400" b="0">
-                <a:solidFill>
-                  <a:srgbClr val="F0B04A"/>
+              <a:rPr sz="1400" b="1">
+                <a:solidFill>
+                  <a:srgbClr val="FFFFFF"/>
                 </a:solidFill>
                 <a:latin typeface="Segoe UI"/>
               </a:rPr>
-              <a:t>¿Por qué la inseguridad percibida no baja cuando el delito registrado sí, y en qué territorios debe intervenir primero el Distrito?</a:t>
-            </a:r>
-          </a:p>
-        </p:txBody>
-      </p:sp>
-      <p:sp>
-        <p:nvSpPr>
-          <p:cNvPr id="5" name="TextBox 4"/>
-          <p:cNvSpPr txBox="1"/>
-          <p:nvPr/>
-        </p:nvSpPr>
-        <p:spPr>
-          <a:xfrm>
-            <a:off x="731520" y="5029200"/>
-            <a:ext cx="10058400" cy="914400"/>
-          </a:xfrm>
-          <a:prstGeom prst="rect">
-            <a:avLst/>
-          </a:prstGeom>
-          <a:noFill/>
-        </p:spPr>
-        <p:txBody>
-          <a:bodyPr wrap="square" anchor="t" lIns="18288" rIns="18288">
-            <a:spAutoFit/>
-          </a:bodyPr>
-          <a:lstStyle/>
+              <a:t>Equipo #16 · The data squad</a:t>
+            </a:r>
+          </a:p>
           <a:p>
             <a:pPr algn="l">
               <a:lnSpc>
@@ -3260,28 +4296,9 @@
               </a:spcAft>
             </a:pPr>
             <a:r>
-              <a:rPr sz="1500" b="0">
-                <a:solidFill>
-                  <a:srgbClr val="EDF1F8"/>
-                </a:solidFill>
-                <a:latin typeface="Segoe UI"/>
-              </a:rPr>
-              <a:t>Equipo #16 The data squad</a:t>
-            </a:r>
-          </a:p>
-          <a:p>
-            <a:pPr algn="l">
-              <a:lnSpc>
-                <a:spcPct val="110000"/>
-              </a:lnSpc>
-              <a:spcAft>
-                <a:spcPts val="600"/>
-              </a:spcAft>
-            </a:pPr>
-            <a:r>
-              <a:rPr sz="1500" b="0">
-                <a:solidFill>
-                  <a:srgbClr val="EDF1F8"/>
+              <a:rPr sz="1400" b="0">
+                <a:solidFill>
+                  <a:srgbClr val="FFFFFF"/>
                 </a:solidFill>
                 <a:latin typeface="Segoe UI"/>
               </a:rPr>
@@ -3318,13 +4335,101 @@
       <p:grpSpPr/>
       <p:sp>
         <p:nvSpPr>
-          <p:cNvPr id="2" name="TextBox 1"/>
+          <p:cNvPr id="2" name="Rectangle 1"/>
+          <p:cNvSpPr/>
+          <p:nvPr/>
+        </p:nvSpPr>
+        <p:spPr>
+          <a:xfrm>
+            <a:off x="0" y="0"/>
+            <a:ext cx="8778020" cy="82296"/>
+          </a:xfrm>
+          <a:prstGeom prst="rect">
+            <a:avLst/>
+          </a:prstGeom>
+          <a:solidFill>
+            <a:srgbClr val="BF0A00"/>
+          </a:solidFill>
+          <a:ln>
+            <a:noFill/>
+          </a:ln>
+          <a:effectLst/>
+        </p:spPr>
+        <p:style>
+          <a:lnRef idx="1">
+            <a:schemeClr val="accent1"/>
+          </a:lnRef>
+          <a:fillRef idx="3">
+            <a:schemeClr val="accent1"/>
+          </a:fillRef>
+          <a:effectRef idx="2">
+            <a:schemeClr val="accent1"/>
+          </a:effectRef>
+          <a:fontRef idx="minor">
+            <a:schemeClr val="lt1"/>
+          </a:fontRef>
+        </p:style>
+        <p:txBody>
+          <a:bodyPr rtlCol="0" anchor="ctr"/>
+          <a:lstStyle/>
+          <a:p>
+            <a:pPr algn="ctr"/>
+          </a:p>
+        </p:txBody>
+      </p:sp>
+      <p:sp>
+        <p:nvSpPr>
+          <p:cNvPr id="3" name="Rectangle 2"/>
+          <p:cNvSpPr/>
+          <p:nvPr/>
+        </p:nvSpPr>
+        <p:spPr>
+          <a:xfrm>
+            <a:off x="8778020" y="0"/>
+            <a:ext cx="3413674" cy="82296"/>
+          </a:xfrm>
+          <a:prstGeom prst="rect">
+            <a:avLst/>
+          </a:prstGeom>
+          <a:solidFill>
+            <a:srgbClr val="E9A924"/>
+          </a:solidFill>
+          <a:ln>
+            <a:noFill/>
+          </a:ln>
+          <a:effectLst/>
+        </p:spPr>
+        <p:style>
+          <a:lnRef idx="1">
+            <a:schemeClr val="accent1"/>
+          </a:lnRef>
+          <a:fillRef idx="3">
+            <a:schemeClr val="accent1"/>
+          </a:fillRef>
+          <a:effectRef idx="2">
+            <a:schemeClr val="accent1"/>
+          </a:effectRef>
+          <a:fontRef idx="minor">
+            <a:schemeClr val="lt1"/>
+          </a:fontRef>
+        </p:style>
+        <p:txBody>
+          <a:bodyPr rtlCol="0" anchor="ctr"/>
+          <a:lstStyle/>
+          <a:p>
+            <a:pPr algn="ctr"/>
+          </a:p>
+        </p:txBody>
+      </p:sp>
+      <p:sp>
+        <p:nvSpPr>
+          <p:cNvPr id="4" name="TextBox 3"/>
           <p:cNvSpPr txBox="1"/>
           <p:nvPr/>
         </p:nvSpPr>
         <p:spPr>
           <a:xfrm>
-            <a:off x="548640" y="320040"/>
+            <a:off x="548640" y="347472"/>
             <a:ext cx="8229600" cy="320040"/>
           </a:xfrm>
           <a:prstGeom prst="rect">
@@ -3347,9 +4452,9 @@
               </a:spcAft>
             </a:pPr>
             <a:r>
-              <a:rPr sz="1100" b="0">
-                <a:solidFill>
-                  <a:srgbClr val="475069"/>
+              <a:rPr sz="1100" b="1">
+                <a:solidFill>
+                  <a:srgbClr val="BF0A00"/>
                 </a:solidFill>
                 <a:latin typeface="Segoe UI"/>
               </a:rPr>
@@ -3360,13 +4465,13 @@
       </p:sp>
       <p:sp>
         <p:nvSpPr>
-          <p:cNvPr id="3" name="TextBox 2"/>
+          <p:cNvPr id="5" name="TextBox 4"/>
           <p:cNvSpPr txBox="1"/>
           <p:nvPr/>
         </p:nvSpPr>
         <p:spPr>
           <a:xfrm>
-            <a:off x="548640" y="594360"/>
+            <a:off x="548640" y="621792"/>
             <a:ext cx="11064240" cy="822960"/>
           </a:xfrm>
           <a:prstGeom prst="rect">
@@ -3389,11 +4494,11 @@
               </a:spcAft>
             </a:pPr>
             <a:r>
-              <a:rPr sz="2600" b="1">
-                <a:solidFill>
-                  <a:srgbClr val="0F1729"/>
-                </a:solidFill>
-                <a:latin typeface="Segoe UI"/>
+              <a:rPr sz="2700" b="0">
+                <a:solidFill>
+                  <a:srgbClr val="BF0A00"/>
+                </a:solidFill>
+                <a:latin typeface="Segoe UI Black"/>
               </a:rPr>
               <a:t>Bogotá registra menos delitos, pero no se siente más segura</a:t>
             </a:r>
@@ -3402,7 +4507,7 @@
       </p:sp>
       <p:sp>
         <p:nvSpPr>
-          <p:cNvPr id="4" name="TextBox 3"/>
+          <p:cNvPr id="6" name="TextBox 5"/>
           <p:cNvSpPr txBox="1"/>
           <p:nvPr/>
         </p:nvSpPr>
@@ -3433,7 +4538,7 @@
             <a:r>
               <a:rPr sz="1000" b="0">
                 <a:solidFill>
-                  <a:srgbClr val="475069"/>
+                  <a:srgbClr val="767676"/>
                 </a:solidFill>
                 <a:latin typeface="Segoe UI"/>
               </a:rPr>
@@ -3444,14 +4549,14 @@
       </p:sp>
       <p:sp>
         <p:nvSpPr>
-          <p:cNvPr id="5" name="TextBox 4"/>
+          <p:cNvPr id="7" name="TextBox 6"/>
           <p:cNvSpPr txBox="1"/>
           <p:nvPr/>
         </p:nvSpPr>
         <p:spPr>
           <a:xfrm>
             <a:off x="548640" y="6400800"/>
-            <a:ext cx="7315200" cy="274320"/>
+            <a:ext cx="8229600" cy="274320"/>
           </a:xfrm>
           <a:prstGeom prst="rect">
             <a:avLst/>
@@ -3475,25 +4580,25 @@
             <a:r>
               <a:rPr sz="1000" b="0">
                 <a:solidFill>
-                  <a:srgbClr val="475069"/>
+                  <a:srgbClr val="767676"/>
                 </a:solidFill>
                 <a:latin typeface="Segoe UI"/>
               </a:rPr>
-              <a:t>El miedo que no baja · The data squad · DataJam 5</a:t>
-            </a:r>
-          </a:p>
-        </p:txBody>
-      </p:sp>
-      <p:sp>
-        <p:nvSpPr>
-          <p:cNvPr id="6" name="Rounded Rectangle 5"/>
+              <a:t>El miedo que no baja · The data squad · Bogotá DataJam 5</a:t>
+            </a:r>
+          </a:p>
+        </p:txBody>
+      </p:sp>
+      <p:sp>
+        <p:nvSpPr>
+          <p:cNvPr id="8" name="Rounded Rectangle 7"/>
           <p:cNvSpPr/>
           <p:nvPr/>
         </p:nvSpPr>
         <p:spPr>
           <a:xfrm>
             <a:off x="548640" y="1645920"/>
-            <a:ext cx="3566160" cy="2103120"/>
+            <a:ext cx="3566160" cy="2148840"/>
           </a:xfrm>
           <a:prstGeom prst="roundRect">
             <a:avLst>
@@ -3501,7 +4606,7 @@
             </a:avLst>
           </a:prstGeom>
           <a:solidFill>
-            <a:srgbClr val="F3F5F9"/>
+            <a:srgbClr val="F2F2F2"/>
           </a:solidFill>
           <a:ln>
             <a:noFill/>
@@ -3532,14 +4637,58 @@
       </p:sp>
       <p:sp>
         <p:nvSpPr>
-          <p:cNvPr id="7" name="TextBox 6"/>
+          <p:cNvPr id="9" name="Rectangle 8"/>
+          <p:cNvSpPr/>
+          <p:nvPr/>
+        </p:nvSpPr>
+        <p:spPr>
+          <a:xfrm>
+            <a:off x="548640" y="1645920"/>
+            <a:ext cx="3566160" cy="82296"/>
+          </a:xfrm>
+          <a:prstGeom prst="rect">
+            <a:avLst/>
+          </a:prstGeom>
+          <a:solidFill>
+            <a:srgbClr val="3366CC"/>
+          </a:solidFill>
+          <a:ln>
+            <a:noFill/>
+          </a:ln>
+          <a:effectLst/>
+        </p:spPr>
+        <p:style>
+          <a:lnRef idx="1">
+            <a:schemeClr val="accent1"/>
+          </a:lnRef>
+          <a:fillRef idx="3">
+            <a:schemeClr val="accent1"/>
+          </a:fillRef>
+          <a:effectRef idx="2">
+            <a:schemeClr val="accent1"/>
+          </a:effectRef>
+          <a:fontRef idx="minor">
+            <a:schemeClr val="lt1"/>
+          </a:fontRef>
+        </p:style>
+        <p:txBody>
+          <a:bodyPr rtlCol="0" anchor="ctr"/>
+          <a:lstStyle/>
+          <a:p>
+            <a:pPr algn="ctr"/>
+          </a:p>
+        </p:txBody>
+      </p:sp>
+      <p:sp>
+        <p:nvSpPr>
+          <p:cNvPr id="10" name="TextBox 9"/>
           <p:cNvSpPr txBox="1"/>
           <p:nvPr/>
         </p:nvSpPr>
         <p:spPr>
           <a:xfrm>
-            <a:off x="777240" y="1783080"/>
-            <a:ext cx="3200400" cy="365760"/>
+            <a:off x="777240" y="1847088"/>
+            <a:ext cx="3108960" cy="320040"/>
           </a:xfrm>
           <a:prstGeom prst="rect">
             <a:avLst/>
@@ -3561,9 +4710,9 @@
               </a:spcAft>
             </a:pPr>
             <a:r>
-              <a:rPr sz="1100" b="0">
-                <a:solidFill>
-                  <a:srgbClr val="2F63D6"/>
+              <a:rPr sz="1050" b="1">
+                <a:solidFill>
+                  <a:srgbClr val="1F4A9E"/>
                 </a:solidFill>
                 <a:latin typeface="Segoe UI"/>
               </a:rPr>
@@ -3574,14 +4723,14 @@
       </p:sp>
       <p:sp>
         <p:nvSpPr>
-          <p:cNvPr id="8" name="TextBox 7"/>
+          <p:cNvPr id="11" name="TextBox 10"/>
           <p:cNvSpPr txBox="1"/>
           <p:nvPr/>
         </p:nvSpPr>
         <p:spPr>
           <a:xfrm>
             <a:off x="777240" y="2103120"/>
-            <a:ext cx="3200400" cy="914400"/>
+            <a:ext cx="3108960" cy="914400"/>
           </a:xfrm>
           <a:prstGeom prst="rect">
             <a:avLst/>
@@ -3603,27 +4752,27 @@
               </a:spcAft>
             </a:pPr>
             <a:r>
-              <a:rPr sz="5400" b="1">
-                <a:solidFill>
-                  <a:srgbClr val="2F63D6"/>
-                </a:solidFill>
-                <a:latin typeface="Segoe UI"/>
+              <a:rPr sz="5000" b="0">
+                <a:solidFill>
+                  <a:srgbClr val="1F4A9E"/>
+                </a:solidFill>
+                <a:latin typeface="Segoe UI Black"/>
               </a:rPr>
-              <a:t>-65 %</a:t>
-            </a:r>
-          </a:p>
-        </p:txBody>
-      </p:sp>
-      <p:sp>
-        <p:nvSpPr>
-          <p:cNvPr id="9" name="TextBox 8"/>
+              <a:t>−65 %</a:t>
+            </a:r>
+          </a:p>
+        </p:txBody>
+      </p:sp>
+      <p:sp>
+        <p:nvSpPr>
+          <p:cNvPr id="12" name="TextBox 11"/>
           <p:cNvSpPr txBox="1"/>
           <p:nvPr/>
         </p:nvSpPr>
         <p:spPr>
           <a:xfrm>
             <a:off x="777240" y="3017520"/>
-            <a:ext cx="3200400" cy="731520"/>
+            <a:ext cx="3108960" cy="731520"/>
           </a:xfrm>
           <a:prstGeom prst="rect">
             <a:avLst/>
@@ -3645,27 +4794,27 @@
               </a:spcAft>
             </a:pPr>
             <a:r>
-              <a:rPr sz="1300" b="0">
-                <a:solidFill>
-                  <a:srgbClr val="475069"/>
+              <a:rPr sz="1250" b="0">
+                <a:solidFill>
+                  <a:srgbClr val="4B4B4B"/>
                 </a:solidFill>
                 <a:latin typeface="Segoe UI"/>
               </a:rPr>
-              <a:t>hurto a personas, enero-agosto 2019 → 2026</a:t>
-            </a:r>
-          </a:p>
-        </p:txBody>
-      </p:sp>
-      <p:sp>
-        <p:nvSpPr>
-          <p:cNvPr id="10" name="Rounded Rectangle 9"/>
+              <a:t>hurto a personas registrado, enero-agosto 2019 → 2026</a:t>
+            </a:r>
+          </a:p>
+        </p:txBody>
+      </p:sp>
+      <p:sp>
+        <p:nvSpPr>
+          <p:cNvPr id="13" name="Rounded Rectangle 12"/>
           <p:cNvSpPr/>
           <p:nvPr/>
         </p:nvSpPr>
         <p:spPr>
           <a:xfrm>
-            <a:off x="548640" y="3931920"/>
-            <a:ext cx="3566160" cy="2103120"/>
+            <a:off x="548640" y="3977639"/>
+            <a:ext cx="3566160" cy="2148840"/>
           </a:xfrm>
           <a:prstGeom prst="roundRect">
             <a:avLst>
@@ -3673,7 +4822,7 @@
             </a:avLst>
           </a:prstGeom>
           <a:solidFill>
-            <a:srgbClr val="F3F5F9"/>
+            <a:srgbClr val="F2F2F2"/>
           </a:solidFill>
           <a:ln>
             <a:noFill/>
@@ -3704,14 +4853,58 @@
       </p:sp>
       <p:sp>
         <p:nvSpPr>
-          <p:cNvPr id="11" name="TextBox 10"/>
+          <p:cNvPr id="14" name="Rectangle 13"/>
+          <p:cNvSpPr/>
+          <p:nvPr/>
+        </p:nvSpPr>
+        <p:spPr>
+          <a:xfrm>
+            <a:off x="548640" y="3977639"/>
+            <a:ext cx="3566160" cy="82296"/>
+          </a:xfrm>
+          <a:prstGeom prst="rect">
+            <a:avLst/>
+          </a:prstGeom>
+          <a:solidFill>
+            <a:srgbClr val="D99A16"/>
+          </a:solidFill>
+          <a:ln>
+            <a:noFill/>
+          </a:ln>
+          <a:effectLst/>
+        </p:spPr>
+        <p:style>
+          <a:lnRef idx="1">
+            <a:schemeClr val="accent1"/>
+          </a:lnRef>
+          <a:fillRef idx="3">
+            <a:schemeClr val="accent1"/>
+          </a:fillRef>
+          <a:effectRef idx="2">
+            <a:schemeClr val="accent1"/>
+          </a:effectRef>
+          <a:fontRef idx="minor">
+            <a:schemeClr val="lt1"/>
+          </a:fontRef>
+        </p:style>
+        <p:txBody>
+          <a:bodyPr rtlCol="0" anchor="ctr"/>
+          <a:lstStyle/>
+          <a:p>
+            <a:pPr algn="ctr"/>
+          </a:p>
+        </p:txBody>
+      </p:sp>
+      <p:sp>
+        <p:nvSpPr>
+          <p:cNvPr id="15" name="TextBox 14"/>
           <p:cNvSpPr txBox="1"/>
           <p:nvPr/>
         </p:nvSpPr>
         <p:spPr>
           <a:xfrm>
-            <a:off x="777240" y="4069080"/>
-            <a:ext cx="3200400" cy="365760"/>
+            <a:off x="777240" y="4178807"/>
+            <a:ext cx="3108960" cy="320040"/>
           </a:xfrm>
           <a:prstGeom prst="rect">
             <a:avLst/>
@@ -3733,9 +4926,9 @@
               </a:spcAft>
             </a:pPr>
             <a:r>
-              <a:rPr sz="1100" b="0">
-                <a:solidFill>
-                  <a:srgbClr val="8A5300"/>
+              <a:rPr sz="1050" b="1">
+                <a:solidFill>
+                  <a:srgbClr val="8A5A00"/>
                 </a:solidFill>
                 <a:latin typeface="Segoe UI"/>
               </a:rPr>
@@ -3746,14 +4939,14 @@
       </p:sp>
       <p:sp>
         <p:nvSpPr>
-          <p:cNvPr id="12" name="TextBox 11"/>
+          <p:cNvPr id="16" name="TextBox 15"/>
           <p:cNvSpPr txBox="1"/>
           <p:nvPr/>
         </p:nvSpPr>
         <p:spPr>
           <a:xfrm>
-            <a:off x="777240" y="4389120"/>
-            <a:ext cx="3200400" cy="914400"/>
+            <a:off x="777240" y="4434840"/>
+            <a:ext cx="3108960" cy="914400"/>
           </a:xfrm>
           <a:prstGeom prst="rect">
             <a:avLst/>
@@ -3775,11 +4968,11 @@
               </a:spcAft>
             </a:pPr>
             <a:r>
-              <a:rPr sz="5400" b="1">
-                <a:solidFill>
-                  <a:srgbClr val="8A5300"/>
-                </a:solidFill>
-                <a:latin typeface="Segoe UI"/>
+              <a:rPr sz="5000" b="0">
+                <a:solidFill>
+                  <a:srgbClr val="8A5A00"/>
+                </a:solidFill>
+                <a:latin typeface="Segoe UI Black"/>
               </a:rPr>
               <a:t>74 %</a:t>
             </a:r>
@@ -3788,14 +4981,14 @@
       </p:sp>
       <p:sp>
         <p:nvSpPr>
-          <p:cNvPr id="13" name="TextBox 12"/>
+          <p:cNvPr id="17" name="TextBox 16"/>
           <p:cNvSpPr txBox="1"/>
           <p:nvPr/>
         </p:nvSpPr>
         <p:spPr>
           <a:xfrm>
-            <a:off x="777240" y="5303520"/>
-            <a:ext cx="3200400" cy="731520"/>
+            <a:off x="777240" y="5349240"/>
+            <a:ext cx="3108960" cy="731520"/>
           </a:xfrm>
           <a:prstGeom prst="rect">
             <a:avLst/>
@@ -3817,9 +5010,9 @@
               </a:spcAft>
             </a:pPr>
             <a:r>
-              <a:rPr sz="1300" b="0">
-                <a:solidFill>
-                  <a:srgbClr val="475069"/>
+              <a:rPr sz="1250" b="0">
+                <a:solidFill>
+                  <a:srgbClr val="4B4B4B"/>
                 </a:solidFill>
                 <a:latin typeface="Segoe UI"/>
               </a:rPr>
@@ -3830,7 +5023,7 @@
       </p:sp>
       <p:pic>
         <p:nvPicPr>
-          <p:cNvPr id="14" name="Picture 13" descr="fig1_serie_delitos.png"/>
+          <p:cNvPr id="18" name="Picture 17" descr="fig1_serie_delitos.png"/>
           <p:cNvPicPr>
             <a:picLocks noChangeAspect="1"/>
           </p:cNvPicPr>
@@ -3845,7 +5038,7 @@
         <p:spPr>
           <a:xfrm>
             <a:off x="4480560" y="1645920"/>
-            <a:ext cx="7223760" cy="3883013"/>
+            <a:ext cx="7223760" cy="4166778"/>
           </a:xfrm>
           <a:prstGeom prst="rect">
             <a:avLst/>
@@ -3880,13 +5073,101 @@
       <p:grpSpPr/>
       <p:sp>
         <p:nvSpPr>
-          <p:cNvPr id="2" name="TextBox 1"/>
+          <p:cNvPr id="2" name="Rectangle 1"/>
+          <p:cNvSpPr/>
+          <p:nvPr/>
+        </p:nvSpPr>
+        <p:spPr>
+          <a:xfrm>
+            <a:off x="0" y="0"/>
+            <a:ext cx="8778020" cy="82296"/>
+          </a:xfrm>
+          <a:prstGeom prst="rect">
+            <a:avLst/>
+          </a:prstGeom>
+          <a:solidFill>
+            <a:srgbClr val="BF0A00"/>
+          </a:solidFill>
+          <a:ln>
+            <a:noFill/>
+          </a:ln>
+          <a:effectLst/>
+        </p:spPr>
+        <p:style>
+          <a:lnRef idx="1">
+            <a:schemeClr val="accent1"/>
+          </a:lnRef>
+          <a:fillRef idx="3">
+            <a:schemeClr val="accent1"/>
+          </a:fillRef>
+          <a:effectRef idx="2">
+            <a:schemeClr val="accent1"/>
+          </a:effectRef>
+          <a:fontRef idx="minor">
+            <a:schemeClr val="lt1"/>
+          </a:fontRef>
+        </p:style>
+        <p:txBody>
+          <a:bodyPr rtlCol="0" anchor="ctr"/>
+          <a:lstStyle/>
+          <a:p>
+            <a:pPr algn="ctr"/>
+          </a:p>
+        </p:txBody>
+      </p:sp>
+      <p:sp>
+        <p:nvSpPr>
+          <p:cNvPr id="3" name="Rectangle 2"/>
+          <p:cNvSpPr/>
+          <p:nvPr/>
+        </p:nvSpPr>
+        <p:spPr>
+          <a:xfrm>
+            <a:off x="8778020" y="0"/>
+            <a:ext cx="3413674" cy="82296"/>
+          </a:xfrm>
+          <a:prstGeom prst="rect">
+            <a:avLst/>
+          </a:prstGeom>
+          <a:solidFill>
+            <a:srgbClr val="E9A924"/>
+          </a:solidFill>
+          <a:ln>
+            <a:noFill/>
+          </a:ln>
+          <a:effectLst/>
+        </p:spPr>
+        <p:style>
+          <a:lnRef idx="1">
+            <a:schemeClr val="accent1"/>
+          </a:lnRef>
+          <a:fillRef idx="3">
+            <a:schemeClr val="accent1"/>
+          </a:fillRef>
+          <a:effectRef idx="2">
+            <a:schemeClr val="accent1"/>
+          </a:effectRef>
+          <a:fontRef idx="minor">
+            <a:schemeClr val="lt1"/>
+          </a:fontRef>
+        </p:style>
+        <p:txBody>
+          <a:bodyPr rtlCol="0" anchor="ctr"/>
+          <a:lstStyle/>
+          <a:p>
+            <a:pPr algn="ctr"/>
+          </a:p>
+        </p:txBody>
+      </p:sp>
+      <p:sp>
+        <p:nvSpPr>
+          <p:cNvPr id="4" name="TextBox 3"/>
           <p:cNvSpPr txBox="1"/>
           <p:nvPr/>
         </p:nvSpPr>
         <p:spPr>
           <a:xfrm>
-            <a:off x="548640" y="320040"/>
+            <a:off x="548640" y="347472"/>
             <a:ext cx="8229600" cy="320040"/>
           </a:xfrm>
           <a:prstGeom prst="rect">
@@ -3909,9 +5190,9 @@
               </a:spcAft>
             </a:pPr>
             <a:r>
-              <a:rPr sz="1100" b="0">
-                <a:solidFill>
-                  <a:srgbClr val="475069"/>
+              <a:rPr sz="1100" b="1">
+                <a:solidFill>
+                  <a:srgbClr val="BF0A00"/>
                 </a:solidFill>
                 <a:latin typeface="Segoe UI"/>
               </a:rPr>
@@ -3922,13 +5203,13 @@
       </p:sp>
       <p:sp>
         <p:nvSpPr>
-          <p:cNvPr id="3" name="TextBox 2"/>
+          <p:cNvPr id="5" name="TextBox 4"/>
           <p:cNvSpPr txBox="1"/>
           <p:nvPr/>
         </p:nvSpPr>
         <p:spPr>
           <a:xfrm>
-            <a:off x="548640" y="594360"/>
+            <a:off x="548640" y="621792"/>
             <a:ext cx="11064240" cy="822960"/>
           </a:xfrm>
           <a:prstGeom prst="rect">
@@ -3951,11 +5232,11 @@
               </a:spcAft>
             </a:pPr>
             <a:r>
-              <a:rPr sz="2600" b="1">
-                <a:solidFill>
-                  <a:srgbClr val="0F1729"/>
-                </a:solidFill>
-                <a:latin typeface="Segoe UI"/>
+              <a:rPr sz="2700" b="0">
+                <a:solidFill>
+                  <a:srgbClr val="BF0A00"/>
+                </a:solidFill>
+                <a:latin typeface="Segoe UI Black"/>
               </a:rPr>
               <a:t>Siete fuentes, una llave territorial y una escalera analítica</a:t>
             </a:r>
@@ -3964,7 +5245,7 @@
       </p:sp>
       <p:sp>
         <p:nvSpPr>
-          <p:cNvPr id="4" name="TextBox 3"/>
+          <p:cNvPr id="6" name="TextBox 5"/>
           <p:cNvSpPr txBox="1"/>
           <p:nvPr/>
         </p:nvSpPr>
@@ -3995,7 +5276,7 @@
             <a:r>
               <a:rPr sz="1000" b="0">
                 <a:solidFill>
-                  <a:srgbClr val="475069"/>
+                  <a:srgbClr val="767676"/>
                 </a:solidFill>
                 <a:latin typeface="Segoe UI"/>
               </a:rPr>
@@ -4006,14 +5287,14 @@
       </p:sp>
       <p:sp>
         <p:nvSpPr>
-          <p:cNvPr id="5" name="TextBox 4"/>
+          <p:cNvPr id="7" name="TextBox 6"/>
           <p:cNvSpPr txBox="1"/>
           <p:nvPr/>
         </p:nvSpPr>
         <p:spPr>
           <a:xfrm>
             <a:off x="548640" y="6400800"/>
-            <a:ext cx="7315200" cy="274320"/>
+            <a:ext cx="8229600" cy="274320"/>
           </a:xfrm>
           <a:prstGeom prst="rect">
             <a:avLst/>
@@ -4037,25 +5318,25 @@
             <a:r>
               <a:rPr sz="1000" b="0">
                 <a:solidFill>
-                  <a:srgbClr val="475069"/>
+                  <a:srgbClr val="767676"/>
                 </a:solidFill>
                 <a:latin typeface="Segoe UI"/>
               </a:rPr>
-              <a:t>El miedo que no baja · The data squad · DataJam 5</a:t>
-            </a:r>
-          </a:p>
-        </p:txBody>
-      </p:sp>
-      <p:sp>
-        <p:nvSpPr>
-          <p:cNvPr id="6" name="Rounded Rectangle 5"/>
+              <a:t>El miedo que no baja · The data squad · Bogotá DataJam 5</a:t>
+            </a:r>
+          </a:p>
+        </p:txBody>
+      </p:sp>
+      <p:sp>
+        <p:nvSpPr>
+          <p:cNvPr id="8" name="Rounded Rectangle 7"/>
           <p:cNvSpPr/>
           <p:nvPr/>
         </p:nvSpPr>
         <p:spPr>
           <a:xfrm>
-            <a:off x="548640" y="1737360"/>
-            <a:ext cx="5120640" cy="713232"/>
+            <a:off x="548640" y="1691640"/>
+            <a:ext cx="5120640" cy="731520"/>
           </a:xfrm>
           <a:prstGeom prst="roundRect">
             <a:avLst>
@@ -4063,7 +5344,7 @@
             </a:avLst>
           </a:prstGeom>
           <a:solidFill>
-            <a:srgbClr val="F3F5F9"/>
+            <a:srgbClr val="F2F2F2"/>
           </a:solidFill>
           <a:ln>
             <a:noFill/>
@@ -4094,14 +5375,58 @@
       </p:sp>
       <p:sp>
         <p:nvSpPr>
-          <p:cNvPr id="7" name="TextBox 6"/>
+          <p:cNvPr id="9" name="Rectangle 8"/>
+          <p:cNvSpPr/>
+          <p:nvPr/>
+        </p:nvSpPr>
+        <p:spPr>
+          <a:xfrm>
+            <a:off x="548640" y="1691640"/>
+            <a:ext cx="82296" cy="731520"/>
+          </a:xfrm>
+          <a:prstGeom prst="rect">
+            <a:avLst/>
+          </a:prstGeom>
+          <a:solidFill>
+            <a:srgbClr val="3366CC"/>
+          </a:solidFill>
+          <a:ln>
+            <a:noFill/>
+          </a:ln>
+          <a:effectLst/>
+        </p:spPr>
+        <p:style>
+          <a:lnRef idx="1">
+            <a:schemeClr val="accent1"/>
+          </a:lnRef>
+          <a:fillRef idx="3">
+            <a:schemeClr val="accent1"/>
+          </a:fillRef>
+          <a:effectRef idx="2">
+            <a:schemeClr val="accent1"/>
+          </a:effectRef>
+          <a:fontRef idx="minor">
+            <a:schemeClr val="lt1"/>
+          </a:fontRef>
+        </p:style>
+        <p:txBody>
+          <a:bodyPr rtlCol="0" anchor="ctr"/>
+          <a:lstStyle/>
+          <a:p>
+            <a:pPr algn="ctr"/>
+          </a:p>
+        </p:txBody>
+      </p:sp>
+      <p:sp>
+        <p:nvSpPr>
+          <p:cNvPr id="10" name="TextBox 9"/>
           <p:cNvSpPr txBox="1"/>
           <p:nvPr/>
         </p:nvSpPr>
         <p:spPr>
           <a:xfrm>
-            <a:off x="731520" y="1810512"/>
-            <a:ext cx="4754880" cy="274320"/>
+            <a:off x="822960" y="1764792"/>
+            <a:ext cx="4663440" cy="274320"/>
           </a:xfrm>
           <a:prstGeom prst="rect">
             <a:avLst/>
@@ -4125,7 +5450,7 @@
             <a:r>
               <a:rPr sz="1300" b="1">
                 <a:solidFill>
-                  <a:srgbClr val="2F63D6"/>
+                  <a:srgbClr val="1E1E1E"/>
                 </a:solidFill>
                 <a:latin typeface="Segoe UI"/>
               </a:rPr>
@@ -4136,14 +5461,14 @@
       </p:sp>
       <p:sp>
         <p:nvSpPr>
-          <p:cNvPr id="8" name="TextBox 7"/>
+          <p:cNvPr id="11" name="TextBox 10"/>
           <p:cNvSpPr txBox="1"/>
           <p:nvPr/>
         </p:nvSpPr>
         <p:spPr>
           <a:xfrm>
-            <a:off x="731520" y="2084831"/>
-            <a:ext cx="4754880" cy="365760"/>
+            <a:off x="822960" y="2057400"/>
+            <a:ext cx="4663440" cy="365760"/>
           </a:xfrm>
           <a:prstGeom prst="rect">
             <a:avLst/>
@@ -4167,7 +5492,7 @@
             <a:r>
               <a:rPr sz="1200" b="0">
                 <a:solidFill>
-                  <a:srgbClr val="475069"/>
+                  <a:srgbClr val="4B4B4B"/>
                 </a:solidFill>
                 <a:latin typeface="Segoe UI"/>
               </a:rPr>
@@ -4178,14 +5503,14 @@
       </p:sp>
       <p:sp>
         <p:nvSpPr>
-          <p:cNvPr id="9" name="Rounded Rectangle 8"/>
+          <p:cNvPr id="12" name="Rounded Rectangle 11"/>
           <p:cNvSpPr/>
           <p:nvPr/>
         </p:nvSpPr>
         <p:spPr>
           <a:xfrm>
-            <a:off x="548640" y="2578608"/>
-            <a:ext cx="5120640" cy="713232"/>
+            <a:off x="548640" y="2560320"/>
+            <a:ext cx="5120640" cy="731520"/>
           </a:xfrm>
           <a:prstGeom prst="roundRect">
             <a:avLst>
@@ -4193,7 +5518,7 @@
             </a:avLst>
           </a:prstGeom>
           <a:solidFill>
-            <a:srgbClr val="F3F5F9"/>
+            <a:srgbClr val="F2F2F2"/>
           </a:solidFill>
           <a:ln>
             <a:noFill/>
@@ -4224,14 +5549,58 @@
       </p:sp>
       <p:sp>
         <p:nvSpPr>
-          <p:cNvPr id="10" name="TextBox 9"/>
+          <p:cNvPr id="13" name="Rectangle 12"/>
+          <p:cNvSpPr/>
+          <p:nvPr/>
+        </p:nvSpPr>
+        <p:spPr>
+          <a:xfrm>
+            <a:off x="548640" y="2560320"/>
+            <a:ext cx="82296" cy="731520"/>
+          </a:xfrm>
+          <a:prstGeom prst="rect">
+            <a:avLst/>
+          </a:prstGeom>
+          <a:solidFill>
+            <a:srgbClr val="3366CC"/>
+          </a:solidFill>
+          <a:ln>
+            <a:noFill/>
+          </a:ln>
+          <a:effectLst/>
+        </p:spPr>
+        <p:style>
+          <a:lnRef idx="1">
+            <a:schemeClr val="accent1"/>
+          </a:lnRef>
+          <a:fillRef idx="3">
+            <a:schemeClr val="accent1"/>
+          </a:fillRef>
+          <a:effectRef idx="2">
+            <a:schemeClr val="accent1"/>
+          </a:effectRef>
+          <a:fontRef idx="minor">
+            <a:schemeClr val="lt1"/>
+          </a:fontRef>
+        </p:style>
+        <p:txBody>
+          <a:bodyPr rtlCol="0" anchor="ctr"/>
+          <a:lstStyle/>
+          <a:p>
+            <a:pPr algn="ctr"/>
+          </a:p>
+        </p:txBody>
+      </p:sp>
+      <p:sp>
+        <p:nvSpPr>
+          <p:cNvPr id="14" name="TextBox 13"/>
           <p:cNvSpPr txBox="1"/>
           <p:nvPr/>
         </p:nvSpPr>
         <p:spPr>
           <a:xfrm>
-            <a:off x="731520" y="2651760"/>
-            <a:ext cx="4754880" cy="274320"/>
+            <a:off x="822960" y="2633472"/>
+            <a:ext cx="4663440" cy="274320"/>
           </a:xfrm>
           <a:prstGeom prst="rect">
             <a:avLst/>
@@ -4255,7 +5624,7 @@
             <a:r>
               <a:rPr sz="1300" b="1">
                 <a:solidFill>
-                  <a:srgbClr val="2F63D6"/>
+                  <a:srgbClr val="1E1E1E"/>
                 </a:solidFill>
                 <a:latin typeface="Segoe UI"/>
               </a:rPr>
@@ -4266,14 +5635,14 @@
       </p:sp>
       <p:sp>
         <p:nvSpPr>
-          <p:cNvPr id="11" name="TextBox 10"/>
+          <p:cNvPr id="15" name="TextBox 14"/>
           <p:cNvSpPr txBox="1"/>
           <p:nvPr/>
         </p:nvSpPr>
         <p:spPr>
           <a:xfrm>
-            <a:off x="731520" y="2926079"/>
-            <a:ext cx="4754880" cy="365760"/>
+            <a:off x="822960" y="2926079"/>
+            <a:ext cx="4663440" cy="365760"/>
           </a:xfrm>
           <a:prstGeom prst="rect">
             <a:avLst/>
@@ -4297,7 +5666,7 @@
             <a:r>
               <a:rPr sz="1200" b="0">
                 <a:solidFill>
-                  <a:srgbClr val="475069"/>
+                  <a:srgbClr val="4B4B4B"/>
                 </a:solidFill>
                 <a:latin typeface="Segoe UI"/>
               </a:rPr>
@@ -4308,14 +5677,14 @@
       </p:sp>
       <p:sp>
         <p:nvSpPr>
-          <p:cNvPr id="12" name="Rounded Rectangle 11"/>
+          <p:cNvPr id="16" name="Rounded Rectangle 15"/>
           <p:cNvSpPr/>
           <p:nvPr/>
         </p:nvSpPr>
         <p:spPr>
           <a:xfrm>
-            <a:off x="548640" y="3419856"/>
-            <a:ext cx="5120640" cy="713232"/>
+            <a:off x="548640" y="3429000"/>
+            <a:ext cx="5120640" cy="731520"/>
           </a:xfrm>
           <a:prstGeom prst="roundRect">
             <a:avLst>
@@ -4323,7 +5692,7 @@
             </a:avLst>
           </a:prstGeom>
           <a:solidFill>
-            <a:srgbClr val="F3F5F9"/>
+            <a:srgbClr val="F2F2F2"/>
           </a:solidFill>
           <a:ln>
             <a:noFill/>
@@ -4354,14 +5723,58 @@
       </p:sp>
       <p:sp>
         <p:nvSpPr>
-          <p:cNvPr id="13" name="TextBox 12"/>
+          <p:cNvPr id="17" name="Rectangle 16"/>
+          <p:cNvSpPr/>
+          <p:nvPr/>
+        </p:nvSpPr>
+        <p:spPr>
+          <a:xfrm>
+            <a:off x="548640" y="3429000"/>
+            <a:ext cx="82296" cy="731520"/>
+          </a:xfrm>
+          <a:prstGeom prst="rect">
+            <a:avLst/>
+          </a:prstGeom>
+          <a:solidFill>
+            <a:srgbClr val="D99A16"/>
+          </a:solidFill>
+          <a:ln>
+            <a:noFill/>
+          </a:ln>
+          <a:effectLst/>
+        </p:spPr>
+        <p:style>
+          <a:lnRef idx="1">
+            <a:schemeClr val="accent1"/>
+          </a:lnRef>
+          <a:fillRef idx="3">
+            <a:schemeClr val="accent1"/>
+          </a:fillRef>
+          <a:effectRef idx="2">
+            <a:schemeClr val="accent1"/>
+          </a:effectRef>
+          <a:fontRef idx="minor">
+            <a:schemeClr val="lt1"/>
+          </a:fontRef>
+        </p:style>
+        <p:txBody>
+          <a:bodyPr rtlCol="0" anchor="ctr"/>
+          <a:lstStyle/>
+          <a:p>
+            <a:pPr algn="ctr"/>
+          </a:p>
+        </p:txBody>
+      </p:sp>
+      <p:sp>
+        <p:nvSpPr>
+          <p:cNvPr id="18" name="TextBox 17"/>
           <p:cNvSpPr txBox="1"/>
           <p:nvPr/>
         </p:nvSpPr>
         <p:spPr>
           <a:xfrm>
-            <a:off x="731520" y="3493008"/>
-            <a:ext cx="4754880" cy="274320"/>
+            <a:off x="822960" y="3502152"/>
+            <a:ext cx="4663440" cy="274320"/>
           </a:xfrm>
           <a:prstGeom prst="rect">
             <a:avLst/>
@@ -4385,7 +5798,7 @@
             <a:r>
               <a:rPr sz="1300" b="1">
                 <a:solidFill>
-                  <a:srgbClr val="D98A0B"/>
+                  <a:srgbClr val="1E1E1E"/>
                 </a:solidFill>
                 <a:latin typeface="Segoe UI"/>
               </a:rPr>
@@ -4396,14 +5809,14 @@
       </p:sp>
       <p:sp>
         <p:nvSpPr>
-          <p:cNvPr id="14" name="TextBox 13"/>
+          <p:cNvPr id="19" name="TextBox 18"/>
           <p:cNvSpPr txBox="1"/>
           <p:nvPr/>
         </p:nvSpPr>
         <p:spPr>
           <a:xfrm>
-            <a:off x="731520" y="3767328"/>
-            <a:ext cx="4754880" cy="365760"/>
+            <a:off x="822960" y="3794760"/>
+            <a:ext cx="4663440" cy="365760"/>
           </a:xfrm>
           <a:prstGeom prst="rect">
             <a:avLst/>
@@ -4427,7 +5840,7 @@
             <a:r>
               <a:rPr sz="1200" b="0">
                 <a:solidFill>
-                  <a:srgbClr val="475069"/>
+                  <a:srgbClr val="4B4B4B"/>
                 </a:solidFill>
                 <a:latin typeface="Segoe UI"/>
               </a:rPr>
@@ -4438,14 +5851,14 @@
       </p:sp>
       <p:sp>
         <p:nvSpPr>
-          <p:cNvPr id="15" name="Rounded Rectangle 14"/>
+          <p:cNvPr id="20" name="Rounded Rectangle 19"/>
           <p:cNvSpPr/>
           <p:nvPr/>
         </p:nvSpPr>
         <p:spPr>
           <a:xfrm>
-            <a:off x="548640" y="4261104"/>
-            <a:ext cx="5120640" cy="713232"/>
+            <a:off x="548640" y="4297679"/>
+            <a:ext cx="5120640" cy="731520"/>
           </a:xfrm>
           <a:prstGeom prst="roundRect">
             <a:avLst>
@@ -4453,7 +5866,7 @@
             </a:avLst>
           </a:prstGeom>
           <a:solidFill>
-            <a:srgbClr val="F3F5F9"/>
+            <a:srgbClr val="F2F2F2"/>
           </a:solidFill>
           <a:ln>
             <a:noFill/>
@@ -4484,14 +5897,58 @@
       </p:sp>
       <p:sp>
         <p:nvSpPr>
-          <p:cNvPr id="16" name="TextBox 15"/>
+          <p:cNvPr id="21" name="Rectangle 20"/>
+          <p:cNvSpPr/>
+          <p:nvPr/>
+        </p:nvSpPr>
+        <p:spPr>
+          <a:xfrm>
+            <a:off x="548640" y="4297679"/>
+            <a:ext cx="82296" cy="731520"/>
+          </a:xfrm>
+          <a:prstGeom prst="rect">
+            <a:avLst/>
+          </a:prstGeom>
+          <a:solidFill>
+            <a:srgbClr val="D99A16"/>
+          </a:solidFill>
+          <a:ln>
+            <a:noFill/>
+          </a:ln>
+          <a:effectLst/>
+        </p:spPr>
+        <p:style>
+          <a:lnRef idx="1">
+            <a:schemeClr val="accent1"/>
+          </a:lnRef>
+          <a:fillRef idx="3">
+            <a:schemeClr val="accent1"/>
+          </a:fillRef>
+          <a:effectRef idx="2">
+            <a:schemeClr val="accent1"/>
+          </a:effectRef>
+          <a:fontRef idx="minor">
+            <a:schemeClr val="lt1"/>
+          </a:fontRef>
+        </p:style>
+        <p:txBody>
+          <a:bodyPr rtlCol="0" anchor="ctr"/>
+          <a:lstStyle/>
+          <a:p>
+            <a:pPr algn="ctr"/>
+          </a:p>
+        </p:txBody>
+      </p:sp>
+      <p:sp>
+        <p:nvSpPr>
+          <p:cNvPr id="22" name="TextBox 21"/>
           <p:cNvSpPr txBox="1"/>
           <p:nvPr/>
         </p:nvSpPr>
         <p:spPr>
           <a:xfrm>
-            <a:off x="731520" y="4334256"/>
-            <a:ext cx="4754880" cy="274320"/>
+            <a:off x="822960" y="4370831"/>
+            <a:ext cx="4663440" cy="274320"/>
           </a:xfrm>
           <a:prstGeom prst="rect">
             <a:avLst/>
@@ -4515,7 +5972,7 @@
             <a:r>
               <a:rPr sz="1300" b="1">
                 <a:solidFill>
-                  <a:srgbClr val="D98A0B"/>
+                  <a:srgbClr val="1E1E1E"/>
                 </a:solidFill>
                 <a:latin typeface="Segoe UI"/>
               </a:rPr>
@@ -4526,14 +5983,14 @@
       </p:sp>
       <p:sp>
         <p:nvSpPr>
-          <p:cNvPr id="17" name="TextBox 16"/>
+          <p:cNvPr id="23" name="TextBox 22"/>
           <p:cNvSpPr txBox="1"/>
           <p:nvPr/>
         </p:nvSpPr>
         <p:spPr>
           <a:xfrm>
-            <a:off x="731520" y="4608576"/>
-            <a:ext cx="4754880" cy="365760"/>
+            <a:off x="822960" y="4663440"/>
+            <a:ext cx="4663440" cy="365760"/>
           </a:xfrm>
           <a:prstGeom prst="rect">
             <a:avLst/>
@@ -4557,7 +6014,7 @@
             <a:r>
               <a:rPr sz="1200" b="0">
                 <a:solidFill>
-                  <a:srgbClr val="475069"/>
+                  <a:srgbClr val="4B4B4B"/>
                 </a:solidFill>
                 <a:latin typeface="Segoe UI"/>
               </a:rPr>
@@ -4568,14 +6025,14 @@
       </p:sp>
       <p:sp>
         <p:nvSpPr>
-          <p:cNvPr id="18" name="Rounded Rectangle 17"/>
+          <p:cNvPr id="24" name="Rounded Rectangle 23"/>
           <p:cNvSpPr/>
           <p:nvPr/>
         </p:nvSpPr>
         <p:spPr>
           <a:xfrm>
-            <a:off x="548640" y="5102352"/>
-            <a:ext cx="5120640" cy="713232"/>
+            <a:off x="548640" y="5166360"/>
+            <a:ext cx="5120640" cy="731520"/>
           </a:xfrm>
           <a:prstGeom prst="roundRect">
             <a:avLst>
@@ -4583,7 +6040,7 @@
             </a:avLst>
           </a:prstGeom>
           <a:solidFill>
-            <a:srgbClr val="F3F5F9"/>
+            <a:srgbClr val="F2F2F2"/>
           </a:solidFill>
           <a:ln>
             <a:noFill/>
@@ -4614,14 +6071,58 @@
       </p:sp>
       <p:sp>
         <p:nvSpPr>
-          <p:cNvPr id="19" name="TextBox 18"/>
+          <p:cNvPr id="25" name="Rectangle 24"/>
+          <p:cNvSpPr/>
+          <p:nvPr/>
+        </p:nvSpPr>
+        <p:spPr>
+          <a:xfrm>
+            <a:off x="548640" y="5166360"/>
+            <a:ext cx="82296" cy="731520"/>
+          </a:xfrm>
+          <a:prstGeom prst="rect">
+            <a:avLst/>
+          </a:prstGeom>
+          <a:solidFill>
+            <a:srgbClr val="3366CC"/>
+          </a:solidFill>
+          <a:ln>
+            <a:noFill/>
+          </a:ln>
+          <a:effectLst/>
+        </p:spPr>
+        <p:style>
+          <a:lnRef idx="1">
+            <a:schemeClr val="accent1"/>
+          </a:lnRef>
+          <a:fillRef idx="3">
+            <a:schemeClr val="accent1"/>
+          </a:fillRef>
+          <a:effectRef idx="2">
+            <a:schemeClr val="accent1"/>
+          </a:effectRef>
+          <a:fontRef idx="minor">
+            <a:schemeClr val="lt1"/>
+          </a:fontRef>
+        </p:style>
+        <p:txBody>
+          <a:bodyPr rtlCol="0" anchor="ctr"/>
+          <a:lstStyle/>
+          <a:p>
+            <a:pPr algn="ctr"/>
+          </a:p>
+        </p:txBody>
+      </p:sp>
+      <p:sp>
+        <p:nvSpPr>
+          <p:cNvPr id="26" name="TextBox 25"/>
           <p:cNvSpPr txBox="1"/>
           <p:nvPr/>
         </p:nvSpPr>
         <p:spPr>
           <a:xfrm>
-            <a:off x="731520" y="5175504"/>
-            <a:ext cx="4754880" cy="274320"/>
+            <a:off x="822960" y="5239512"/>
+            <a:ext cx="4663440" cy="274320"/>
           </a:xfrm>
           <a:prstGeom prst="rect">
             <a:avLst/>
@@ -4645,7 +6146,7 @@
             <a:r>
               <a:rPr sz="1300" b="1">
                 <a:solidFill>
-                  <a:srgbClr val="2F63D6"/>
+                  <a:srgbClr val="1E1E1E"/>
                 </a:solidFill>
                 <a:latin typeface="Segoe UI"/>
               </a:rPr>
@@ -4656,14 +6157,14 @@
       </p:sp>
       <p:sp>
         <p:nvSpPr>
-          <p:cNvPr id="20" name="TextBox 19"/>
+          <p:cNvPr id="27" name="TextBox 26"/>
           <p:cNvSpPr txBox="1"/>
           <p:nvPr/>
         </p:nvSpPr>
         <p:spPr>
           <a:xfrm>
-            <a:off x="731520" y="5449824"/>
-            <a:ext cx="4754880" cy="365760"/>
+            <a:off x="822960" y="5532120"/>
+            <a:ext cx="4663440" cy="365760"/>
           </a:xfrm>
           <a:prstGeom prst="rect">
             <a:avLst/>
@@ -4687,7 +6188,7 @@
             <a:r>
               <a:rPr sz="1200" b="0">
                 <a:solidFill>
-                  <a:srgbClr val="475069"/>
+                  <a:srgbClr val="4B4B4B"/>
                 </a:solidFill>
                 <a:latin typeface="Segoe UI"/>
               </a:rPr>
@@ -4698,14 +6199,100 @@
       </p:sp>
       <p:sp>
         <p:nvSpPr>
-          <p:cNvPr id="21" name="TextBox 20"/>
+          <p:cNvPr id="28" name="Oval 27"/>
+          <p:cNvSpPr/>
+          <p:nvPr/>
+        </p:nvSpPr>
+        <p:spPr>
+          <a:xfrm>
+            <a:off x="6217920" y="1691640"/>
+            <a:ext cx="548640" cy="548640"/>
+          </a:xfrm>
+          <a:prstGeom prst="ellipse">
+            <a:avLst/>
+          </a:prstGeom>
+          <a:solidFill>
+            <a:srgbClr val="E9A924"/>
+          </a:solidFill>
+          <a:ln>
+            <a:noFill/>
+          </a:ln>
+          <a:effectLst/>
+        </p:spPr>
+        <p:style>
+          <a:lnRef idx="1">
+            <a:schemeClr val="accent1"/>
+          </a:lnRef>
+          <a:fillRef idx="3">
+            <a:schemeClr val="accent1"/>
+          </a:fillRef>
+          <a:effectRef idx="2">
+            <a:schemeClr val="accent1"/>
+          </a:effectRef>
+          <a:fontRef idx="minor">
+            <a:schemeClr val="lt1"/>
+          </a:fontRef>
+        </p:style>
+        <p:txBody>
+          <a:bodyPr rtlCol="0" anchor="ctr"/>
+          <a:lstStyle/>
+          <a:p>
+            <a:pPr algn="ctr"/>
+          </a:p>
+        </p:txBody>
+      </p:sp>
+      <p:sp>
+        <p:nvSpPr>
+          <p:cNvPr id="29" name="TextBox 28"/>
           <p:cNvSpPr txBox="1"/>
           <p:nvPr/>
         </p:nvSpPr>
         <p:spPr>
           <a:xfrm>
-            <a:off x="6217920" y="1737360"/>
-            <a:ext cx="457200" cy="457200"/>
+            <a:off x="6217920" y="1755648"/>
+            <a:ext cx="548640" cy="457200"/>
+          </a:xfrm>
+          <a:prstGeom prst="rect">
+            <a:avLst/>
+          </a:prstGeom>
+          <a:noFill/>
+        </p:spPr>
+        <p:txBody>
+          <a:bodyPr wrap="square" anchor="t" lIns="18288" rIns="18288">
+            <a:spAutoFit/>
+          </a:bodyPr>
+          <a:lstStyle/>
+          <a:p>
+            <a:pPr algn="ctr">
+              <a:lnSpc>
+                <a:spcPct val="110000"/>
+              </a:lnSpc>
+              <a:spcAft>
+                <a:spcPts val="600"/>
+              </a:spcAft>
+            </a:pPr>
+            <a:r>
+              <a:rPr sz="1800" b="0">
+                <a:solidFill>
+                  <a:srgbClr val="1E1E1E"/>
+                </a:solidFill>
+                <a:latin typeface="Segoe UI Black"/>
+              </a:rPr>
+              <a:t>1</a:t>
+            </a:r>
+          </a:p>
+        </p:txBody>
+      </p:sp>
+      <p:sp>
+        <p:nvSpPr>
+          <p:cNvPr id="30" name="TextBox 29"/>
+          <p:cNvSpPr txBox="1"/>
+          <p:nvPr/>
+        </p:nvSpPr>
+        <p:spPr>
+          <a:xfrm>
+            <a:off x="6949440" y="1691640"/>
+            <a:ext cx="4754880" cy="320040"/>
           </a:xfrm>
           <a:prstGeom prst="rect">
             <a:avLst/>
@@ -4727,27 +6314,27 @@
               </a:spcAft>
             </a:pPr>
             <a:r>
-              <a:rPr sz="2600" b="1">
-                <a:solidFill>
-                  <a:srgbClr val="D98A0B"/>
+              <a:rPr sz="1500" b="1">
+                <a:solidFill>
+                  <a:srgbClr val="1E1E1E"/>
                 </a:solidFill>
                 <a:latin typeface="Segoe UI"/>
               </a:rPr>
-              <a:t>1</a:t>
-            </a:r>
-          </a:p>
-        </p:txBody>
-      </p:sp>
-      <p:sp>
-        <p:nvSpPr>
-          <p:cNvPr id="22" name="TextBox 21"/>
+              <a:t>Descriptivo</a:t>
+            </a:r>
+          </a:p>
+        </p:txBody>
+      </p:sp>
+      <p:sp>
+        <p:nvSpPr>
+          <p:cNvPr id="31" name="TextBox 30"/>
           <p:cNvSpPr txBox="1"/>
           <p:nvPr/>
         </p:nvSpPr>
         <p:spPr>
           <a:xfrm>
-            <a:off x="6766560" y="1755648"/>
-            <a:ext cx="4937760" cy="320040"/>
+            <a:off x="6949440" y="2057400"/>
+            <a:ext cx="4754880" cy="685800"/>
           </a:xfrm>
           <a:prstGeom prst="rect">
             <a:avLst/>
@@ -4769,27 +6356,113 @@
               </a:spcAft>
             </a:pPr>
             <a:r>
-              <a:rPr sz="1500" b="1">
-                <a:solidFill>
-                  <a:srgbClr val="0F1729"/>
+              <a:rPr sz="1250" b="0">
+                <a:solidFill>
+                  <a:srgbClr val="4B4B4B"/>
                 </a:solidFill>
                 <a:latin typeface="Segoe UI"/>
               </a:rPr>
-              <a:t>Descriptivo</a:t>
-            </a:r>
-          </a:p>
-        </p:txBody>
-      </p:sp>
-      <p:sp>
-        <p:nvSpPr>
-          <p:cNvPr id="23" name="TextBox 22"/>
+              <a:t>Series ene-ago, tasas por 100.000 y porcentajes ponderados con error estándar</a:t>
+            </a:r>
+          </a:p>
+        </p:txBody>
+      </p:sp>
+      <p:sp>
+        <p:nvSpPr>
+          <p:cNvPr id="32" name="Oval 31"/>
+          <p:cNvSpPr/>
+          <p:nvPr/>
+        </p:nvSpPr>
+        <p:spPr>
+          <a:xfrm>
+            <a:off x="6217920" y="2770632"/>
+            <a:ext cx="548640" cy="548640"/>
+          </a:xfrm>
+          <a:prstGeom prst="ellipse">
+            <a:avLst/>
+          </a:prstGeom>
+          <a:solidFill>
+            <a:srgbClr val="E9A924"/>
+          </a:solidFill>
+          <a:ln>
+            <a:noFill/>
+          </a:ln>
+          <a:effectLst/>
+        </p:spPr>
+        <p:style>
+          <a:lnRef idx="1">
+            <a:schemeClr val="accent1"/>
+          </a:lnRef>
+          <a:fillRef idx="3">
+            <a:schemeClr val="accent1"/>
+          </a:fillRef>
+          <a:effectRef idx="2">
+            <a:schemeClr val="accent1"/>
+          </a:effectRef>
+          <a:fontRef idx="minor">
+            <a:schemeClr val="lt1"/>
+          </a:fontRef>
+        </p:style>
+        <p:txBody>
+          <a:bodyPr rtlCol="0" anchor="ctr"/>
+          <a:lstStyle/>
+          <a:p>
+            <a:pPr algn="ctr"/>
+          </a:p>
+        </p:txBody>
+      </p:sp>
+      <p:sp>
+        <p:nvSpPr>
+          <p:cNvPr id="33" name="TextBox 32"/>
           <p:cNvSpPr txBox="1"/>
           <p:nvPr/>
         </p:nvSpPr>
         <p:spPr>
           <a:xfrm>
-            <a:off x="6766560" y="2121408"/>
-            <a:ext cx="4937760" cy="640080"/>
+            <a:off x="6217920" y="2834640"/>
+            <a:ext cx="548640" cy="457200"/>
+          </a:xfrm>
+          <a:prstGeom prst="rect">
+            <a:avLst/>
+          </a:prstGeom>
+          <a:noFill/>
+        </p:spPr>
+        <p:txBody>
+          <a:bodyPr wrap="square" anchor="t" lIns="18288" rIns="18288">
+            <a:spAutoFit/>
+          </a:bodyPr>
+          <a:lstStyle/>
+          <a:p>
+            <a:pPr algn="ctr">
+              <a:lnSpc>
+                <a:spcPct val="110000"/>
+              </a:lnSpc>
+              <a:spcAft>
+                <a:spcPts val="600"/>
+              </a:spcAft>
+            </a:pPr>
+            <a:r>
+              <a:rPr sz="1800" b="0">
+                <a:solidFill>
+                  <a:srgbClr val="1E1E1E"/>
+                </a:solidFill>
+                <a:latin typeface="Segoe UI Black"/>
+              </a:rPr>
+              <a:t>2</a:t>
+            </a:r>
+          </a:p>
+        </p:txBody>
+      </p:sp>
+      <p:sp>
+        <p:nvSpPr>
+          <p:cNvPr id="34" name="TextBox 33"/>
+          <p:cNvSpPr txBox="1"/>
+          <p:nvPr/>
+        </p:nvSpPr>
+        <p:spPr>
+          <a:xfrm>
+            <a:off x="6949440" y="2770632"/>
+            <a:ext cx="4754880" cy="320040"/>
           </a:xfrm>
           <a:prstGeom prst="rect">
             <a:avLst/>
@@ -4811,27 +6484,27 @@
               </a:spcAft>
             </a:pPr>
             <a:r>
-              <a:rPr sz="1250" b="0">
-                <a:solidFill>
-                  <a:srgbClr val="475069"/>
+              <a:rPr sz="1500" b="1">
+                <a:solidFill>
+                  <a:srgbClr val="1E1E1E"/>
                 </a:solidFill>
                 <a:latin typeface="Segoe UI"/>
               </a:rPr>
-              <a:t>Series ene-ago, tasas, % ponderados con error estándar</a:t>
-            </a:r>
-          </a:p>
-        </p:txBody>
-      </p:sp>
-      <p:sp>
-        <p:nvSpPr>
-          <p:cNvPr id="24" name="TextBox 23"/>
+              <a:t>Diagnóstico</a:t>
+            </a:r>
+          </a:p>
+        </p:txBody>
+      </p:sp>
+      <p:sp>
+        <p:nvSpPr>
+          <p:cNvPr id="35" name="TextBox 34"/>
           <p:cNvSpPr txBox="1"/>
           <p:nvPr/>
         </p:nvSpPr>
         <p:spPr>
           <a:xfrm>
-            <a:off x="6217920" y="2788920"/>
-            <a:ext cx="457200" cy="457200"/>
+            <a:off x="6949440" y="3136392"/>
+            <a:ext cx="4754880" cy="685800"/>
           </a:xfrm>
           <a:prstGeom prst="rect">
             <a:avLst/>
@@ -4853,27 +6526,113 @@
               </a:spcAft>
             </a:pPr>
             <a:r>
-              <a:rPr sz="2600" b="1">
-                <a:solidFill>
-                  <a:srgbClr val="D98A0B"/>
+              <a:rPr sz="1250" b="0">
+                <a:solidFill>
+                  <a:srgbClr val="4B4B4B"/>
                 </a:solidFill>
                 <a:latin typeface="Segoe UI"/>
               </a:rPr>
-              <a:t>2</a:t>
-            </a:r>
-          </a:p>
-        </p:txBody>
-      </p:sp>
-      <p:sp>
-        <p:nvSpPr>
-          <p:cNvPr id="25" name="TextBox 24"/>
+              <a:t>Logit ponderado, efectos marginales, IC por bootstrap de localidades, efectos fijos y wild bootstrap</a:t>
+            </a:r>
+          </a:p>
+        </p:txBody>
+      </p:sp>
+      <p:sp>
+        <p:nvSpPr>
+          <p:cNvPr id="36" name="Oval 35"/>
+          <p:cNvSpPr/>
+          <p:nvPr/>
+        </p:nvSpPr>
+        <p:spPr>
+          <a:xfrm>
+            <a:off x="6217920" y="3849624"/>
+            <a:ext cx="548640" cy="548640"/>
+          </a:xfrm>
+          <a:prstGeom prst="ellipse">
+            <a:avLst/>
+          </a:prstGeom>
+          <a:solidFill>
+            <a:srgbClr val="E9A924"/>
+          </a:solidFill>
+          <a:ln>
+            <a:noFill/>
+          </a:ln>
+          <a:effectLst/>
+        </p:spPr>
+        <p:style>
+          <a:lnRef idx="1">
+            <a:schemeClr val="accent1"/>
+          </a:lnRef>
+          <a:fillRef idx="3">
+            <a:schemeClr val="accent1"/>
+          </a:fillRef>
+          <a:effectRef idx="2">
+            <a:schemeClr val="accent1"/>
+          </a:effectRef>
+          <a:fontRef idx="minor">
+            <a:schemeClr val="lt1"/>
+          </a:fontRef>
+        </p:style>
+        <p:txBody>
+          <a:bodyPr rtlCol="0" anchor="ctr"/>
+          <a:lstStyle/>
+          <a:p>
+            <a:pPr algn="ctr"/>
+          </a:p>
+        </p:txBody>
+      </p:sp>
+      <p:sp>
+        <p:nvSpPr>
+          <p:cNvPr id="37" name="TextBox 36"/>
           <p:cNvSpPr txBox="1"/>
           <p:nvPr/>
         </p:nvSpPr>
         <p:spPr>
           <a:xfrm>
-            <a:off x="6766560" y="2807208"/>
-            <a:ext cx="4937760" cy="320040"/>
+            <a:off x="6217920" y="3913632"/>
+            <a:ext cx="548640" cy="457200"/>
+          </a:xfrm>
+          <a:prstGeom prst="rect">
+            <a:avLst/>
+          </a:prstGeom>
+          <a:noFill/>
+        </p:spPr>
+        <p:txBody>
+          <a:bodyPr wrap="square" anchor="t" lIns="18288" rIns="18288">
+            <a:spAutoFit/>
+          </a:bodyPr>
+          <a:lstStyle/>
+          <a:p>
+            <a:pPr algn="ctr">
+              <a:lnSpc>
+                <a:spcPct val="110000"/>
+              </a:lnSpc>
+              <a:spcAft>
+                <a:spcPts val="600"/>
+              </a:spcAft>
+            </a:pPr>
+            <a:r>
+              <a:rPr sz="1800" b="0">
+                <a:solidFill>
+                  <a:srgbClr val="1E1E1E"/>
+                </a:solidFill>
+                <a:latin typeface="Segoe UI Black"/>
+              </a:rPr>
+              <a:t>3</a:t>
+            </a:r>
+          </a:p>
+        </p:txBody>
+      </p:sp>
+      <p:sp>
+        <p:nvSpPr>
+          <p:cNvPr id="38" name="TextBox 37"/>
+          <p:cNvSpPr txBox="1"/>
+          <p:nvPr/>
+        </p:nvSpPr>
+        <p:spPr>
+          <a:xfrm>
+            <a:off x="6949440" y="3849624"/>
+            <a:ext cx="4754880" cy="320040"/>
           </a:xfrm>
           <a:prstGeom prst="rect">
             <a:avLst/>
@@ -4897,25 +6656,25 @@
             <a:r>
               <a:rPr sz="1500" b="1">
                 <a:solidFill>
-                  <a:srgbClr val="0F1729"/>
+                  <a:srgbClr val="1E1E1E"/>
                 </a:solidFill>
                 <a:latin typeface="Segoe UI"/>
               </a:rPr>
-              <a:t>Diagnóstico</a:t>
-            </a:r>
-          </a:p>
-        </p:txBody>
-      </p:sp>
-      <p:sp>
-        <p:nvSpPr>
-          <p:cNvPr id="26" name="TextBox 25"/>
+              <a:t>Predictivo</a:t>
+            </a:r>
+          </a:p>
+        </p:txBody>
+      </p:sp>
+      <p:sp>
+        <p:nvSpPr>
+          <p:cNvPr id="39" name="TextBox 38"/>
           <p:cNvSpPr txBox="1"/>
           <p:nvPr/>
         </p:nvSpPr>
         <p:spPr>
           <a:xfrm>
-            <a:off x="6766560" y="3172968"/>
-            <a:ext cx="4937760" cy="640080"/>
+            <a:off x="6949440" y="4215384"/>
+            <a:ext cx="4754880" cy="685800"/>
           </a:xfrm>
           <a:prstGeom prst="rect">
             <a:avLst/>
@@ -4939,25 +6698,111 @@
             <a:r>
               <a:rPr sz="1250" b="0">
                 <a:solidFill>
-                  <a:srgbClr val="475069"/>
+                  <a:srgbClr val="4B4B4B"/>
                 </a:solidFill>
                 <a:latin typeface="Segoe UI"/>
               </a:rPr>
-              <a:t>Logit ponderado, efectos marginales, IC por bootstrap de localidades, efectos fijos, wild bootstrap</a:t>
-            </a:r>
-          </a:p>
-        </p:txBody>
-      </p:sp>
-      <p:sp>
-        <p:nvSpPr>
-          <p:cNvPr id="27" name="TextBox 26"/>
+              <a:t>AUC fuera de muestra por bloques de variables</a:t>
+            </a:r>
+          </a:p>
+        </p:txBody>
+      </p:sp>
+      <p:sp>
+        <p:nvSpPr>
+          <p:cNvPr id="40" name="Oval 39"/>
+          <p:cNvSpPr/>
+          <p:nvPr/>
+        </p:nvSpPr>
+        <p:spPr>
+          <a:xfrm>
+            <a:off x="6217920" y="4928616"/>
+            <a:ext cx="548640" cy="548640"/>
+          </a:xfrm>
+          <a:prstGeom prst="ellipse">
+            <a:avLst/>
+          </a:prstGeom>
+          <a:solidFill>
+            <a:srgbClr val="E9A924"/>
+          </a:solidFill>
+          <a:ln>
+            <a:noFill/>
+          </a:ln>
+          <a:effectLst/>
+        </p:spPr>
+        <p:style>
+          <a:lnRef idx="1">
+            <a:schemeClr val="accent1"/>
+          </a:lnRef>
+          <a:fillRef idx="3">
+            <a:schemeClr val="accent1"/>
+          </a:fillRef>
+          <a:effectRef idx="2">
+            <a:schemeClr val="accent1"/>
+          </a:effectRef>
+          <a:fontRef idx="minor">
+            <a:schemeClr val="lt1"/>
+          </a:fontRef>
+        </p:style>
+        <p:txBody>
+          <a:bodyPr rtlCol="0" anchor="ctr"/>
+          <a:lstStyle/>
+          <a:p>
+            <a:pPr algn="ctr"/>
+          </a:p>
+        </p:txBody>
+      </p:sp>
+      <p:sp>
+        <p:nvSpPr>
+          <p:cNvPr id="41" name="TextBox 40"/>
           <p:cNvSpPr txBox="1"/>
           <p:nvPr/>
         </p:nvSpPr>
         <p:spPr>
           <a:xfrm>
-            <a:off x="6217920" y="3840479"/>
-            <a:ext cx="457200" cy="457200"/>
+            <a:off x="6217920" y="4992624"/>
+            <a:ext cx="548640" cy="457200"/>
+          </a:xfrm>
+          <a:prstGeom prst="rect">
+            <a:avLst/>
+          </a:prstGeom>
+          <a:noFill/>
+        </p:spPr>
+        <p:txBody>
+          <a:bodyPr wrap="square" anchor="t" lIns="18288" rIns="18288">
+            <a:spAutoFit/>
+          </a:bodyPr>
+          <a:lstStyle/>
+          <a:p>
+            <a:pPr algn="ctr">
+              <a:lnSpc>
+                <a:spcPct val="110000"/>
+              </a:lnSpc>
+              <a:spcAft>
+                <a:spcPts val="600"/>
+              </a:spcAft>
+            </a:pPr>
+            <a:r>
+              <a:rPr sz="1800" b="0">
+                <a:solidFill>
+                  <a:srgbClr val="1E1E1E"/>
+                </a:solidFill>
+                <a:latin typeface="Segoe UI Black"/>
+              </a:rPr>
+              <a:t>4</a:t>
+            </a:r>
+          </a:p>
+        </p:txBody>
+      </p:sp>
+      <p:sp>
+        <p:nvSpPr>
+          <p:cNvPr id="42" name="TextBox 41"/>
+          <p:cNvSpPr txBox="1"/>
+          <p:nvPr/>
+        </p:nvSpPr>
+        <p:spPr>
+          <a:xfrm>
+            <a:off x="6949440" y="4928616"/>
+            <a:ext cx="4754880" cy="320040"/>
           </a:xfrm>
           <a:prstGeom prst="rect">
             <a:avLst/>
@@ -4979,27 +6824,27 @@
               </a:spcAft>
             </a:pPr>
             <a:r>
-              <a:rPr sz="2600" b="1">
-                <a:solidFill>
-                  <a:srgbClr val="D98A0B"/>
+              <a:rPr sz="1500" b="1">
+                <a:solidFill>
+                  <a:srgbClr val="1E1E1E"/>
                 </a:solidFill>
                 <a:latin typeface="Segoe UI"/>
               </a:rPr>
-              <a:t>3</a:t>
-            </a:r>
-          </a:p>
-        </p:txBody>
-      </p:sp>
-      <p:sp>
-        <p:nvSpPr>
-          <p:cNvPr id="28" name="TextBox 27"/>
+              <a:t>Prescriptivo</a:t>
+            </a:r>
+          </a:p>
+        </p:txBody>
+      </p:sp>
+      <p:sp>
+        <p:nvSpPr>
+          <p:cNvPr id="43" name="TextBox 42"/>
           <p:cNvSpPr txBox="1"/>
           <p:nvPr/>
         </p:nvSpPr>
         <p:spPr>
           <a:xfrm>
-            <a:off x="6766560" y="3858767"/>
-            <a:ext cx="4937760" cy="320040"/>
+            <a:off x="6949440" y="5294376"/>
+            <a:ext cx="4754880" cy="685800"/>
           </a:xfrm>
           <a:prstGeom prst="rect">
             <a:avLst/>
@@ -5021,177 +6866,9 @@
               </a:spcAft>
             </a:pPr>
             <a:r>
-              <a:rPr sz="1500" b="1">
-                <a:solidFill>
-                  <a:srgbClr val="0F1729"/>
-                </a:solidFill>
-                <a:latin typeface="Segoe UI"/>
-              </a:rPr>
-              <a:t>Predictivo</a:t>
-            </a:r>
-          </a:p>
-        </p:txBody>
-      </p:sp>
-      <p:sp>
-        <p:nvSpPr>
-          <p:cNvPr id="29" name="TextBox 28"/>
-          <p:cNvSpPr txBox="1"/>
-          <p:nvPr/>
-        </p:nvSpPr>
-        <p:spPr>
-          <a:xfrm>
-            <a:off x="6766560" y="4224527"/>
-            <a:ext cx="4937760" cy="640080"/>
-          </a:xfrm>
-          <a:prstGeom prst="rect">
-            <a:avLst/>
-          </a:prstGeom>
-          <a:noFill/>
-        </p:spPr>
-        <p:txBody>
-          <a:bodyPr wrap="square" anchor="t" lIns="18288" rIns="18288">
-            <a:spAutoFit/>
-          </a:bodyPr>
-          <a:lstStyle/>
-          <a:p>
-            <a:pPr algn="l">
-              <a:lnSpc>
-                <a:spcPct val="110000"/>
-              </a:lnSpc>
-              <a:spcAft>
-                <a:spcPts val="600"/>
-              </a:spcAft>
-            </a:pPr>
-            <a:r>
               <a:rPr sz="1250" b="0">
                 <a:solidFill>
-                  <a:srgbClr val="475069"/>
-                </a:solidFill>
-                <a:latin typeface="Segoe UI"/>
-              </a:rPr>
-              <a:t>AUC fuera de muestra por bloques de variables</a:t>
-            </a:r>
-          </a:p>
-        </p:txBody>
-      </p:sp>
-      <p:sp>
-        <p:nvSpPr>
-          <p:cNvPr id="30" name="TextBox 29"/>
-          <p:cNvSpPr txBox="1"/>
-          <p:nvPr/>
-        </p:nvSpPr>
-        <p:spPr>
-          <a:xfrm>
-            <a:off x="6217920" y="4892040"/>
-            <a:ext cx="457200" cy="457200"/>
-          </a:xfrm>
-          <a:prstGeom prst="rect">
-            <a:avLst/>
-          </a:prstGeom>
-          <a:noFill/>
-        </p:spPr>
-        <p:txBody>
-          <a:bodyPr wrap="square" anchor="t" lIns="18288" rIns="18288">
-            <a:spAutoFit/>
-          </a:bodyPr>
-          <a:lstStyle/>
-          <a:p>
-            <a:pPr algn="l">
-              <a:lnSpc>
-                <a:spcPct val="110000"/>
-              </a:lnSpc>
-              <a:spcAft>
-                <a:spcPts val="600"/>
-              </a:spcAft>
-            </a:pPr>
-            <a:r>
-              <a:rPr sz="2600" b="1">
-                <a:solidFill>
-                  <a:srgbClr val="D98A0B"/>
-                </a:solidFill>
-                <a:latin typeface="Segoe UI"/>
-              </a:rPr>
-              <a:t>4</a:t>
-            </a:r>
-          </a:p>
-        </p:txBody>
-      </p:sp>
-      <p:sp>
-        <p:nvSpPr>
-          <p:cNvPr id="31" name="TextBox 30"/>
-          <p:cNvSpPr txBox="1"/>
-          <p:nvPr/>
-        </p:nvSpPr>
-        <p:spPr>
-          <a:xfrm>
-            <a:off x="6766560" y="4910327"/>
-            <a:ext cx="4937760" cy="320040"/>
-          </a:xfrm>
-          <a:prstGeom prst="rect">
-            <a:avLst/>
-          </a:prstGeom>
-          <a:noFill/>
-        </p:spPr>
-        <p:txBody>
-          <a:bodyPr wrap="square" anchor="t" lIns="18288" rIns="18288">
-            <a:spAutoFit/>
-          </a:bodyPr>
-          <a:lstStyle/>
-          <a:p>
-            <a:pPr algn="l">
-              <a:lnSpc>
-                <a:spcPct val="110000"/>
-              </a:lnSpc>
-              <a:spcAft>
-                <a:spcPts val="600"/>
-              </a:spcAft>
-            </a:pPr>
-            <a:r>
-              <a:rPr sz="1500" b="1">
-                <a:solidFill>
-                  <a:srgbClr val="0F1729"/>
-                </a:solidFill>
-                <a:latin typeface="Segoe UI"/>
-              </a:rPr>
-              <a:t>Prescriptivo</a:t>
-            </a:r>
-          </a:p>
-        </p:txBody>
-      </p:sp>
-      <p:sp>
-        <p:nvSpPr>
-          <p:cNvPr id="32" name="TextBox 31"/>
-          <p:cNvSpPr txBox="1"/>
-          <p:nvPr/>
-        </p:nvSpPr>
-        <p:spPr>
-          <a:xfrm>
-            <a:off x="6766560" y="5276088"/>
-            <a:ext cx="4937760" cy="640080"/>
-          </a:xfrm>
-          <a:prstGeom prst="rect">
-            <a:avLst/>
-          </a:prstGeom>
-          <a:noFill/>
-        </p:spPr>
-        <p:txBody>
-          <a:bodyPr wrap="square" anchor="t" lIns="18288" rIns="18288">
-            <a:spAutoFit/>
-          </a:bodyPr>
-          <a:lstStyle/>
-          <a:p>
-            <a:pPr algn="l">
-              <a:lnSpc>
-                <a:spcPct val="110000"/>
-              </a:lnSpc>
-              <a:spcAft>
-                <a:spcPts val="600"/>
-              </a:spcAft>
-            </a:pPr>
-            <a:r>
-              <a:rPr sz="1250" b="0">
-                <a:solidFill>
-                  <a:srgbClr val="475069"/>
+                  <a:srgbClr val="4B4B4B"/>
                 </a:solidFill>
                 <a:latin typeface="Segoe UI"/>
               </a:rPr>
@@ -5228,13 +6905,101 @@
       <p:grpSpPr/>
       <p:sp>
         <p:nvSpPr>
-          <p:cNvPr id="2" name="TextBox 1"/>
+          <p:cNvPr id="2" name="Rectangle 1"/>
+          <p:cNvSpPr/>
+          <p:nvPr/>
+        </p:nvSpPr>
+        <p:spPr>
+          <a:xfrm>
+            <a:off x="0" y="0"/>
+            <a:ext cx="8778020" cy="82296"/>
+          </a:xfrm>
+          <a:prstGeom prst="rect">
+            <a:avLst/>
+          </a:prstGeom>
+          <a:solidFill>
+            <a:srgbClr val="BF0A00"/>
+          </a:solidFill>
+          <a:ln>
+            <a:noFill/>
+          </a:ln>
+          <a:effectLst/>
+        </p:spPr>
+        <p:style>
+          <a:lnRef idx="1">
+            <a:schemeClr val="accent1"/>
+          </a:lnRef>
+          <a:fillRef idx="3">
+            <a:schemeClr val="accent1"/>
+          </a:fillRef>
+          <a:effectRef idx="2">
+            <a:schemeClr val="accent1"/>
+          </a:effectRef>
+          <a:fontRef idx="minor">
+            <a:schemeClr val="lt1"/>
+          </a:fontRef>
+        </p:style>
+        <p:txBody>
+          <a:bodyPr rtlCol="0" anchor="ctr"/>
+          <a:lstStyle/>
+          <a:p>
+            <a:pPr algn="ctr"/>
+          </a:p>
+        </p:txBody>
+      </p:sp>
+      <p:sp>
+        <p:nvSpPr>
+          <p:cNvPr id="3" name="Rectangle 2"/>
+          <p:cNvSpPr/>
+          <p:nvPr/>
+        </p:nvSpPr>
+        <p:spPr>
+          <a:xfrm>
+            <a:off x="8778020" y="0"/>
+            <a:ext cx="3413674" cy="82296"/>
+          </a:xfrm>
+          <a:prstGeom prst="rect">
+            <a:avLst/>
+          </a:prstGeom>
+          <a:solidFill>
+            <a:srgbClr val="E9A924"/>
+          </a:solidFill>
+          <a:ln>
+            <a:noFill/>
+          </a:ln>
+          <a:effectLst/>
+        </p:spPr>
+        <p:style>
+          <a:lnRef idx="1">
+            <a:schemeClr val="accent1"/>
+          </a:lnRef>
+          <a:fillRef idx="3">
+            <a:schemeClr val="accent1"/>
+          </a:fillRef>
+          <a:effectRef idx="2">
+            <a:schemeClr val="accent1"/>
+          </a:effectRef>
+          <a:fontRef idx="minor">
+            <a:schemeClr val="lt1"/>
+          </a:fontRef>
+        </p:style>
+        <p:txBody>
+          <a:bodyPr rtlCol="0" anchor="ctr"/>
+          <a:lstStyle/>
+          <a:p>
+            <a:pPr algn="ctr"/>
+          </a:p>
+        </p:txBody>
+      </p:sp>
+      <p:sp>
+        <p:nvSpPr>
+          <p:cNvPr id="4" name="TextBox 3"/>
           <p:cNvSpPr txBox="1"/>
           <p:nvPr/>
         </p:nvSpPr>
         <p:spPr>
           <a:xfrm>
-            <a:off x="548640" y="320040"/>
+            <a:off x="548640" y="347472"/>
             <a:ext cx="8229600" cy="320040"/>
           </a:xfrm>
           <a:prstGeom prst="rect">
@@ -5257,9 +7022,9 @@
               </a:spcAft>
             </a:pPr>
             <a:r>
-              <a:rPr sz="1100" b="0">
-                <a:solidFill>
-                  <a:srgbClr val="475069"/>
+              <a:rPr sz="1100" b="1">
+                <a:solidFill>
+                  <a:srgbClr val="BF0A00"/>
                 </a:solidFill>
                 <a:latin typeface="Segoe UI"/>
               </a:rPr>
@@ -5270,13 +7035,13 @@
       </p:sp>
       <p:sp>
         <p:nvSpPr>
-          <p:cNvPr id="3" name="TextBox 2"/>
+          <p:cNvPr id="5" name="TextBox 4"/>
           <p:cNvSpPr txBox="1"/>
           <p:nvPr/>
         </p:nvSpPr>
         <p:spPr>
           <a:xfrm>
-            <a:off x="548640" y="594360"/>
+            <a:off x="548640" y="621792"/>
             <a:ext cx="11064240" cy="822960"/>
           </a:xfrm>
           <a:prstGeom prst="rect">
@@ -5299,11 +7064,11 @@
               </a:spcAft>
             </a:pPr>
             <a:r>
-              <a:rPr sz="2600" b="1">
-                <a:solidFill>
-                  <a:srgbClr val="0F1729"/>
-                </a:solidFill>
-                <a:latin typeface="Segoe UI"/>
+              <a:rPr sz="2700" b="0">
+                <a:solidFill>
+                  <a:srgbClr val="BF0A00"/>
+                </a:solidFill>
+                <a:latin typeface="Segoe UI Black"/>
               </a:rPr>
               <a:t>Donde hay más miedo que delito, el delito no se registra</a:t>
             </a:r>
@@ -5312,7 +7077,7 @@
       </p:sp>
       <p:sp>
         <p:nvSpPr>
-          <p:cNvPr id="4" name="TextBox 3"/>
+          <p:cNvPr id="6" name="TextBox 5"/>
           <p:cNvSpPr txBox="1"/>
           <p:nvPr/>
         </p:nvSpPr>
@@ -5343,7 +7108,7 @@
             <a:r>
               <a:rPr sz="1000" b="0">
                 <a:solidFill>
-                  <a:srgbClr val="475069"/>
+                  <a:srgbClr val="767676"/>
                 </a:solidFill>
                 <a:latin typeface="Segoe UI"/>
               </a:rPr>
@@ -5354,14 +7119,14 @@
       </p:sp>
       <p:sp>
         <p:nvSpPr>
-          <p:cNvPr id="5" name="TextBox 4"/>
+          <p:cNvPr id="7" name="TextBox 6"/>
           <p:cNvSpPr txBox="1"/>
           <p:nvPr/>
         </p:nvSpPr>
         <p:spPr>
           <a:xfrm>
             <a:off x="548640" y="6400800"/>
-            <a:ext cx="7315200" cy="274320"/>
+            <a:ext cx="8229600" cy="274320"/>
           </a:xfrm>
           <a:prstGeom prst="rect">
             <a:avLst/>
@@ -5385,18 +7150,18 @@
             <a:r>
               <a:rPr sz="1000" b="0">
                 <a:solidFill>
-                  <a:srgbClr val="475069"/>
+                  <a:srgbClr val="767676"/>
                 </a:solidFill>
                 <a:latin typeface="Segoe UI"/>
               </a:rPr>
-              <a:t>El miedo que no baja · The data squad · DataJam 5</a:t>
+              <a:t>El miedo que no baja · The data squad · Bogotá DataJam 5</a:t>
             </a:r>
           </a:p>
         </p:txBody>
       </p:sp>
       <p:pic>
         <p:nvPicPr>
-          <p:cNvPr id="6" name="Picture 5" descr="fig5_brecha_vs_cifra_oculta.png"/>
+          <p:cNvPr id="8" name="Picture 7" descr="fig5_brecha_vs_cifra_oculta.png"/>
           <p:cNvPicPr>
             <a:picLocks noChangeAspect="1"/>
           </p:cNvPicPr>
@@ -5411,7 +7176,7 @@
         <p:spPr>
           <a:xfrm>
             <a:off x="457200" y="1600200"/>
-            <a:ext cx="6949440" cy="4251156"/>
+            <a:ext cx="7040880" cy="4190897"/>
           </a:xfrm>
           <a:prstGeom prst="rect">
             <a:avLst/>
@@ -5420,14 +7185,60 @@
       </p:pic>
       <p:sp>
         <p:nvSpPr>
-          <p:cNvPr id="7" name="TextBox 6"/>
+          <p:cNvPr id="9" name="Rounded Rectangle 8"/>
+          <p:cNvSpPr/>
+          <p:nvPr/>
+        </p:nvSpPr>
+        <p:spPr>
+          <a:xfrm>
+            <a:off x="7818120" y="1645920"/>
+            <a:ext cx="3886200" cy="4480560"/>
+          </a:xfrm>
+          <a:prstGeom prst="roundRect">
+            <a:avLst>
+              <a:gd name="adj" fmla="val 6000"/>
+            </a:avLst>
+          </a:prstGeom>
+          <a:solidFill>
+            <a:srgbClr val="AB0F24"/>
+          </a:solidFill>
+          <a:ln>
+            <a:noFill/>
+          </a:ln>
+          <a:effectLst/>
+        </p:spPr>
+        <p:style>
+          <a:lnRef idx="1">
+            <a:schemeClr val="accent1"/>
+          </a:lnRef>
+          <a:fillRef idx="3">
+            <a:schemeClr val="accent1"/>
+          </a:fillRef>
+          <a:effectRef idx="2">
+            <a:schemeClr val="accent1"/>
+          </a:effectRef>
+          <a:fontRef idx="minor">
+            <a:schemeClr val="lt1"/>
+          </a:fontRef>
+        </p:style>
+        <p:txBody>
+          <a:bodyPr rtlCol="0" anchor="ctr"/>
+          <a:lstStyle/>
+          <a:p>
+            <a:pPr algn="ctr"/>
+          </a:p>
+        </p:txBody>
+      </p:sp>
+      <p:sp>
+        <p:nvSpPr>
+          <p:cNvPr id="10" name="TextBox 9"/>
           <p:cNvSpPr txBox="1"/>
           <p:nvPr/>
         </p:nvSpPr>
         <p:spPr>
           <a:xfrm>
-            <a:off x="7772400" y="1737360"/>
-            <a:ext cx="3931920" cy="1097280"/>
+            <a:off x="8092440" y="1828800"/>
+            <a:ext cx="3474720" cy="365760"/>
           </a:xfrm>
           <a:prstGeom prst="rect">
             <a:avLst/>
@@ -5449,27 +7260,27 @@
               </a:spcAft>
             </a:pPr>
             <a:r>
-              <a:rPr sz="5400" b="1">
-                <a:solidFill>
-                  <a:srgbClr val="8A5300"/>
+              <a:rPr sz="1100" b="1">
+                <a:solidFill>
+                  <a:srgbClr val="FFD98A"/>
                 </a:solidFill>
                 <a:latin typeface="Segoe UI"/>
               </a:rPr>
-              <a:t>5,6 a 1</a:t>
-            </a:r>
-          </a:p>
-        </p:txBody>
-      </p:sp>
-      <p:sp>
-        <p:nvSpPr>
-          <p:cNvPr id="8" name="TextBox 7"/>
+              <a:t>CIFRA OCULTA</a:t>
+            </a:r>
+          </a:p>
+        </p:txBody>
+      </p:sp>
+      <p:sp>
+        <p:nvSpPr>
+          <p:cNvPr id="11" name="TextBox 10"/>
           <p:cNvSpPr txBox="1"/>
           <p:nvPr/>
         </p:nvSpPr>
         <p:spPr>
           <a:xfrm>
-            <a:off x="7772400" y="2743200"/>
-            <a:ext cx="3931920" cy="3474720"/>
+            <a:off x="8092440" y="2148840"/>
+            <a:ext cx="3474720" cy="1005840"/>
           </a:xfrm>
           <a:prstGeom prst="rect">
             <a:avLst/>
@@ -5491,15 +7302,38 @@
               </a:spcAft>
             </a:pPr>
             <a:r>
-              <a:rPr sz="1500" b="0">
-                <a:solidFill>
-                  <a:srgbClr val="475069"/>
-                </a:solidFill>
-                <a:latin typeface="Segoe UI"/>
+              <a:rPr sz="5000" b="0">
+                <a:solidFill>
+                  <a:srgbClr val="E9A924"/>
+                </a:solidFill>
+                <a:latin typeface="Segoe UI Black"/>
               </a:rPr>
-              <a:t>víctimas por cada delito de alto impacto registrado en Bogotá.</a:t>
-            </a:r>
-          </a:p>
+              <a:t>5,6 a 1</a:t>
+            </a:r>
+          </a:p>
+        </p:txBody>
+      </p:sp>
+      <p:sp>
+        <p:nvSpPr>
+          <p:cNvPr id="12" name="TextBox 11"/>
+          <p:cNvSpPr txBox="1"/>
+          <p:nvPr/>
+        </p:nvSpPr>
+        <p:spPr>
+          <a:xfrm>
+            <a:off x="8092440" y="3154680"/>
+            <a:ext cx="3429000" cy="2926080"/>
+          </a:xfrm>
+          <a:prstGeom prst="rect">
+            <a:avLst/>
+          </a:prstGeom>
+          <a:noFill/>
+        </p:spPr>
+        <p:txBody>
+          <a:bodyPr wrap="square" anchor="t" lIns="18288" rIns="18288">
+            <a:spAutoFit/>
+          </a:bodyPr>
+          <a:lstStyle/>
           <a:p>
             <a:pPr algn="l">
               <a:lnSpc>
@@ -5510,13 +7344,13 @@
               </a:spcAft>
             </a:pPr>
             <a:r>
-              <a:rPr sz="1500" b="0">
-                <a:solidFill>
-                  <a:srgbClr val="475069"/>
+              <a:rPr sz="1350" b="0">
+                <a:solidFill>
+                  <a:srgbClr val="FFFFFF"/>
                 </a:solidFill>
                 <a:latin typeface="Segoe UI"/>
               </a:rPr>
-              <a:t>Bosa: 10,6 · Los Mártires: 0,7.</a:t>
+              <a:t>víctimas por cada delito de alto impacto registrado en Bogotá.</a:t>
             </a:r>
           </a:p>
           <a:p>
@@ -5529,13 +7363,13 @@
               </a:spcAft>
             </a:pPr>
             <a:r>
-              <a:rPr sz="1500" b="0">
-                <a:solidFill>
-                  <a:srgbClr val="475069"/>
+              <a:rPr sz="1350" b="0">
+                <a:solidFill>
+                  <a:srgbClr val="FFFFFF"/>
                 </a:solidFill>
                 <a:latin typeface="Segoe UI"/>
               </a:rPr>
-              <a:t>Índice de Brecha frente a cifra oculta: ρ = 0,72 (IC 95 % 0,41 a 0,88; p ajustado 0,004).</a:t>
+              <a:t>Bosa: 10,6 · Los Mártires: 0,7.</a:t>
             </a:r>
           </a:p>
           <a:p>
@@ -5548,13 +7382,13 @@
               </a:spcAft>
             </a:pPr>
             <a:r>
-              <a:rPr sz="1500" b="0">
-                <a:solidFill>
-                  <a:srgbClr val="475069"/>
+              <a:rPr sz="1350" b="0">
+                <a:solidFill>
+                  <a:srgbClr val="FFFFFF"/>
                 </a:solidFill>
                 <a:latin typeface="Segoe UI"/>
               </a:rPr>
-              <a:t>El miedo de la periferia no es exagerado: es delito que no llega a las cifras.</a:t>
+              <a:t>Índice de Brecha frente a cifra oculta: Spearman 0,72 (IC 95 % 0,41 a 0,88; p ajustado 0,004).</a:t>
             </a:r>
           </a:p>
         </p:txBody>
@@ -5587,13 +7421,101 @@
       <p:grpSpPr/>
       <p:sp>
         <p:nvSpPr>
-          <p:cNvPr id="2" name="TextBox 1"/>
+          <p:cNvPr id="2" name="Rectangle 1"/>
+          <p:cNvSpPr/>
+          <p:nvPr/>
+        </p:nvSpPr>
+        <p:spPr>
+          <a:xfrm>
+            <a:off x="0" y="0"/>
+            <a:ext cx="8778020" cy="82296"/>
+          </a:xfrm>
+          <a:prstGeom prst="rect">
+            <a:avLst/>
+          </a:prstGeom>
+          <a:solidFill>
+            <a:srgbClr val="BF0A00"/>
+          </a:solidFill>
+          <a:ln>
+            <a:noFill/>
+          </a:ln>
+          <a:effectLst/>
+        </p:spPr>
+        <p:style>
+          <a:lnRef idx="1">
+            <a:schemeClr val="accent1"/>
+          </a:lnRef>
+          <a:fillRef idx="3">
+            <a:schemeClr val="accent1"/>
+          </a:fillRef>
+          <a:effectRef idx="2">
+            <a:schemeClr val="accent1"/>
+          </a:effectRef>
+          <a:fontRef idx="minor">
+            <a:schemeClr val="lt1"/>
+          </a:fontRef>
+        </p:style>
+        <p:txBody>
+          <a:bodyPr rtlCol="0" anchor="ctr"/>
+          <a:lstStyle/>
+          <a:p>
+            <a:pPr algn="ctr"/>
+          </a:p>
+        </p:txBody>
+      </p:sp>
+      <p:sp>
+        <p:nvSpPr>
+          <p:cNvPr id="3" name="Rectangle 2"/>
+          <p:cNvSpPr/>
+          <p:nvPr/>
+        </p:nvSpPr>
+        <p:spPr>
+          <a:xfrm>
+            <a:off x="8778020" y="0"/>
+            <a:ext cx="3413674" cy="82296"/>
+          </a:xfrm>
+          <a:prstGeom prst="rect">
+            <a:avLst/>
+          </a:prstGeom>
+          <a:solidFill>
+            <a:srgbClr val="E9A924"/>
+          </a:solidFill>
+          <a:ln>
+            <a:noFill/>
+          </a:ln>
+          <a:effectLst/>
+        </p:spPr>
+        <p:style>
+          <a:lnRef idx="1">
+            <a:schemeClr val="accent1"/>
+          </a:lnRef>
+          <a:fillRef idx="3">
+            <a:schemeClr val="accent1"/>
+          </a:fillRef>
+          <a:effectRef idx="2">
+            <a:schemeClr val="accent1"/>
+          </a:effectRef>
+          <a:fontRef idx="minor">
+            <a:schemeClr val="lt1"/>
+          </a:fontRef>
+        </p:style>
+        <p:txBody>
+          <a:bodyPr rtlCol="0" anchor="ctr"/>
+          <a:lstStyle/>
+          <a:p>
+            <a:pPr algn="ctr"/>
+          </a:p>
+        </p:txBody>
+      </p:sp>
+      <p:sp>
+        <p:nvSpPr>
+          <p:cNvPr id="4" name="TextBox 3"/>
           <p:cNvSpPr txBox="1"/>
           <p:nvPr/>
         </p:nvSpPr>
         <p:spPr>
           <a:xfrm>
-            <a:off x="548640" y="320040"/>
+            <a:off x="548640" y="347472"/>
             <a:ext cx="8229600" cy="320040"/>
           </a:xfrm>
           <a:prstGeom prst="rect">
@@ -5616,9 +7538,9 @@
               </a:spcAft>
             </a:pPr>
             <a:r>
-              <a:rPr sz="1100" b="0">
-                <a:solidFill>
-                  <a:srgbClr val="475069"/>
+              <a:rPr sz="1100" b="1">
+                <a:solidFill>
+                  <a:srgbClr val="BF0A00"/>
                 </a:solidFill>
                 <a:latin typeface="Segoe UI"/>
               </a:rPr>
@@ -5629,13 +7551,13 @@
       </p:sp>
       <p:sp>
         <p:nvSpPr>
-          <p:cNvPr id="3" name="TextBox 2"/>
+          <p:cNvPr id="5" name="TextBox 4"/>
           <p:cNvSpPr txBox="1"/>
           <p:nvPr/>
         </p:nvSpPr>
         <p:spPr>
           <a:xfrm>
-            <a:off x="548640" y="594360"/>
+            <a:off x="548640" y="621792"/>
             <a:ext cx="11064240" cy="822960"/>
           </a:xfrm>
           <a:prstGeom prst="rect">
@@ -5658,11 +7580,11 @@
               </a:spcAft>
             </a:pPr>
             <a:r>
-              <a:rPr sz="2600" b="1">
-                <a:solidFill>
-                  <a:srgbClr val="0F1729"/>
-                </a:solidFill>
-                <a:latin typeface="Segoe UI"/>
+              <a:rPr sz="2700" b="0">
+                <a:solidFill>
+                  <a:srgbClr val="BF0A00"/>
+                </a:solidFill>
+                <a:latin typeface="Segoe UI Black"/>
               </a:rPr>
               <a:t>El barrio se siente por su entorno, no por el hurto registrado</a:t>
             </a:r>
@@ -5671,7 +7593,7 @@
       </p:sp>
       <p:sp>
         <p:nvSpPr>
-          <p:cNvPr id="4" name="TextBox 3"/>
+          <p:cNvPr id="6" name="TextBox 5"/>
           <p:cNvSpPr txBox="1"/>
           <p:nvPr/>
         </p:nvSpPr>
@@ -5702,7 +7624,7 @@
             <a:r>
               <a:rPr sz="1000" b="0">
                 <a:solidFill>
-                  <a:srgbClr val="475069"/>
+                  <a:srgbClr val="767676"/>
                 </a:solidFill>
                 <a:latin typeface="Segoe UI"/>
               </a:rPr>
@@ -5713,14 +7635,14 @@
       </p:sp>
       <p:sp>
         <p:nvSpPr>
-          <p:cNvPr id="5" name="TextBox 4"/>
+          <p:cNvPr id="7" name="TextBox 6"/>
           <p:cNvSpPr txBox="1"/>
           <p:nvPr/>
         </p:nvSpPr>
         <p:spPr>
           <a:xfrm>
             <a:off x="548640" y="6400800"/>
-            <a:ext cx="7315200" cy="274320"/>
+            <a:ext cx="8229600" cy="274320"/>
           </a:xfrm>
           <a:prstGeom prst="rect">
             <a:avLst/>
@@ -5744,18 +7666,18 @@
             <a:r>
               <a:rPr sz="1000" b="0">
                 <a:solidFill>
-                  <a:srgbClr val="475069"/>
+                  <a:srgbClr val="767676"/>
                 </a:solidFill>
                 <a:latin typeface="Segoe UI"/>
               </a:rPr>
-              <a:t>El miedo que no baja · The data squad · DataJam 5</a:t>
+              <a:t>El miedo que no baja · The data squad · Bogotá DataJam 5</a:t>
             </a:r>
           </a:p>
         </p:txBody>
       </p:sp>
       <p:pic>
         <p:nvPicPr>
-          <p:cNvPr id="6" name="Picture 5" descr="fig3_efectos_marginales.png"/>
+          <p:cNvPr id="8" name="Picture 7" descr="fig3_efectos_marginales.png"/>
           <p:cNvPicPr>
             <a:picLocks noChangeAspect="1"/>
           </p:cNvPicPr>
@@ -5769,8 +7691,8 @@
         </p:blipFill>
         <p:spPr>
           <a:xfrm>
-            <a:off x="457200" y="1554480"/>
-            <a:ext cx="7223760" cy="3775197"/>
+            <a:off x="457200" y="1600200"/>
+            <a:ext cx="7315200" cy="4041389"/>
           </a:xfrm>
           <a:prstGeom prst="rect">
             <a:avLst/>
@@ -5779,14 +7701,104 @@
       </p:pic>
       <p:sp>
         <p:nvSpPr>
-          <p:cNvPr id="7" name="TextBox 6"/>
+          <p:cNvPr id="9" name="Rounded Rectangle 8"/>
+          <p:cNvSpPr/>
+          <p:nvPr/>
+        </p:nvSpPr>
+        <p:spPr>
+          <a:xfrm>
+            <a:off x="8092440" y="1645920"/>
+            <a:ext cx="3611880" cy="2103120"/>
+          </a:xfrm>
+          <a:prstGeom prst="roundRect">
+            <a:avLst>
+              <a:gd name="adj" fmla="val 6000"/>
+            </a:avLst>
+          </a:prstGeom>
+          <a:solidFill>
+            <a:srgbClr val="F2F2F2"/>
+          </a:solidFill>
+          <a:ln>
+            <a:noFill/>
+          </a:ln>
+          <a:effectLst/>
+        </p:spPr>
+        <p:style>
+          <a:lnRef idx="1">
+            <a:schemeClr val="accent1"/>
+          </a:lnRef>
+          <a:fillRef idx="3">
+            <a:schemeClr val="accent1"/>
+          </a:fillRef>
+          <a:effectRef idx="2">
+            <a:schemeClr val="accent1"/>
+          </a:effectRef>
+          <a:fontRef idx="minor">
+            <a:schemeClr val="lt1"/>
+          </a:fontRef>
+        </p:style>
+        <p:txBody>
+          <a:bodyPr rtlCol="0" anchor="ctr"/>
+          <a:lstStyle/>
+          <a:p>
+            <a:pPr algn="ctr"/>
+          </a:p>
+        </p:txBody>
+      </p:sp>
+      <p:sp>
+        <p:nvSpPr>
+          <p:cNvPr id="10" name="Rectangle 9"/>
+          <p:cNvSpPr/>
+          <p:nvPr/>
+        </p:nvSpPr>
+        <p:spPr>
+          <a:xfrm>
+            <a:off x="8092440" y="1645920"/>
+            <a:ext cx="3611880" cy="82296"/>
+          </a:xfrm>
+          <a:prstGeom prst="rect">
+            <a:avLst/>
+          </a:prstGeom>
+          <a:solidFill>
+            <a:srgbClr val="D99A16"/>
+          </a:solidFill>
+          <a:ln>
+            <a:noFill/>
+          </a:ln>
+          <a:effectLst/>
+        </p:spPr>
+        <p:style>
+          <a:lnRef idx="1">
+            <a:schemeClr val="accent1"/>
+          </a:lnRef>
+          <a:fillRef idx="3">
+            <a:schemeClr val="accent1"/>
+          </a:fillRef>
+          <a:effectRef idx="2">
+            <a:schemeClr val="accent1"/>
+          </a:effectRef>
+          <a:fontRef idx="minor">
+            <a:schemeClr val="lt1"/>
+          </a:fontRef>
+        </p:style>
+        <p:txBody>
+          <a:bodyPr rtlCol="0" anchor="ctr"/>
+          <a:lstStyle/>
+          <a:p>
+            <a:pPr algn="ctr"/>
+          </a:p>
+        </p:txBody>
+      </p:sp>
+      <p:sp>
+        <p:nvSpPr>
+          <p:cNvPr id="11" name="TextBox 10"/>
           <p:cNvSpPr txBox="1"/>
           <p:nvPr/>
         </p:nvSpPr>
         <p:spPr>
           <a:xfrm>
-            <a:off x="8046720" y="1737360"/>
-            <a:ext cx="3657600" cy="914400"/>
+            <a:off x="8321040" y="1847088"/>
+            <a:ext cx="3154680" cy="320040"/>
           </a:xfrm>
           <a:prstGeom prst="rect">
             <a:avLst/>
@@ -5808,27 +7820,27 @@
               </a:spcAft>
             </a:pPr>
             <a:r>
-              <a:rPr sz="4600" b="1">
-                <a:solidFill>
-                  <a:srgbClr val="8A5300"/>
+              <a:rPr sz="1050" b="1">
+                <a:solidFill>
+                  <a:srgbClr val="8A5A00"/>
                 </a:solidFill>
                 <a:latin typeface="Segoe UI"/>
               </a:rPr>
-              <a:t>+13,3 pp</a:t>
-            </a:r>
-          </a:p>
-        </p:txBody>
-      </p:sp>
-      <p:sp>
-        <p:nvSpPr>
-          <p:cNvPr id="8" name="TextBox 7"/>
+              <a:t>ATRACOS EN EL PARQUE</a:t>
+            </a:r>
+          </a:p>
+        </p:txBody>
+      </p:sp>
+      <p:sp>
+        <p:nvSpPr>
+          <p:cNvPr id="12" name="TextBox 11"/>
           <p:cNvSpPr txBox="1"/>
           <p:nvPr/>
         </p:nvSpPr>
         <p:spPr>
           <a:xfrm>
-            <a:off x="8046720" y="2606040"/>
-            <a:ext cx="3657600" cy="548640"/>
+            <a:off x="8321040" y="2103120"/>
+            <a:ext cx="3154680" cy="914400"/>
           </a:xfrm>
           <a:prstGeom prst="rect">
             <a:avLst/>
@@ -5850,27 +7862,27 @@
               </a:spcAft>
             </a:pPr>
             <a:r>
-              <a:rPr sz="1400" b="0">
-                <a:solidFill>
-                  <a:srgbClr val="475069"/>
-                </a:solidFill>
-                <a:latin typeface="Segoe UI"/>
+              <a:rPr sz="5000" b="0">
+                <a:solidFill>
+                  <a:srgbClr val="8A5A00"/>
+                </a:solidFill>
+                <a:latin typeface="Segoe UI Black"/>
               </a:rPr>
-              <a:t>si hay atracos en el parque más cercano</a:t>
-            </a:r>
-          </a:p>
-        </p:txBody>
-      </p:sp>
-      <p:sp>
-        <p:nvSpPr>
-          <p:cNvPr id="9" name="TextBox 8"/>
+              <a:t>+13,3 pp</a:t>
+            </a:r>
+          </a:p>
+        </p:txBody>
+      </p:sp>
+      <p:sp>
+        <p:nvSpPr>
+          <p:cNvPr id="13" name="TextBox 12"/>
           <p:cNvSpPr txBox="1"/>
           <p:nvPr/>
         </p:nvSpPr>
         <p:spPr>
           <a:xfrm>
-            <a:off x="8046720" y="3291840"/>
-            <a:ext cx="3657600" cy="2926080"/>
+            <a:off x="8321040" y="2971799"/>
+            <a:ext cx="3154680" cy="731520"/>
           </a:xfrm>
           <a:prstGeom prst="rect">
             <a:avLst/>
@@ -5892,15 +7904,84 @@
               </a:spcAft>
             </a:pPr>
             <a:r>
-              <a:rPr sz="1400" b="1">
-                <a:solidFill>
-                  <a:srgbClr val="0F1729"/>
+              <a:rPr sz="1250" b="0">
+                <a:solidFill>
+                  <a:srgbClr val="4B4B4B"/>
                 </a:solidFill>
                 <a:latin typeface="Segoe UI"/>
               </a:rPr>
-              <a:t>AUC fuera de muestra</a:t>
-            </a:r>
-          </a:p>
+              <a:t>más probabilidad de sentir insegura la zona</a:t>
+            </a:r>
+          </a:p>
+        </p:txBody>
+      </p:sp>
+      <p:sp>
+        <p:nvSpPr>
+          <p:cNvPr id="14" name="Rounded Rectangle 13"/>
+          <p:cNvSpPr/>
+          <p:nvPr/>
+        </p:nvSpPr>
+        <p:spPr>
+          <a:xfrm>
+            <a:off x="8092440" y="3931920"/>
+            <a:ext cx="3611880" cy="2194560"/>
+          </a:xfrm>
+          <a:prstGeom prst="roundRect">
+            <a:avLst>
+              <a:gd name="adj" fmla="val 6000"/>
+            </a:avLst>
+          </a:prstGeom>
+          <a:solidFill>
+            <a:srgbClr val="F2F2F2"/>
+          </a:solidFill>
+          <a:ln>
+            <a:noFill/>
+          </a:ln>
+          <a:effectLst/>
+        </p:spPr>
+        <p:style>
+          <a:lnRef idx="1">
+            <a:schemeClr val="accent1"/>
+          </a:lnRef>
+          <a:fillRef idx="3">
+            <a:schemeClr val="accent1"/>
+          </a:fillRef>
+          <a:effectRef idx="2">
+            <a:schemeClr val="accent1"/>
+          </a:effectRef>
+          <a:fontRef idx="minor">
+            <a:schemeClr val="lt1"/>
+          </a:fontRef>
+        </p:style>
+        <p:txBody>
+          <a:bodyPr rtlCol="0" anchor="ctr"/>
+          <a:lstStyle/>
+          <a:p>
+            <a:pPr algn="ctr"/>
+          </a:p>
+        </p:txBody>
+      </p:sp>
+      <p:sp>
+        <p:nvSpPr>
+          <p:cNvPr id="15" name="TextBox 14"/>
+          <p:cNvSpPr txBox="1"/>
+          <p:nvPr/>
+        </p:nvSpPr>
+        <p:spPr>
+          <a:xfrm>
+            <a:off x="8321040" y="4069080"/>
+            <a:ext cx="3200400" cy="2011680"/>
+          </a:xfrm>
+          <a:prstGeom prst="rect">
+            <a:avLst/>
+          </a:prstGeom>
+          <a:noFill/>
+        </p:spPr>
+        <p:txBody>
+          <a:bodyPr wrap="square" anchor="t" lIns="18288" rIns="18288">
+            <a:spAutoFit/>
+          </a:bodyPr>
+          <a:lstStyle/>
           <a:p>
             <a:pPr algn="l">
               <a:lnSpc>
@@ -5911,13 +7992,13 @@
               </a:spcAft>
             </a:pPr>
             <a:r>
-              <a:rPr sz="1400" b="0">
-                <a:solidFill>
-                  <a:srgbClr val="475069"/>
+              <a:rPr sz="1300" b="1">
+                <a:solidFill>
+                  <a:srgbClr val="1E1E1E"/>
                 </a:solidFill>
                 <a:latin typeface="Segoe UI"/>
               </a:rPr>
-              <a:t>Solo perfil: 0,609</a:t>
+              <a:t>AUC fuera de muestra</a:t>
             </a:r>
           </a:p>
           <a:p>
@@ -5930,13 +8011,13 @@
               </a:spcAft>
             </a:pPr>
             <a:r>
-              <a:rPr sz="1400" b="0">
-                <a:solidFill>
-                  <a:srgbClr val="475069"/>
+              <a:rPr sz="1300" b="0">
+                <a:solidFill>
+                  <a:srgbClr val="4B4B4B"/>
                 </a:solidFill>
                 <a:latin typeface="Segoe UI"/>
               </a:rPr>
-              <a:t>+ delito registrado: 0,611</a:t>
+              <a:t>Solo perfil: 0,609</a:t>
             </a:r>
           </a:p>
           <a:p>
@@ -5949,13 +8030,13 @@
               </a:spcAft>
             </a:pPr>
             <a:r>
-              <a:rPr sz="1400" b="0">
-                <a:solidFill>
-                  <a:srgbClr val="475069"/>
+              <a:rPr sz="1300" b="0">
+                <a:solidFill>
+                  <a:srgbClr val="1F4A9E"/>
                 </a:solidFill>
                 <a:latin typeface="Segoe UI"/>
               </a:rPr>
-              <a:t>+ entorno: 0,655 · todo: 0,782</a:t>
+              <a:t>+ delito registrado: 0,611</a:t>
             </a:r>
           </a:p>
           <a:p>
@@ -5968,9 +8049,28 @@
               </a:spcAft>
             </a:pPr>
             <a:r>
-              <a:rPr sz="1400" b="0">
-                <a:solidFill>
-                  <a:srgbClr val="475069"/>
+              <a:rPr sz="1300" b="0">
+                <a:solidFill>
+                  <a:srgbClr val="8A5A00"/>
+                </a:solidFill>
+                <a:latin typeface="Segoe UI"/>
+              </a:rPr>
+              <a:t>+ entorno: 0,655 · todo: 0,782</a:t>
+            </a:r>
+          </a:p>
+          <a:p>
+            <a:pPr algn="l">
+              <a:lnSpc>
+                <a:spcPct val="110000"/>
+              </a:lnSpc>
+              <a:spcAft>
+                <a:spcPts val="600"/>
+              </a:spcAft>
+            </a:pPr>
+            <a:r>
+              <a:rPr sz="1300" b="0">
+                <a:solidFill>
+                  <a:srgbClr val="4B4B4B"/>
                 </a:solidFill>
                 <a:latin typeface="Segoe UI"/>
               </a:rPr>
@@ -6007,13 +8107,101 @@
       <p:grpSpPr/>
       <p:sp>
         <p:nvSpPr>
-          <p:cNvPr id="2" name="TextBox 1"/>
+          <p:cNvPr id="2" name="Rectangle 1"/>
+          <p:cNvSpPr/>
+          <p:nvPr/>
+        </p:nvSpPr>
+        <p:spPr>
+          <a:xfrm>
+            <a:off x="0" y="0"/>
+            <a:ext cx="8778020" cy="82296"/>
+          </a:xfrm>
+          <a:prstGeom prst="rect">
+            <a:avLst/>
+          </a:prstGeom>
+          <a:solidFill>
+            <a:srgbClr val="BF0A00"/>
+          </a:solidFill>
+          <a:ln>
+            <a:noFill/>
+          </a:ln>
+          <a:effectLst/>
+        </p:spPr>
+        <p:style>
+          <a:lnRef idx="1">
+            <a:schemeClr val="accent1"/>
+          </a:lnRef>
+          <a:fillRef idx="3">
+            <a:schemeClr val="accent1"/>
+          </a:fillRef>
+          <a:effectRef idx="2">
+            <a:schemeClr val="accent1"/>
+          </a:effectRef>
+          <a:fontRef idx="minor">
+            <a:schemeClr val="lt1"/>
+          </a:fontRef>
+        </p:style>
+        <p:txBody>
+          <a:bodyPr rtlCol="0" anchor="ctr"/>
+          <a:lstStyle/>
+          <a:p>
+            <a:pPr algn="ctr"/>
+          </a:p>
+        </p:txBody>
+      </p:sp>
+      <p:sp>
+        <p:nvSpPr>
+          <p:cNvPr id="3" name="Rectangle 2"/>
+          <p:cNvSpPr/>
+          <p:nvPr/>
+        </p:nvSpPr>
+        <p:spPr>
+          <a:xfrm>
+            <a:off x="8778020" y="0"/>
+            <a:ext cx="3413674" cy="82296"/>
+          </a:xfrm>
+          <a:prstGeom prst="rect">
+            <a:avLst/>
+          </a:prstGeom>
+          <a:solidFill>
+            <a:srgbClr val="E9A924"/>
+          </a:solidFill>
+          <a:ln>
+            <a:noFill/>
+          </a:ln>
+          <a:effectLst/>
+        </p:spPr>
+        <p:style>
+          <a:lnRef idx="1">
+            <a:schemeClr val="accent1"/>
+          </a:lnRef>
+          <a:fillRef idx="3">
+            <a:schemeClr val="accent1"/>
+          </a:fillRef>
+          <a:effectRef idx="2">
+            <a:schemeClr val="accent1"/>
+          </a:effectRef>
+          <a:fontRef idx="minor">
+            <a:schemeClr val="lt1"/>
+          </a:fontRef>
+        </p:style>
+        <p:txBody>
+          <a:bodyPr rtlCol="0" anchor="ctr"/>
+          <a:lstStyle/>
+          <a:p>
+            <a:pPr algn="ctr"/>
+          </a:p>
+        </p:txBody>
+      </p:sp>
+      <p:sp>
+        <p:nvSpPr>
+          <p:cNvPr id="4" name="TextBox 3"/>
           <p:cNvSpPr txBox="1"/>
           <p:nvPr/>
         </p:nvSpPr>
         <p:spPr>
           <a:xfrm>
-            <a:off x="548640" y="320040"/>
+            <a:off x="548640" y="347472"/>
             <a:ext cx="8229600" cy="320040"/>
           </a:xfrm>
           <a:prstGeom prst="rect">
@@ -6036,9 +8224,9 @@
               </a:spcAft>
             </a:pPr>
             <a:r>
-              <a:rPr sz="1100" b="0">
-                <a:solidFill>
-                  <a:srgbClr val="475069"/>
+              <a:rPr sz="1100" b="1">
+                <a:solidFill>
+                  <a:srgbClr val="BF0A00"/>
                 </a:solidFill>
                 <a:latin typeface="Segoe UI"/>
               </a:rPr>
@@ -6049,13 +8237,13 @@
       </p:sp>
       <p:sp>
         <p:nvSpPr>
-          <p:cNvPr id="3" name="TextBox 2"/>
+          <p:cNvPr id="5" name="TextBox 4"/>
           <p:cNvSpPr txBox="1"/>
           <p:nvPr/>
         </p:nvSpPr>
         <p:spPr>
           <a:xfrm>
-            <a:off x="548640" y="594360"/>
+            <a:off x="548640" y="621792"/>
             <a:ext cx="11064240" cy="822960"/>
           </a:xfrm>
           <a:prstGeom prst="rect">
@@ -6078,11 +8266,11 @@
               </a:spcAft>
             </a:pPr>
             <a:r>
-              <a:rPr sz="2600" b="1">
-                <a:solidFill>
-                  <a:srgbClr val="0F1729"/>
-                </a:solidFill>
-                <a:latin typeface="Segoe UI"/>
+              <a:rPr sz="2700" b="0">
+                <a:solidFill>
+                  <a:srgbClr val="BF0A00"/>
+                </a:solidFill>
+                <a:latin typeface="Segoe UI Black"/>
               </a:rPr>
               <a:t>Las mujeres reportan menos delitos y recortan más su vida</a:t>
             </a:r>
@@ -6091,7 +8279,7 @@
       </p:sp>
       <p:sp>
         <p:nvSpPr>
-          <p:cNvPr id="4" name="TextBox 3"/>
+          <p:cNvPr id="6" name="TextBox 5"/>
           <p:cNvSpPr txBox="1"/>
           <p:nvPr/>
         </p:nvSpPr>
@@ -6122,7 +8310,7 @@
             <a:r>
               <a:rPr sz="1000" b="0">
                 <a:solidFill>
-                  <a:srgbClr val="475069"/>
+                  <a:srgbClr val="767676"/>
                 </a:solidFill>
                 <a:latin typeface="Segoe UI"/>
               </a:rPr>
@@ -6133,14 +8321,14 @@
       </p:sp>
       <p:sp>
         <p:nvSpPr>
-          <p:cNvPr id="5" name="TextBox 4"/>
+          <p:cNvPr id="7" name="TextBox 6"/>
           <p:cNvSpPr txBox="1"/>
           <p:nvPr/>
         </p:nvSpPr>
         <p:spPr>
           <a:xfrm>
             <a:off x="548640" y="6400800"/>
-            <a:ext cx="7315200" cy="274320"/>
+            <a:ext cx="8229600" cy="274320"/>
           </a:xfrm>
           <a:prstGeom prst="rect">
             <a:avLst/>
@@ -6164,18 +8352,18 @@
             <a:r>
               <a:rPr sz="1000" b="0">
                 <a:solidFill>
-                  <a:srgbClr val="475069"/>
+                  <a:srgbClr val="767676"/>
                 </a:solidFill>
                 <a:latin typeface="Segoe UI"/>
               </a:rPr>
-              <a:t>El miedo que no baja · The data squad · DataJam 5</a:t>
+              <a:t>El miedo que no baja · The data squad · Bogotá DataJam 5</a:t>
             </a:r>
           </a:p>
         </p:txBody>
       </p:sp>
       <p:pic>
         <p:nvPicPr>
-          <p:cNvPr id="6" name="Picture 5" descr="fig6_genero.png"/>
+          <p:cNvPr id="8" name="Picture 7" descr="fig6_genero.png"/>
           <p:cNvPicPr>
             <a:picLocks noChangeAspect="1"/>
           </p:cNvPicPr>
@@ -6189,8 +8377,8 @@
         </p:blipFill>
         <p:spPr>
           <a:xfrm>
-            <a:off x="457200" y="1645920"/>
-            <a:ext cx="7040880" cy="2601039"/>
+            <a:off x="457200" y="1920240"/>
+            <a:ext cx="7132320" cy="2781685"/>
           </a:xfrm>
           <a:prstGeom prst="rect">
             <a:avLst/>
@@ -6199,14 +8387,104 @@
       </p:pic>
       <p:sp>
         <p:nvSpPr>
-          <p:cNvPr id="7" name="TextBox 6"/>
+          <p:cNvPr id="9" name="Rounded Rectangle 8"/>
+          <p:cNvSpPr/>
+          <p:nvPr/>
+        </p:nvSpPr>
+        <p:spPr>
+          <a:xfrm>
+            <a:off x="7955279" y="1645920"/>
+            <a:ext cx="3749039" cy="3931920"/>
+          </a:xfrm>
+          <a:prstGeom prst="roundRect">
+            <a:avLst>
+              <a:gd name="adj" fmla="val 6000"/>
+            </a:avLst>
+          </a:prstGeom>
+          <a:solidFill>
+            <a:srgbClr val="F2F2F2"/>
+          </a:solidFill>
+          <a:ln>
+            <a:noFill/>
+          </a:ln>
+          <a:effectLst/>
+        </p:spPr>
+        <p:style>
+          <a:lnRef idx="1">
+            <a:schemeClr val="accent1"/>
+          </a:lnRef>
+          <a:fillRef idx="3">
+            <a:schemeClr val="accent1"/>
+          </a:fillRef>
+          <a:effectRef idx="2">
+            <a:schemeClr val="accent1"/>
+          </a:effectRef>
+          <a:fontRef idx="minor">
+            <a:schemeClr val="lt1"/>
+          </a:fontRef>
+        </p:style>
+        <p:txBody>
+          <a:bodyPr rtlCol="0" anchor="ctr"/>
+          <a:lstStyle/>
+          <a:p>
+            <a:pPr algn="ctr"/>
+          </a:p>
+        </p:txBody>
+      </p:sp>
+      <p:sp>
+        <p:nvSpPr>
+          <p:cNvPr id="10" name="Rectangle 9"/>
+          <p:cNvSpPr/>
+          <p:nvPr/>
+        </p:nvSpPr>
+        <p:spPr>
+          <a:xfrm>
+            <a:off x="7955279" y="1645920"/>
+            <a:ext cx="3749039" cy="82296"/>
+          </a:xfrm>
+          <a:prstGeom prst="rect">
+            <a:avLst/>
+          </a:prstGeom>
+          <a:solidFill>
+            <a:srgbClr val="8E44C8"/>
+          </a:solidFill>
+          <a:ln>
+            <a:noFill/>
+          </a:ln>
+          <a:effectLst/>
+        </p:spPr>
+        <p:style>
+          <a:lnRef idx="1">
+            <a:schemeClr val="accent1"/>
+          </a:lnRef>
+          <a:fillRef idx="3">
+            <a:schemeClr val="accent1"/>
+          </a:fillRef>
+          <a:effectRef idx="2">
+            <a:schemeClr val="accent1"/>
+          </a:effectRef>
+          <a:fontRef idx="minor">
+            <a:schemeClr val="lt1"/>
+          </a:fontRef>
+        </p:style>
+        <p:txBody>
+          <a:bodyPr rtlCol="0" anchor="ctr"/>
+          <a:lstStyle/>
+          <a:p>
+            <a:pPr algn="ctr"/>
+          </a:p>
+        </p:txBody>
+      </p:sp>
+      <p:sp>
+        <p:nvSpPr>
+          <p:cNvPr id="11" name="TextBox 10"/>
           <p:cNvSpPr txBox="1"/>
           <p:nvPr/>
         </p:nvSpPr>
         <p:spPr>
           <a:xfrm>
-            <a:off x="7863840" y="1737360"/>
-            <a:ext cx="3840480" cy="4389120"/>
+            <a:off x="8183879" y="1874519"/>
+            <a:ext cx="3383280" cy="4206240"/>
           </a:xfrm>
           <a:prstGeom prst="rect">
             <a:avLst/>
@@ -6228,9 +8506,9 @@
               </a:spcAft>
             </a:pPr>
             <a:r>
-              <a:rPr sz="1500" b="1">
-                <a:solidFill>
-                  <a:srgbClr val="0F1729"/>
+              <a:rPr sz="1350" b="1">
+                <a:solidFill>
+                  <a:srgbClr val="1E1E1E"/>
                 </a:solidFill>
                 <a:latin typeface="Segoe UI"/>
               </a:rPr>
@@ -6247,22 +8525,22 @@
               </a:spcAft>
             </a:pPr>
             <a:r>
-              <a:rPr sz="2600" b="1">
+              <a:rPr sz="2800" b="0">
                 <a:solidFill>
                   <a:srgbClr val="8E44C8"/>
+                </a:solidFill>
+                <a:latin typeface="Segoe UI Black"/>
+              </a:rPr>
+              <a:t>+18,0 pp</a:t>
+            </a:r>
+            <a:r>
+              <a:rPr sz="1350" b="0">
+                <a:solidFill>
+                  <a:srgbClr val="4B4B4B"/>
                 </a:solidFill>
                 <a:latin typeface="Segoe UI"/>
               </a:rPr>
-              <a:t>+18,0 pp</a:t>
-            </a:r>
-            <a:r>
-              <a:rPr sz="1500" b="0">
-                <a:solidFill>
-                  <a:srgbClr val="475069"/>
-                </a:solidFill>
-                <a:latin typeface="Segoe UI"/>
-              </a:rPr>
-              <a:t> temor al acoso sexual</a:t>
+              <a:t>  temor al acoso sexual</a:t>
             </a:r>
           </a:p>
           <a:p>
@@ -6275,22 +8553,22 @@
               </a:spcAft>
             </a:pPr>
             <a:r>
-              <a:rPr sz="2600" b="1">
+              <a:rPr sz="2800" b="0">
                 <a:solidFill>
                   <a:srgbClr val="8E44C8"/>
+                </a:solidFill>
+                <a:latin typeface="Segoe UI Black"/>
+              </a:rPr>
+              <a:t>+9,3 pp</a:t>
+            </a:r>
+            <a:r>
+              <a:rPr sz="1350" b="0">
+                <a:solidFill>
+                  <a:srgbClr val="4B4B4B"/>
                 </a:solidFill>
                 <a:latin typeface="Segoe UI"/>
               </a:rPr>
-              <a:t>+9,3 pp</a:t>
-            </a:r>
-            <a:r>
-              <a:rPr sz="1500" b="0">
-                <a:solidFill>
-                  <a:srgbClr val="475069"/>
-                </a:solidFill>
-                <a:latin typeface="Segoe UI"/>
-              </a:rPr>
-              <a:t> se siente insegura en su barrio</a:t>
+              <a:t>  insegura en su barrio</a:t>
             </a:r>
           </a:p>
           <a:p>
@@ -6303,22 +8581,22 @@
               </a:spcAft>
             </a:pPr>
             <a:r>
-              <a:rPr sz="2600" b="1">
+              <a:rPr sz="2800" b="0">
                 <a:solidFill>
                   <a:srgbClr val="8E44C8"/>
+                </a:solidFill>
+                <a:latin typeface="Segoe UI Black"/>
+              </a:rPr>
+              <a:t>+6,5 pp</a:t>
+            </a:r>
+            <a:r>
+              <a:rPr sz="1350" b="0">
+                <a:solidFill>
+                  <a:srgbClr val="4B4B4B"/>
                 </a:solidFill>
                 <a:latin typeface="Segoe UI"/>
               </a:rPr>
-              <a:t>+6,5 pp</a:t>
-            </a:r>
-            <a:r>
-              <a:rPr sz="1500" b="0">
-                <a:solidFill>
-                  <a:srgbClr val="475069"/>
-                </a:solidFill>
-                <a:latin typeface="Segoe UI"/>
-              </a:rPr>
-              <a:t> evita salir de noche</a:t>
+              <a:t>  evita salir de noche</a:t>
             </a:r>
           </a:p>
           <a:p>
@@ -6331,9 +8609,9 @@
               </a:spcAft>
             </a:pPr>
             <a:r>
-              <a:rPr sz="1500" b="0">
-                <a:solidFill>
-                  <a:srgbClr val="475069"/>
+              <a:rPr sz="1350" b="0">
+                <a:solidFill>
+                  <a:srgbClr val="4B4B4B"/>
                 </a:solidFill>
                 <a:latin typeface="Segoe UI"/>
               </a:rPr>
@@ -6370,13 +8648,101 @@
       <p:grpSpPr/>
       <p:sp>
         <p:nvSpPr>
-          <p:cNvPr id="2" name="TextBox 1"/>
+          <p:cNvPr id="2" name="Rectangle 1"/>
+          <p:cNvSpPr/>
+          <p:nvPr/>
+        </p:nvSpPr>
+        <p:spPr>
+          <a:xfrm>
+            <a:off x="0" y="0"/>
+            <a:ext cx="8778020" cy="82296"/>
+          </a:xfrm>
+          <a:prstGeom prst="rect">
+            <a:avLst/>
+          </a:prstGeom>
+          <a:solidFill>
+            <a:srgbClr val="BF0A00"/>
+          </a:solidFill>
+          <a:ln>
+            <a:noFill/>
+          </a:ln>
+          <a:effectLst/>
+        </p:spPr>
+        <p:style>
+          <a:lnRef idx="1">
+            <a:schemeClr val="accent1"/>
+          </a:lnRef>
+          <a:fillRef idx="3">
+            <a:schemeClr val="accent1"/>
+          </a:fillRef>
+          <a:effectRef idx="2">
+            <a:schemeClr val="accent1"/>
+          </a:effectRef>
+          <a:fontRef idx="minor">
+            <a:schemeClr val="lt1"/>
+          </a:fontRef>
+        </p:style>
+        <p:txBody>
+          <a:bodyPr rtlCol="0" anchor="ctr"/>
+          <a:lstStyle/>
+          <a:p>
+            <a:pPr algn="ctr"/>
+          </a:p>
+        </p:txBody>
+      </p:sp>
+      <p:sp>
+        <p:nvSpPr>
+          <p:cNvPr id="3" name="Rectangle 2"/>
+          <p:cNvSpPr/>
+          <p:nvPr/>
+        </p:nvSpPr>
+        <p:spPr>
+          <a:xfrm>
+            <a:off x="8778020" y="0"/>
+            <a:ext cx="3413674" cy="82296"/>
+          </a:xfrm>
+          <a:prstGeom prst="rect">
+            <a:avLst/>
+          </a:prstGeom>
+          <a:solidFill>
+            <a:srgbClr val="E9A924"/>
+          </a:solidFill>
+          <a:ln>
+            <a:noFill/>
+          </a:ln>
+          <a:effectLst/>
+        </p:spPr>
+        <p:style>
+          <a:lnRef idx="1">
+            <a:schemeClr val="accent1"/>
+          </a:lnRef>
+          <a:fillRef idx="3">
+            <a:schemeClr val="accent1"/>
+          </a:fillRef>
+          <a:effectRef idx="2">
+            <a:schemeClr val="accent1"/>
+          </a:effectRef>
+          <a:fontRef idx="minor">
+            <a:schemeClr val="lt1"/>
+          </a:fontRef>
+        </p:style>
+        <p:txBody>
+          <a:bodyPr rtlCol="0" anchor="ctr"/>
+          <a:lstStyle/>
+          <a:p>
+            <a:pPr algn="ctr"/>
+          </a:p>
+        </p:txBody>
+      </p:sp>
+      <p:sp>
+        <p:nvSpPr>
+          <p:cNvPr id="4" name="TextBox 3"/>
           <p:cNvSpPr txBox="1"/>
           <p:nvPr/>
         </p:nvSpPr>
         <p:spPr>
           <a:xfrm>
-            <a:off x="548640" y="320040"/>
+            <a:off x="548640" y="347472"/>
             <a:ext cx="8229600" cy="320040"/>
           </a:xfrm>
           <a:prstGeom prst="rect">
@@ -6399,9 +8765,9 @@
               </a:spcAft>
             </a:pPr>
             <a:r>
-              <a:rPr sz="1100" b="0">
-                <a:solidFill>
-                  <a:srgbClr val="475069"/>
+              <a:rPr sz="1100" b="1">
+                <a:solidFill>
+                  <a:srgbClr val="BF0A00"/>
                 </a:solidFill>
                 <a:latin typeface="Segoe UI"/>
               </a:rPr>
@@ -6412,13 +8778,13 @@
       </p:sp>
       <p:sp>
         <p:nvSpPr>
-          <p:cNvPr id="3" name="TextBox 2"/>
+          <p:cNvPr id="5" name="TextBox 4"/>
           <p:cNvSpPr txBox="1"/>
           <p:nvPr/>
         </p:nvSpPr>
         <p:spPr>
           <a:xfrm>
-            <a:off x="548640" y="594360"/>
+            <a:off x="548640" y="621792"/>
             <a:ext cx="11064240" cy="822960"/>
           </a:xfrm>
           <a:prstGeom prst="rect">
@@ -6441,11 +8807,11 @@
               </a:spcAft>
             </a:pPr>
             <a:r>
-              <a:rPr sz="2600" b="1">
-                <a:solidFill>
-                  <a:srgbClr val="0F1729"/>
-                </a:solidFill>
-                <a:latin typeface="Segoe UI"/>
+              <a:rPr sz="2700" b="0">
+                <a:solidFill>
+                  <a:srgbClr val="BF0A00"/>
+                </a:solidFill>
+                <a:latin typeface="Segoe UI Black"/>
               </a:rPr>
               <a:t>Dónde intervenir primero y cómo medirlo</a:t>
             </a:r>
@@ -6454,7 +8820,7 @@
       </p:sp>
       <p:sp>
         <p:nvSpPr>
-          <p:cNvPr id="4" name="TextBox 3"/>
+          <p:cNvPr id="6" name="TextBox 5"/>
           <p:cNvSpPr txBox="1"/>
           <p:nvPr/>
         </p:nvSpPr>
@@ -6485,7 +8851,7 @@
             <a:r>
               <a:rPr sz="1000" b="0">
                 <a:solidFill>
-                  <a:srgbClr val="475069"/>
+                  <a:srgbClr val="767676"/>
                 </a:solidFill>
                 <a:latin typeface="Segoe UI"/>
               </a:rPr>
@@ -6496,14 +8862,14 @@
       </p:sp>
       <p:sp>
         <p:nvSpPr>
-          <p:cNvPr id="5" name="TextBox 4"/>
+          <p:cNvPr id="7" name="TextBox 6"/>
           <p:cNvSpPr txBox="1"/>
           <p:nvPr/>
         </p:nvSpPr>
         <p:spPr>
           <a:xfrm>
             <a:off x="548640" y="6400800"/>
-            <a:ext cx="7315200" cy="274320"/>
+            <a:ext cx="8229600" cy="274320"/>
           </a:xfrm>
           <a:prstGeom prst="rect">
             <a:avLst/>
@@ -6527,18 +8893,18 @@
             <a:r>
               <a:rPr sz="1000" b="0">
                 <a:solidFill>
-                  <a:srgbClr val="475069"/>
+                  <a:srgbClr val="767676"/>
                 </a:solidFill>
                 <a:latin typeface="Segoe UI"/>
               </a:rPr>
-              <a:t>El miedo que no baja · The data squad · DataJam 5</a:t>
+              <a:t>El miedo que no baja · The data squad · Bogotá DataJam 5</a:t>
             </a:r>
           </a:p>
         </p:txBody>
       </p:sp>
       <p:pic>
         <p:nvPicPr>
-          <p:cNvPr id="6" name="Picture 5" descr="fig7_indice_brecha.png"/>
+          <p:cNvPr id="8" name="Picture 7" descr="fig7_indice_brecha.png"/>
           <p:cNvPicPr>
             <a:picLocks noChangeAspect="1"/>
           </p:cNvPicPr>
@@ -6552,8 +8918,8 @@
         </p:blipFill>
         <p:spPr>
           <a:xfrm>
-            <a:off x="457200" y="1554480"/>
-            <a:ext cx="5934132" cy="4663440"/>
+            <a:off x="411480" y="1600200"/>
+            <a:ext cx="5486400" cy="4428449"/>
           </a:xfrm>
           <a:prstGeom prst="rect">
             <a:avLst/>
@@ -6562,14 +8928,14 @@
       </p:pic>
       <p:sp>
         <p:nvSpPr>
-          <p:cNvPr id="7" name="Rounded Rectangle 6"/>
+          <p:cNvPr id="9" name="Rounded Rectangle 8"/>
           <p:cNvSpPr/>
           <p:nvPr/>
         </p:nvSpPr>
         <p:spPr>
           <a:xfrm>
-            <a:off x="5852160" y="1600200"/>
-            <a:ext cx="5852160" cy="987552"/>
+            <a:off x="6172200" y="1600200"/>
+            <a:ext cx="5532120" cy="1005840"/>
           </a:xfrm>
           <a:prstGeom prst="roundRect">
             <a:avLst>
@@ -6577,7 +8943,7 @@
             </a:avLst>
           </a:prstGeom>
           <a:solidFill>
-            <a:srgbClr val="F3F5F9"/>
+            <a:srgbClr val="F2F2F2"/>
           </a:solidFill>
           <a:ln>
             <a:noFill/>
@@ -6608,14 +8974,100 @@
       </p:sp>
       <p:sp>
         <p:nvSpPr>
-          <p:cNvPr id="8" name="TextBox 7"/>
+          <p:cNvPr id="10" name="Oval 9"/>
+          <p:cNvSpPr/>
+          <p:nvPr/>
+        </p:nvSpPr>
+        <p:spPr>
+          <a:xfrm>
+            <a:off x="6327648" y="1847088"/>
+            <a:ext cx="502920" cy="502920"/>
+          </a:xfrm>
+          <a:prstGeom prst="ellipse">
+            <a:avLst/>
+          </a:prstGeom>
+          <a:solidFill>
+            <a:srgbClr val="E9A924"/>
+          </a:solidFill>
+          <a:ln>
+            <a:noFill/>
+          </a:ln>
+          <a:effectLst/>
+        </p:spPr>
+        <p:style>
+          <a:lnRef idx="1">
+            <a:schemeClr val="accent1"/>
+          </a:lnRef>
+          <a:fillRef idx="3">
+            <a:schemeClr val="accent1"/>
+          </a:fillRef>
+          <a:effectRef idx="2">
+            <a:schemeClr val="accent1"/>
+          </a:effectRef>
+          <a:fontRef idx="minor">
+            <a:schemeClr val="lt1"/>
+          </a:fontRef>
+        </p:style>
+        <p:txBody>
+          <a:bodyPr rtlCol="0" anchor="ctr"/>
+          <a:lstStyle/>
+          <a:p>
+            <a:pPr algn="ctr"/>
+          </a:p>
+        </p:txBody>
+      </p:sp>
+      <p:sp>
+        <p:nvSpPr>
+          <p:cNvPr id="11" name="TextBox 10"/>
           <p:cNvSpPr txBox="1"/>
           <p:nvPr/>
         </p:nvSpPr>
         <p:spPr>
           <a:xfrm>
-            <a:off x="6035040" y="1691640"/>
-            <a:ext cx="5486400" cy="320040"/>
+            <a:off x="6327648" y="1892807"/>
+            <a:ext cx="502920" cy="457200"/>
+          </a:xfrm>
+          <a:prstGeom prst="rect">
+            <a:avLst/>
+          </a:prstGeom>
+          <a:noFill/>
+        </p:spPr>
+        <p:txBody>
+          <a:bodyPr wrap="square" anchor="t" lIns="18288" rIns="18288">
+            <a:spAutoFit/>
+          </a:bodyPr>
+          <a:lstStyle/>
+          <a:p>
+            <a:pPr algn="ctr">
+              <a:lnSpc>
+                <a:spcPct val="110000"/>
+              </a:lnSpc>
+              <a:spcAft>
+                <a:spcPts val="600"/>
+              </a:spcAft>
+            </a:pPr>
+            <a:r>
+              <a:rPr sz="1600" b="0">
+                <a:solidFill>
+                  <a:srgbClr val="1E1E1E"/>
+                </a:solidFill>
+                <a:latin typeface="Segoe UI Black"/>
+              </a:rPr>
+              <a:t>1</a:t>
+            </a:r>
+          </a:p>
+        </p:txBody>
+      </p:sp>
+      <p:sp>
+        <p:nvSpPr>
+          <p:cNvPr id="12" name="TextBox 11"/>
+          <p:cNvSpPr txBox="1"/>
+          <p:nvPr/>
+        </p:nvSpPr>
+        <p:spPr>
+          <a:xfrm>
+            <a:off x="6995160" y="1691640"/>
+            <a:ext cx="4572000" cy="320040"/>
           </a:xfrm>
           <a:prstGeom prst="rect">
             <a:avLst/>
@@ -6639,7 +9091,7 @@
             <a:r>
               <a:rPr sz="1500" b="1">
                 <a:solidFill>
-                  <a:srgbClr val="8A5300"/>
+                  <a:srgbClr val="BF0A00"/>
                 </a:solidFill>
                 <a:latin typeface="Segoe UI"/>
               </a:rPr>
@@ -6650,14 +9102,14 @@
       </p:sp>
       <p:sp>
         <p:nvSpPr>
-          <p:cNvPr id="9" name="TextBox 8"/>
+          <p:cNvPr id="13" name="TextBox 12"/>
           <p:cNvSpPr txBox="1"/>
           <p:nvPr/>
         </p:nvSpPr>
         <p:spPr>
           <a:xfrm>
-            <a:off x="6035040" y="2039112"/>
-            <a:ext cx="5486400" cy="548640"/>
+            <a:off x="6995160" y="2029967"/>
+            <a:ext cx="4572000" cy="548640"/>
           </a:xfrm>
           <a:prstGeom prst="rect">
             <a:avLst/>
@@ -6679,9 +9131,9 @@
               </a:spcAft>
             </a:pPr>
             <a:r>
-              <a:rPr sz="1250" b="0">
-                <a:solidFill>
-                  <a:srgbClr val="475069"/>
+              <a:rPr sz="1200" b="0">
+                <a:solidFill>
+                  <a:srgbClr val="4B4B4B"/>
                 </a:solidFill>
                 <a:latin typeface="Segoe UI"/>
               </a:rPr>
@@ -6692,14 +9144,14 @@
       </p:sp>
       <p:sp>
         <p:nvSpPr>
-          <p:cNvPr id="10" name="Rounded Rectangle 9"/>
+          <p:cNvPr id="14" name="Rounded Rectangle 13"/>
           <p:cNvSpPr/>
           <p:nvPr/>
         </p:nvSpPr>
         <p:spPr>
           <a:xfrm>
-            <a:off x="5852160" y="2715768"/>
-            <a:ext cx="5852160" cy="987552"/>
+            <a:off x="6172200" y="2734056"/>
+            <a:ext cx="5532120" cy="1005840"/>
           </a:xfrm>
           <a:prstGeom prst="roundRect">
             <a:avLst>
@@ -6707,7 +9159,7 @@
             </a:avLst>
           </a:prstGeom>
           <a:solidFill>
-            <a:srgbClr val="F3F5F9"/>
+            <a:srgbClr val="F2F2F2"/>
           </a:solidFill>
           <a:ln>
             <a:noFill/>
@@ -6738,14 +9190,100 @@
       </p:sp>
       <p:sp>
         <p:nvSpPr>
-          <p:cNvPr id="11" name="TextBox 10"/>
+          <p:cNvPr id="15" name="Oval 14"/>
+          <p:cNvSpPr/>
+          <p:nvPr/>
+        </p:nvSpPr>
+        <p:spPr>
+          <a:xfrm>
+            <a:off x="6327648" y="2980944"/>
+            <a:ext cx="502920" cy="502920"/>
+          </a:xfrm>
+          <a:prstGeom prst="ellipse">
+            <a:avLst/>
+          </a:prstGeom>
+          <a:solidFill>
+            <a:srgbClr val="E9A924"/>
+          </a:solidFill>
+          <a:ln>
+            <a:noFill/>
+          </a:ln>
+          <a:effectLst/>
+        </p:spPr>
+        <p:style>
+          <a:lnRef idx="1">
+            <a:schemeClr val="accent1"/>
+          </a:lnRef>
+          <a:fillRef idx="3">
+            <a:schemeClr val="accent1"/>
+          </a:fillRef>
+          <a:effectRef idx="2">
+            <a:schemeClr val="accent1"/>
+          </a:effectRef>
+          <a:fontRef idx="minor">
+            <a:schemeClr val="lt1"/>
+          </a:fontRef>
+        </p:style>
+        <p:txBody>
+          <a:bodyPr rtlCol="0" anchor="ctr"/>
+          <a:lstStyle/>
+          <a:p>
+            <a:pPr algn="ctr"/>
+          </a:p>
+        </p:txBody>
+      </p:sp>
+      <p:sp>
+        <p:nvSpPr>
+          <p:cNvPr id="16" name="TextBox 15"/>
           <p:cNvSpPr txBox="1"/>
           <p:nvPr/>
         </p:nvSpPr>
         <p:spPr>
           <a:xfrm>
-            <a:off x="6035040" y="2807208"/>
-            <a:ext cx="5486400" cy="320040"/>
+            <a:off x="6327648" y="3026664"/>
+            <a:ext cx="502920" cy="457200"/>
+          </a:xfrm>
+          <a:prstGeom prst="rect">
+            <a:avLst/>
+          </a:prstGeom>
+          <a:noFill/>
+        </p:spPr>
+        <p:txBody>
+          <a:bodyPr wrap="square" anchor="t" lIns="18288" rIns="18288">
+            <a:spAutoFit/>
+          </a:bodyPr>
+          <a:lstStyle/>
+          <a:p>
+            <a:pPr algn="ctr">
+              <a:lnSpc>
+                <a:spcPct val="110000"/>
+              </a:lnSpc>
+              <a:spcAft>
+                <a:spcPts val="600"/>
+              </a:spcAft>
+            </a:pPr>
+            <a:r>
+              <a:rPr sz="1600" b="0">
+                <a:solidFill>
+                  <a:srgbClr val="1E1E1E"/>
+                </a:solidFill>
+                <a:latin typeface="Segoe UI Black"/>
+              </a:rPr>
+              <a:t>2</a:t>
+            </a:r>
+          </a:p>
+        </p:txBody>
+      </p:sp>
+      <p:sp>
+        <p:nvSpPr>
+          <p:cNvPr id="17" name="TextBox 16"/>
+          <p:cNvSpPr txBox="1"/>
+          <p:nvPr/>
+        </p:nvSpPr>
+        <p:spPr>
+          <a:xfrm>
+            <a:off x="6995160" y="2825496"/>
+            <a:ext cx="4572000" cy="320040"/>
           </a:xfrm>
           <a:prstGeom prst="rect">
             <a:avLst/>
@@ -6769,7 +9307,7 @@
             <a:r>
               <a:rPr sz="1500" b="1">
                 <a:solidFill>
-                  <a:srgbClr val="8A5300"/>
+                  <a:srgbClr val="BF0A00"/>
                 </a:solidFill>
                 <a:latin typeface="Segoe UI"/>
               </a:rPr>
@@ -6780,14 +9318,14 @@
       </p:sp>
       <p:sp>
         <p:nvSpPr>
-          <p:cNvPr id="12" name="TextBox 11"/>
+          <p:cNvPr id="18" name="TextBox 17"/>
           <p:cNvSpPr txBox="1"/>
           <p:nvPr/>
         </p:nvSpPr>
         <p:spPr>
           <a:xfrm>
-            <a:off x="6035040" y="3154679"/>
-            <a:ext cx="5486400" cy="548640"/>
+            <a:off x="6995160" y="3163824"/>
+            <a:ext cx="4572000" cy="548640"/>
           </a:xfrm>
           <a:prstGeom prst="rect">
             <a:avLst/>
@@ -6809,9 +9347,9 @@
               </a:spcAft>
             </a:pPr>
             <a:r>
-              <a:rPr sz="1250" b="0">
-                <a:solidFill>
-                  <a:srgbClr val="475069"/>
+              <a:rPr sz="1200" b="0">
+                <a:solidFill>
+                  <a:srgbClr val="4B4B4B"/>
                 </a:solidFill>
                 <a:latin typeface="Segoe UI"/>
               </a:rPr>
@@ -6822,14 +9360,14 @@
       </p:sp>
       <p:sp>
         <p:nvSpPr>
-          <p:cNvPr id="13" name="Rounded Rectangle 12"/>
+          <p:cNvPr id="19" name="Rounded Rectangle 18"/>
           <p:cNvSpPr/>
           <p:nvPr/>
         </p:nvSpPr>
         <p:spPr>
           <a:xfrm>
-            <a:off x="5852160" y="3831335"/>
-            <a:ext cx="5852160" cy="987552"/>
+            <a:off x="6172200" y="3867912"/>
+            <a:ext cx="5532120" cy="1005840"/>
           </a:xfrm>
           <a:prstGeom prst="roundRect">
             <a:avLst>
@@ -6837,7 +9375,7 @@
             </a:avLst>
           </a:prstGeom>
           <a:solidFill>
-            <a:srgbClr val="F3F5F9"/>
+            <a:srgbClr val="F2F2F2"/>
           </a:solidFill>
           <a:ln>
             <a:noFill/>
@@ -6868,14 +9406,100 @@
       </p:sp>
       <p:sp>
         <p:nvSpPr>
-          <p:cNvPr id="14" name="TextBox 13"/>
+          <p:cNvPr id="20" name="Oval 19"/>
+          <p:cNvSpPr/>
+          <p:nvPr/>
+        </p:nvSpPr>
+        <p:spPr>
+          <a:xfrm>
+            <a:off x="6327648" y="4114800"/>
+            <a:ext cx="502920" cy="502920"/>
+          </a:xfrm>
+          <a:prstGeom prst="ellipse">
+            <a:avLst/>
+          </a:prstGeom>
+          <a:solidFill>
+            <a:srgbClr val="E9A924"/>
+          </a:solidFill>
+          <a:ln>
+            <a:noFill/>
+          </a:ln>
+          <a:effectLst/>
+        </p:spPr>
+        <p:style>
+          <a:lnRef idx="1">
+            <a:schemeClr val="accent1"/>
+          </a:lnRef>
+          <a:fillRef idx="3">
+            <a:schemeClr val="accent1"/>
+          </a:fillRef>
+          <a:effectRef idx="2">
+            <a:schemeClr val="accent1"/>
+          </a:effectRef>
+          <a:fontRef idx="minor">
+            <a:schemeClr val="lt1"/>
+          </a:fontRef>
+        </p:style>
+        <p:txBody>
+          <a:bodyPr rtlCol="0" anchor="ctr"/>
+          <a:lstStyle/>
+          <a:p>
+            <a:pPr algn="ctr"/>
+          </a:p>
+        </p:txBody>
+      </p:sp>
+      <p:sp>
+        <p:nvSpPr>
+          <p:cNvPr id="21" name="TextBox 20"/>
           <p:cNvSpPr txBox="1"/>
           <p:nvPr/>
         </p:nvSpPr>
         <p:spPr>
           <a:xfrm>
-            <a:off x="6035040" y="3922775"/>
-            <a:ext cx="5486400" cy="320040"/>
+            <a:off x="6327648" y="4160520"/>
+            <a:ext cx="502920" cy="457200"/>
+          </a:xfrm>
+          <a:prstGeom prst="rect">
+            <a:avLst/>
+          </a:prstGeom>
+          <a:noFill/>
+        </p:spPr>
+        <p:txBody>
+          <a:bodyPr wrap="square" anchor="t" lIns="18288" rIns="18288">
+            <a:spAutoFit/>
+          </a:bodyPr>
+          <a:lstStyle/>
+          <a:p>
+            <a:pPr algn="ctr">
+              <a:lnSpc>
+                <a:spcPct val="110000"/>
+              </a:lnSpc>
+              <a:spcAft>
+                <a:spcPts val="600"/>
+              </a:spcAft>
+            </a:pPr>
+            <a:r>
+              <a:rPr sz="1600" b="0">
+                <a:solidFill>
+                  <a:srgbClr val="1E1E1E"/>
+                </a:solidFill>
+                <a:latin typeface="Segoe UI Black"/>
+              </a:rPr>
+              <a:t>3</a:t>
+            </a:r>
+          </a:p>
+        </p:txBody>
+      </p:sp>
+      <p:sp>
+        <p:nvSpPr>
+          <p:cNvPr id="22" name="TextBox 21"/>
+          <p:cNvSpPr txBox="1"/>
+          <p:nvPr/>
+        </p:nvSpPr>
+        <p:spPr>
+          <a:xfrm>
+            <a:off x="6995160" y="3959352"/>
+            <a:ext cx="4572000" cy="320040"/>
           </a:xfrm>
           <a:prstGeom prst="rect">
             <a:avLst/>
@@ -6899,7 +9523,7 @@
             <a:r>
               <a:rPr sz="1500" b="1">
                 <a:solidFill>
-                  <a:srgbClr val="8A5300"/>
+                  <a:srgbClr val="BF0A00"/>
                 </a:solidFill>
                 <a:latin typeface="Segoe UI"/>
               </a:rPr>
@@ -6910,14 +9534,14 @@
       </p:sp>
       <p:sp>
         <p:nvSpPr>
-          <p:cNvPr id="15" name="TextBox 14"/>
+          <p:cNvPr id="23" name="TextBox 22"/>
           <p:cNvSpPr txBox="1"/>
           <p:nvPr/>
         </p:nvSpPr>
         <p:spPr>
           <a:xfrm>
-            <a:off x="6035040" y="4270248"/>
-            <a:ext cx="5486400" cy="548640"/>
+            <a:off x="6995160" y="4297680"/>
+            <a:ext cx="4572000" cy="548640"/>
           </a:xfrm>
           <a:prstGeom prst="rect">
             <a:avLst/>
@@ -6939,9 +9563,9 @@
               </a:spcAft>
             </a:pPr>
             <a:r>
-              <a:rPr sz="1250" b="0">
-                <a:solidFill>
-                  <a:srgbClr val="475069"/>
+              <a:rPr sz="1200" b="0">
+                <a:solidFill>
+                  <a:srgbClr val="4B4B4B"/>
                 </a:solidFill>
                 <a:latin typeface="Segoe UI"/>
               </a:rPr>
@@ -6952,14 +9576,14 @@
       </p:sp>
       <p:sp>
         <p:nvSpPr>
-          <p:cNvPr id="16" name="Rounded Rectangle 15"/>
+          <p:cNvPr id="24" name="Rounded Rectangle 23"/>
           <p:cNvSpPr/>
           <p:nvPr/>
         </p:nvSpPr>
         <p:spPr>
           <a:xfrm>
-            <a:off x="5852160" y="4946904"/>
-            <a:ext cx="5852160" cy="987552"/>
+            <a:off x="6172200" y="5001768"/>
+            <a:ext cx="5532120" cy="1005840"/>
           </a:xfrm>
           <a:prstGeom prst="roundRect">
             <a:avLst>
@@ -6967,7 +9591,7 @@
             </a:avLst>
           </a:prstGeom>
           <a:solidFill>
-            <a:srgbClr val="F3F5F9"/>
+            <a:srgbClr val="F2F2F2"/>
           </a:solidFill>
           <a:ln>
             <a:noFill/>
@@ -6998,14 +9622,100 @@
       </p:sp>
       <p:sp>
         <p:nvSpPr>
-          <p:cNvPr id="17" name="TextBox 16"/>
+          <p:cNvPr id="25" name="Oval 24"/>
+          <p:cNvSpPr/>
+          <p:nvPr/>
+        </p:nvSpPr>
+        <p:spPr>
+          <a:xfrm>
+            <a:off x="6327648" y="5248656"/>
+            <a:ext cx="502920" cy="502920"/>
+          </a:xfrm>
+          <a:prstGeom prst="ellipse">
+            <a:avLst/>
+          </a:prstGeom>
+          <a:solidFill>
+            <a:srgbClr val="E9A924"/>
+          </a:solidFill>
+          <a:ln>
+            <a:noFill/>
+          </a:ln>
+          <a:effectLst/>
+        </p:spPr>
+        <p:style>
+          <a:lnRef idx="1">
+            <a:schemeClr val="accent1"/>
+          </a:lnRef>
+          <a:fillRef idx="3">
+            <a:schemeClr val="accent1"/>
+          </a:fillRef>
+          <a:effectRef idx="2">
+            <a:schemeClr val="accent1"/>
+          </a:effectRef>
+          <a:fontRef idx="minor">
+            <a:schemeClr val="lt1"/>
+          </a:fontRef>
+        </p:style>
+        <p:txBody>
+          <a:bodyPr rtlCol="0" anchor="ctr"/>
+          <a:lstStyle/>
+          <a:p>
+            <a:pPr algn="ctr"/>
+          </a:p>
+        </p:txBody>
+      </p:sp>
+      <p:sp>
+        <p:nvSpPr>
+          <p:cNvPr id="26" name="TextBox 25"/>
           <p:cNvSpPr txBox="1"/>
           <p:nvPr/>
         </p:nvSpPr>
         <p:spPr>
           <a:xfrm>
-            <a:off x="6035040" y="5038344"/>
-            <a:ext cx="5486400" cy="320040"/>
+            <a:off x="6327648" y="5294376"/>
+            <a:ext cx="502920" cy="457200"/>
+          </a:xfrm>
+          <a:prstGeom prst="rect">
+            <a:avLst/>
+          </a:prstGeom>
+          <a:noFill/>
+        </p:spPr>
+        <p:txBody>
+          <a:bodyPr wrap="square" anchor="t" lIns="18288" rIns="18288">
+            <a:spAutoFit/>
+          </a:bodyPr>
+          <a:lstStyle/>
+          <a:p>
+            <a:pPr algn="ctr">
+              <a:lnSpc>
+                <a:spcPct val="110000"/>
+              </a:lnSpc>
+              <a:spcAft>
+                <a:spcPts val="600"/>
+              </a:spcAft>
+            </a:pPr>
+            <a:r>
+              <a:rPr sz="1600" b="0">
+                <a:solidFill>
+                  <a:srgbClr val="1E1E1E"/>
+                </a:solidFill>
+                <a:latin typeface="Segoe UI Black"/>
+              </a:rPr>
+              <a:t>4</a:t>
+            </a:r>
+          </a:p>
+        </p:txBody>
+      </p:sp>
+      <p:sp>
+        <p:nvSpPr>
+          <p:cNvPr id="27" name="TextBox 26"/>
+          <p:cNvSpPr txBox="1"/>
+          <p:nvPr/>
+        </p:nvSpPr>
+        <p:spPr>
+          <a:xfrm>
+            <a:off x="6995160" y="5093207"/>
+            <a:ext cx="4572000" cy="320040"/>
           </a:xfrm>
           <a:prstGeom prst="rect">
             <a:avLst/>
@@ -7029,7 +9739,7 @@
             <a:r>
               <a:rPr sz="1500" b="1">
                 <a:solidFill>
-                  <a:srgbClr val="2F63D6"/>
+                  <a:srgbClr val="BF0A00"/>
                 </a:solidFill>
                 <a:latin typeface="Segoe UI"/>
               </a:rPr>
@@ -7040,14 +9750,14 @@
       </p:sp>
       <p:sp>
         <p:nvSpPr>
-          <p:cNvPr id="18" name="TextBox 17"/>
+          <p:cNvPr id="28" name="TextBox 27"/>
           <p:cNvSpPr txBox="1"/>
           <p:nvPr/>
         </p:nvSpPr>
         <p:spPr>
           <a:xfrm>
-            <a:off x="6035040" y="5385816"/>
-            <a:ext cx="5486400" cy="548640"/>
+            <a:off x="6995160" y="5431536"/>
+            <a:ext cx="4572000" cy="548640"/>
           </a:xfrm>
           <a:prstGeom prst="rect">
             <a:avLst/>
@@ -7069,9 +9779,9 @@
               </a:spcAft>
             </a:pPr>
             <a:r>
-              <a:rPr sz="1250" b="0">
-                <a:solidFill>
-                  <a:srgbClr val="475069"/>
+              <a:rPr sz="1200" b="0">
+                <a:solidFill>
+                  <a:srgbClr val="4B4B4B"/>
                 </a:solidFill>
                 <a:latin typeface="Segoe UI"/>
               </a:rPr>
@@ -7108,13 +9818,101 @@
       <p:grpSpPr/>
       <p:sp>
         <p:nvSpPr>
-          <p:cNvPr id="2" name="TextBox 1"/>
+          <p:cNvPr id="2" name="Rectangle 1"/>
+          <p:cNvSpPr/>
+          <p:nvPr/>
+        </p:nvSpPr>
+        <p:spPr>
+          <a:xfrm>
+            <a:off x="0" y="0"/>
+            <a:ext cx="8778020" cy="82296"/>
+          </a:xfrm>
+          <a:prstGeom prst="rect">
+            <a:avLst/>
+          </a:prstGeom>
+          <a:solidFill>
+            <a:srgbClr val="BF0A00"/>
+          </a:solidFill>
+          <a:ln>
+            <a:noFill/>
+          </a:ln>
+          <a:effectLst/>
+        </p:spPr>
+        <p:style>
+          <a:lnRef idx="1">
+            <a:schemeClr val="accent1"/>
+          </a:lnRef>
+          <a:fillRef idx="3">
+            <a:schemeClr val="accent1"/>
+          </a:fillRef>
+          <a:effectRef idx="2">
+            <a:schemeClr val="accent1"/>
+          </a:effectRef>
+          <a:fontRef idx="minor">
+            <a:schemeClr val="lt1"/>
+          </a:fontRef>
+        </p:style>
+        <p:txBody>
+          <a:bodyPr rtlCol="0" anchor="ctr"/>
+          <a:lstStyle/>
+          <a:p>
+            <a:pPr algn="ctr"/>
+          </a:p>
+        </p:txBody>
+      </p:sp>
+      <p:sp>
+        <p:nvSpPr>
+          <p:cNvPr id="3" name="Rectangle 2"/>
+          <p:cNvSpPr/>
+          <p:nvPr/>
+        </p:nvSpPr>
+        <p:spPr>
+          <a:xfrm>
+            <a:off x="8778020" y="0"/>
+            <a:ext cx="3413674" cy="82296"/>
+          </a:xfrm>
+          <a:prstGeom prst="rect">
+            <a:avLst/>
+          </a:prstGeom>
+          <a:solidFill>
+            <a:srgbClr val="E9A924"/>
+          </a:solidFill>
+          <a:ln>
+            <a:noFill/>
+          </a:ln>
+          <a:effectLst/>
+        </p:spPr>
+        <p:style>
+          <a:lnRef idx="1">
+            <a:schemeClr val="accent1"/>
+          </a:lnRef>
+          <a:fillRef idx="3">
+            <a:schemeClr val="accent1"/>
+          </a:fillRef>
+          <a:effectRef idx="2">
+            <a:schemeClr val="accent1"/>
+          </a:effectRef>
+          <a:fontRef idx="minor">
+            <a:schemeClr val="lt1"/>
+          </a:fontRef>
+        </p:style>
+        <p:txBody>
+          <a:bodyPr rtlCol="0" anchor="ctr"/>
+          <a:lstStyle/>
+          <a:p>
+            <a:pPr algn="ctr"/>
+          </a:p>
+        </p:txBody>
+      </p:sp>
+      <p:sp>
+        <p:nvSpPr>
+          <p:cNvPr id="4" name="TextBox 3"/>
           <p:cNvSpPr txBox="1"/>
           <p:nvPr/>
         </p:nvSpPr>
         <p:spPr>
           <a:xfrm>
-            <a:off x="548640" y="320040"/>
+            <a:off x="548640" y="347472"/>
             <a:ext cx="8229600" cy="320040"/>
           </a:xfrm>
           <a:prstGeom prst="rect">
@@ -7137,9 +9935,9 @@
               </a:spcAft>
             </a:pPr>
             <a:r>
-              <a:rPr sz="1100" b="0">
-                <a:solidFill>
-                  <a:srgbClr val="475069"/>
+              <a:rPr sz="1100" b="1">
+                <a:solidFill>
+                  <a:srgbClr val="BF0A00"/>
                 </a:solidFill>
                 <a:latin typeface="Segoe UI"/>
               </a:rPr>
@@ -7150,13 +9948,13 @@
       </p:sp>
       <p:sp>
         <p:nvSpPr>
-          <p:cNvPr id="3" name="TextBox 2"/>
+          <p:cNvPr id="5" name="TextBox 4"/>
           <p:cNvSpPr txBox="1"/>
           <p:nvPr/>
         </p:nvSpPr>
         <p:spPr>
           <a:xfrm>
-            <a:off x="548640" y="594360"/>
+            <a:off x="548640" y="621792"/>
             <a:ext cx="11064240" cy="822960"/>
           </a:xfrm>
           <a:prstGeom prst="rect">
@@ -7179,11 +9977,11 @@
               </a:spcAft>
             </a:pPr>
             <a:r>
-              <a:rPr sz="2600" b="1">
-                <a:solidFill>
-                  <a:srgbClr val="0F1729"/>
-                </a:solidFill>
-                <a:latin typeface="Segoe UI"/>
+              <a:rPr sz="2700" b="0">
+                <a:solidFill>
+                  <a:srgbClr val="BF0A00"/>
+                </a:solidFill>
+                <a:latin typeface="Segoe UI Black"/>
               </a:rPr>
               <a:t>Un indicador medible, comparable y con fuentes que ya existen</a:t>
             </a:r>
@@ -7192,7 +9990,7 @@
       </p:sp>
       <p:sp>
         <p:nvSpPr>
-          <p:cNvPr id="4" name="TextBox 3"/>
+          <p:cNvPr id="6" name="TextBox 5"/>
           <p:cNvSpPr txBox="1"/>
           <p:nvPr/>
         </p:nvSpPr>
@@ -7223,7 +10021,7 @@
             <a:r>
               <a:rPr sz="1000" b="0">
                 <a:solidFill>
-                  <a:srgbClr val="475069"/>
+                  <a:srgbClr val="767676"/>
                 </a:solidFill>
                 <a:latin typeface="Segoe UI"/>
               </a:rPr>
@@ -7234,14 +10032,14 @@
       </p:sp>
       <p:sp>
         <p:nvSpPr>
-          <p:cNvPr id="5" name="TextBox 4"/>
+          <p:cNvPr id="7" name="TextBox 6"/>
           <p:cNvSpPr txBox="1"/>
           <p:nvPr/>
         </p:nvSpPr>
         <p:spPr>
           <a:xfrm>
             <a:off x="548640" y="6400800"/>
-            <a:ext cx="7315200" cy="274320"/>
+            <a:ext cx="8229600" cy="274320"/>
           </a:xfrm>
           <a:prstGeom prst="rect">
             <a:avLst/>
@@ -7265,25 +10063,25 @@
             <a:r>
               <a:rPr sz="1000" b="0">
                 <a:solidFill>
-                  <a:srgbClr val="475069"/>
+                  <a:srgbClr val="767676"/>
                 </a:solidFill>
                 <a:latin typeface="Segoe UI"/>
               </a:rPr>
-              <a:t>El miedo que no baja · The data squad · DataJam 5</a:t>
-            </a:r>
-          </a:p>
-        </p:txBody>
-      </p:sp>
-      <p:sp>
-        <p:nvSpPr>
-          <p:cNvPr id="6" name="TextBox 5"/>
+              <a:t>El miedo que no baja · The data squad · Bogotá DataJam 5</a:t>
+            </a:r>
+          </a:p>
+        </p:txBody>
+      </p:sp>
+      <p:sp>
+        <p:nvSpPr>
+          <p:cNvPr id="8" name="TextBox 7"/>
           <p:cNvSpPr txBox="1"/>
           <p:nvPr/>
         </p:nvSpPr>
         <p:spPr>
           <a:xfrm>
-            <a:off x="548640" y="1737360"/>
-            <a:ext cx="6766560" cy="4114800"/>
+            <a:off x="548640" y="1645920"/>
+            <a:ext cx="6949440" cy="3566160"/>
           </a:xfrm>
           <a:prstGeom prst="rect">
             <a:avLst/>
@@ -7298,25 +10096,25 @@
           <a:p>
             <a:pPr algn="l">
               <a:lnSpc>
-                <a:spcPct val="115000"/>
+                <a:spcPct val="112000"/>
               </a:lnSpc>
               <a:spcAft>
                 <a:spcPts val="600"/>
               </a:spcAft>
             </a:pPr>
             <a:r>
-              <a:rPr sz="1600" b="1">
-                <a:solidFill>
-                  <a:srgbClr val="0F1729"/>
+              <a:rPr sz="1500" b="1">
+                <a:solidFill>
+                  <a:srgbClr val="1E1E1E"/>
                 </a:solidFill>
                 <a:latin typeface="Segoe UI"/>
               </a:rPr>
               <a:t>Fórmula: </a:t>
             </a:r>
             <a:r>
-              <a:rPr sz="1600" b="0">
-                <a:solidFill>
-                  <a:srgbClr val="475069"/>
+              <a:rPr sz="1500" b="0">
+                <a:solidFill>
+                  <a:srgbClr val="4B4B4B"/>
                 </a:solidFill>
                 <a:latin typeface="Segoe UI"/>
               </a:rPr>
@@ -7326,25 +10124,25 @@
           <a:p>
             <a:pPr algn="l">
               <a:lnSpc>
-                <a:spcPct val="115000"/>
+                <a:spcPct val="112000"/>
               </a:lnSpc>
               <a:spcAft>
                 <a:spcPts val="600"/>
               </a:spcAft>
             </a:pPr>
             <a:r>
-              <a:rPr sz="1600" b="1">
-                <a:solidFill>
-                  <a:srgbClr val="0F1729"/>
+              <a:rPr sz="1500" b="1">
+                <a:solidFill>
+                  <a:srgbClr val="1E1E1E"/>
                 </a:solidFill>
                 <a:latin typeface="Segoe UI"/>
               </a:rPr>
               <a:t>Fuentes: </a:t>
             </a:r>
             <a:r>
-              <a:rPr sz="1600" b="0">
-                <a:solidFill>
-                  <a:srgbClr val="475069"/>
+              <a:rPr sz="1500" b="0">
+                <a:solidFill>
+                  <a:srgbClr val="4B4B4B"/>
                 </a:solidFill>
                 <a:latin typeface="Segoe UI"/>
               </a:rPr>
@@ -7354,25 +10152,25 @@
           <a:p>
             <a:pPr algn="l">
               <a:lnSpc>
-                <a:spcPct val="115000"/>
+                <a:spcPct val="112000"/>
               </a:lnSpc>
               <a:spcAft>
                 <a:spcPts val="600"/>
               </a:spcAft>
             </a:pPr>
             <a:r>
-              <a:rPr sz="1600" b="1">
-                <a:solidFill>
-                  <a:srgbClr val="0F1729"/>
+              <a:rPr sz="1500" b="1">
+                <a:solidFill>
+                  <a:srgbClr val="1E1E1E"/>
                 </a:solidFill>
                 <a:latin typeface="Segoe UI"/>
               </a:rPr>
               <a:t>Periodicidad: </a:t>
             </a:r>
             <a:r>
-              <a:rPr sz="1600" b="0">
-                <a:solidFill>
-                  <a:srgbClr val="475069"/>
+              <a:rPr sz="1500" b="0">
+                <a:solidFill>
+                  <a:srgbClr val="4B4B4B"/>
                 </a:solidFill>
                 <a:latin typeface="Segoe UI"/>
               </a:rPr>
@@ -7382,25 +10180,25 @@
           <a:p>
             <a:pPr algn="l">
               <a:lnSpc>
-                <a:spcPct val="115000"/>
+                <a:spcPct val="112000"/>
               </a:lnSpc>
               <a:spcAft>
                 <a:spcPts val="600"/>
               </a:spcAft>
             </a:pPr>
             <a:r>
-              <a:rPr sz="1600" b="1">
-                <a:solidFill>
-                  <a:srgbClr val="0F1729"/>
+              <a:rPr sz="1500" b="1">
+                <a:solidFill>
+                  <a:srgbClr val="1E1E1E"/>
                 </a:solidFill>
                 <a:latin typeface="Segoe UI"/>
               </a:rPr>
               <a:t>Línea base 2025: </a:t>
             </a:r>
             <a:r>
-              <a:rPr sz="1600" b="0">
-                <a:solidFill>
-                  <a:srgbClr val="475069"/>
+              <a:rPr sz="1500" b="0">
+                <a:solidFill>
+                  <a:srgbClr val="4B4B4B"/>
                 </a:solidFill>
                 <a:latin typeface="Segoe UI"/>
               </a:rPr>
@@ -7410,25 +10208,25 @@
           <a:p>
             <a:pPr algn="l">
               <a:lnSpc>
-                <a:spcPct val="115000"/>
+                <a:spcPct val="112000"/>
               </a:lnSpc>
               <a:spcAft>
                 <a:spcPts val="600"/>
               </a:spcAft>
             </a:pPr>
             <a:r>
-              <a:rPr sz="1600" b="1">
-                <a:solidFill>
-                  <a:srgbClr val="0F1729"/>
+              <a:rPr sz="1500" b="1">
+                <a:solidFill>
+                  <a:srgbClr val="1E1E1E"/>
                 </a:solidFill>
                 <a:latin typeface="Segoe UI"/>
               </a:rPr>
               <a:t>Simulador: </a:t>
             </a:r>
             <a:r>
-              <a:rPr sz="1600" b="0">
-                <a:solidFill>
-                  <a:srgbClr val="475069"/>
+              <a:rPr sz="1500" b="0">
+                <a:solidFill>
+                  <a:srgbClr val="4B4B4B"/>
                 </a:solidFill>
                 <a:latin typeface="Segoe UI"/>
               </a:rPr>
@@ -7438,36 +10236,36 @@
           <a:p>
             <a:pPr algn="l">
               <a:lnSpc>
-                <a:spcPct val="115000"/>
+                <a:spcPct val="112000"/>
               </a:lnSpc>
               <a:spcAft>
                 <a:spcPts val="600"/>
               </a:spcAft>
             </a:pPr>
             <a:r>
-              <a:rPr sz="1600" b="1">
-                <a:solidFill>
-                  <a:srgbClr val="0F1729"/>
+              <a:rPr sz="1500" b="1">
+                <a:solidFill>
+                  <a:srgbClr val="1E1E1E"/>
                 </a:solidFill>
                 <a:latin typeface="Segoe UI"/>
               </a:rPr>
               <a:t>Todo reproducible: </a:t>
             </a:r>
             <a:r>
-              <a:rPr sz="1600" b="0">
-                <a:solidFill>
-                  <a:srgbClr val="475069"/>
+              <a:rPr sz="1500" b="0">
+                <a:solidFill>
+                  <a:srgbClr val="4B4B4B"/>
                 </a:solidFill>
                 <a:latin typeface="Segoe UI"/>
               </a:rPr>
-              <a:t>notebook, repositorio, Power BI y descargas CSV y GeoJSON</a:t>
+              <a:t>notebook, repositorio, Power BI, Excel y descargas CSV y GeoJSON</a:t>
             </a:r>
           </a:p>
         </p:txBody>
       </p:sp>
       <p:pic>
         <p:nvPicPr>
-          <p:cNvPr id="7" name="Picture 6" descr="qr_visor.png"/>
+          <p:cNvPr id="9" name="Picture 8" descr="qr_visor.png"/>
           <p:cNvPicPr>
             <a:picLocks noChangeAspect="1"/>
           </p:cNvPicPr>
@@ -7481,8 +10279,8 @@
         </p:blipFill>
         <p:spPr>
           <a:xfrm>
-            <a:off x="8503920" y="1737360"/>
-            <a:ext cx="2743200" cy="2743200"/>
+            <a:off x="8732520" y="1600200"/>
+            <a:ext cx="2468880" cy="2468880"/>
           </a:xfrm>
           <a:prstGeom prst="rect">
             <a:avLst/>
@@ -7491,14 +10289,14 @@
       </p:pic>
       <p:sp>
         <p:nvSpPr>
-          <p:cNvPr id="8" name="TextBox 7"/>
+          <p:cNvPr id="10" name="TextBox 9"/>
           <p:cNvSpPr txBox="1"/>
           <p:nvPr/>
         </p:nvSpPr>
         <p:spPr>
           <a:xfrm>
-            <a:off x="7863840" y="4572000"/>
-            <a:ext cx="4023360" cy="731520"/>
+            <a:off x="7863840" y="4069080"/>
+            <a:ext cx="4206240" cy="731520"/>
           </a:xfrm>
           <a:prstGeom prst="rect">
             <a:avLst/>
@@ -7520,9 +10318,9 @@
               </a:spcAft>
             </a:pPr>
             <a:r>
-              <a:rPr sz="1300" b="0">
-                <a:solidFill>
-                  <a:srgbClr val="475069"/>
+              <a:rPr sz="1250" b="1">
+                <a:solidFill>
+                  <a:srgbClr val="1E1E1E"/>
                 </a:solidFill>
                 <a:latin typeface="Segoe UI"/>
               </a:rPr>
@@ -7539,13 +10337,110 @@
               </a:spcAft>
             </a:pPr>
             <a:r>
-              <a:rPr sz="1300" b="0">
-                <a:solidFill>
-                  <a:srgbClr val="475069"/>
+              <a:rPr sz="1250" b="0">
+                <a:solidFill>
+                  <a:srgbClr val="4B4B4B"/>
                 </a:solidFill>
                 <a:latin typeface="Segoe UI"/>
               </a:rPr>
               <a:t>clave en el correo de entrega</a:t>
+            </a:r>
+          </a:p>
+        </p:txBody>
+      </p:sp>
+      <p:sp>
+        <p:nvSpPr>
+          <p:cNvPr id="11" name="Rounded Rectangle 10"/>
+          <p:cNvSpPr/>
+          <p:nvPr/>
+        </p:nvSpPr>
+        <p:spPr>
+          <a:xfrm>
+            <a:off x="548640" y="5257800"/>
+            <a:ext cx="11109960" cy="960120"/>
+          </a:xfrm>
+          <a:prstGeom prst="roundRect">
+            <a:avLst>
+              <a:gd name="adj" fmla="val 6000"/>
+            </a:avLst>
+          </a:prstGeom>
+          <a:solidFill>
+            <a:srgbClr val="BF0A00"/>
+          </a:solidFill>
+          <a:ln>
+            <a:noFill/>
+          </a:ln>
+          <a:effectLst/>
+        </p:spPr>
+        <p:style>
+          <a:lnRef idx="1">
+            <a:schemeClr val="accent1"/>
+          </a:lnRef>
+          <a:fillRef idx="3">
+            <a:schemeClr val="accent1"/>
+          </a:fillRef>
+          <a:effectRef idx="2">
+            <a:schemeClr val="accent1"/>
+          </a:effectRef>
+          <a:fontRef idx="minor">
+            <a:schemeClr val="lt1"/>
+          </a:fontRef>
+        </p:style>
+        <p:txBody>
+          <a:bodyPr rtlCol="0" anchor="ctr"/>
+          <a:lstStyle/>
+          <a:p>
+            <a:pPr algn="ctr"/>
+          </a:p>
+        </p:txBody>
+      </p:sp>
+      <p:sp>
+        <p:nvSpPr>
+          <p:cNvPr id="12" name="TextBox 11"/>
+          <p:cNvSpPr txBox="1"/>
+          <p:nvPr/>
+        </p:nvSpPr>
+        <p:spPr>
+          <a:xfrm>
+            <a:off x="822960" y="5257800"/>
+            <a:ext cx="10607040" cy="960120"/>
+          </a:xfrm>
+          <a:prstGeom prst="rect">
+            <a:avLst/>
+          </a:prstGeom>
+          <a:noFill/>
+        </p:spPr>
+        <p:txBody>
+          <a:bodyPr wrap="square" anchor="ctr" lIns="18288" rIns="18288">
+            <a:spAutoFit/>
+          </a:bodyPr>
+          <a:lstStyle/>
+          <a:p>
+            <a:pPr algn="l">
+              <a:lnSpc>
+                <a:spcPct val="110000"/>
+              </a:lnSpc>
+              <a:spcAft>
+                <a:spcPts val="600"/>
+              </a:spcAft>
+            </a:pPr>
+            <a:r>
+              <a:rPr sz="2200" b="0">
+                <a:solidFill>
+                  <a:srgbClr val="FFFFFF"/>
+                </a:solidFill>
+                <a:latin typeface="Segoe UI Black"/>
+              </a:rPr>
+              <a:t>Bogotá ya produce los datos para cerrar esta brecha. </a:t>
+            </a:r>
+            <a:r>
+              <a:rPr sz="2200" b="0">
+                <a:solidFill>
+                  <a:srgbClr val="E9A924"/>
+                </a:solidFill>
+                <a:latin typeface="Segoe UI Black"/>
+              </a:rPr>
+              <a:t>Hay que leerlos juntos.</a:t>
             </a:r>
           </a:p>
         </p:txBody>
@@ -7876,4 +10771,324 @@
   </a:objectDefaults>
   <a:extraClrSchemeLst/>
 </a:theme>
+</file>
+
+<file path=ppt/theme/theme2.xml><?xml version="1.0" encoding="utf-8"?>
+<a:theme xmlns:a="http://schemas.openxmlformats.org/drawingml/2006/main" name="Office Theme">
+  <a:themeElements>
+    <a:clrScheme name="Office">
+      <a:dk1>
+        <a:sysClr val="windowText" lastClr="000000"/>
+      </a:dk1>
+      <a:lt1>
+        <a:sysClr val="window" lastClr="FFFFFF"/>
+      </a:lt1>
+      <a:dk2>
+        <a:srgbClr val="1F497D"/>
+      </a:dk2>
+      <a:lt2>
+        <a:srgbClr val="EEECE1"/>
+      </a:lt2>
+      <a:accent1>
+        <a:srgbClr val="4F81BD"/>
+      </a:accent1>
+      <a:accent2>
+        <a:srgbClr val="C0504D"/>
+      </a:accent2>
+      <a:accent3>
+        <a:srgbClr val="9BBB59"/>
+      </a:accent3>
+      <a:accent4>
+        <a:srgbClr val="8064A2"/>
+      </a:accent4>
+      <a:accent5>
+        <a:srgbClr val="4BACC6"/>
+      </a:accent5>
+      <a:accent6>
+        <a:srgbClr val="F79646"/>
+      </a:accent6>
+      <a:hlink>
+        <a:srgbClr val="0000FF"/>
+      </a:hlink>
+      <a:folHlink>
+        <a:srgbClr val="800080"/>
+      </a:folHlink>
+    </a:clrScheme>
+    <a:fontScheme name="Office">
+      <a:majorFont>
+        <a:latin typeface="Calibri"/>
+        <a:ea typeface=""/>
+        <a:cs typeface=""/>
+        <a:font script="Jpan" typeface="ＭＳ Ｐゴシック"/>
+        <a:font script="Hang" typeface="맑은 고딕"/>
+        <a:font script="Hans" typeface="宋体"/>
+        <a:font script="Hant" typeface="新細明體"/>
+        <a:font script="Arab" typeface="Times New Roman"/>
+        <a:font script="Hebr" typeface="Times New Roman"/>
+        <a:font script="Thai" typeface="Angsana New"/>
+        <a:font script="Ethi" typeface="Nyala"/>
+        <a:font script="Beng" typeface="Vrinda"/>
+        <a:font script="Gujr" typeface="Shruti"/>
+        <a:font script="Khmr" typeface="MoolBoran"/>
+        <a:font script="Knda" typeface="Tunga"/>
+        <a:font script="Guru" typeface="Raavi"/>
+        <a:font script="Cans" typeface="Euphemia"/>
+        <a:font script="Cher" typeface="Plantagenet Cherokee"/>
+        <a:font script="Yiii" typeface="Microsoft Yi Baiti"/>
+        <a:font script="Tibt" typeface="Microsoft Himalaya"/>
+        <a:font script="Thaa" typeface="MV Boli"/>
+        <a:font script="Deva" typeface="Mangal"/>
+        <a:font script="Telu" typeface="Gautami"/>
+        <a:font script="Taml" typeface="Latha"/>
+        <a:font script="Syrc" typeface="Estrangelo Edessa"/>
+        <a:font script="Orya" typeface="Kalinga"/>
+        <a:font script="Mlym" typeface="Kartika"/>
+        <a:font script="Laoo" typeface="DokChampa"/>
+        <a:font script="Sinh" typeface="Iskoola Pota"/>
+        <a:font script="Mong" typeface="Mongolian Baiti"/>
+        <a:font script="Viet" typeface="Times New Roman"/>
+        <a:font script="Uigh" typeface="Microsoft Uighur"/>
+        <a:font script="Geor" typeface="Sylfaen"/>
+      </a:majorFont>
+      <a:minorFont>
+        <a:latin typeface="Calibri"/>
+        <a:ea typeface=""/>
+        <a:cs typeface=""/>
+        <a:font script="Jpan" typeface="ＭＳ Ｐゴシック"/>
+        <a:font script="Hang" typeface="맑은 고딕"/>
+        <a:font script="Hans" typeface="宋体"/>
+        <a:font script="Hant" typeface="新細明體"/>
+        <a:font script="Arab" typeface="Arial"/>
+        <a:font script="Hebr" typeface="Arial"/>
+        <a:font script="Thai" typeface="Cordia New"/>
+        <a:font script="Ethi" typeface="Nyala"/>
+        <a:font script="Beng" typeface="Vrinda"/>
+        <a:font script="Gujr" typeface="Shruti"/>
+        <a:font script="Khmr" typeface="DaunPenh"/>
+        <a:font script="Knda" typeface="Tunga"/>
+        <a:font script="Guru" typeface="Raavi"/>
+        <a:font script="Cans" typeface="Euphemia"/>
+        <a:font script="Cher" typeface="Plantagenet Cherokee"/>
+        <a:font script="Yiii" typeface="Microsoft Yi Baiti"/>
+        <a:font script="Tibt" typeface="Microsoft Himalaya"/>
+        <a:font script="Thaa" typeface="MV Boli"/>
+        <a:font script="Deva" typeface="Mangal"/>
+        <a:font script="Telu" typeface="Gautami"/>
+        <a:font script="Taml" typeface="Latha"/>
+        <a:font script="Syrc" typeface="Estrangelo Edessa"/>
+        <a:font script="Orya" typeface="Kalinga"/>
+        <a:font script="Mlym" typeface="Kartika"/>
+        <a:font script="Laoo" typeface="DokChampa"/>
+        <a:font script="Sinh" typeface="Iskoola Pota"/>
+        <a:font script="Mong" typeface="Mongolian Baiti"/>
+        <a:font script="Viet" typeface="Arial"/>
+        <a:font script="Uigh" typeface="Microsoft Uighur"/>
+        <a:font script="Geor" typeface="Sylfaen"/>
+      </a:minorFont>
+    </a:fontScheme>
+    <a:fmtScheme name="Office">
+      <a:fillStyleLst>
+        <a:solidFill>
+          <a:schemeClr val="phClr"/>
+        </a:solidFill>
+        <a:gradFill rotWithShape="1">
+          <a:gsLst>
+            <a:gs pos="0">
+              <a:schemeClr val="phClr">
+                <a:tint val="50000"/>
+                <a:satMod val="300000"/>
+              </a:schemeClr>
+            </a:gs>
+            <a:gs pos="35000">
+              <a:schemeClr val="phClr">
+                <a:tint val="37000"/>
+                <a:satMod val="300000"/>
+              </a:schemeClr>
+            </a:gs>
+            <a:gs pos="100000">
+              <a:schemeClr val="phClr">
+                <a:tint val="15000"/>
+                <a:satMod val="350000"/>
+              </a:schemeClr>
+            </a:gs>
+          </a:gsLst>
+          <a:lin ang="16200000" scaled="1"/>
+        </a:gradFill>
+        <a:gradFill rotWithShape="1">
+          <a:gsLst>
+            <a:gs pos="0">
+              <a:schemeClr val="phClr">
+                <a:tint val="100000"/>
+                <a:shade val="100000"/>
+                <a:satMod val="130000"/>
+              </a:schemeClr>
+            </a:gs>
+            <a:gs pos="100000">
+              <a:schemeClr val="phClr">
+                <a:tint val="50000"/>
+                <a:shade val="100000"/>
+                <a:satMod val="350000"/>
+              </a:schemeClr>
+            </a:gs>
+          </a:gsLst>
+          <a:lin ang="16200000" scaled="0"/>
+        </a:gradFill>
+      </a:fillStyleLst>
+      <a:lnStyleLst>
+        <a:ln w="9525" cap="flat" cmpd="sng" algn="ctr">
+          <a:solidFill>
+            <a:schemeClr val="phClr">
+              <a:shade val="95000"/>
+              <a:satMod val="105000"/>
+            </a:schemeClr>
+          </a:solidFill>
+          <a:prstDash val="solid"/>
+        </a:ln>
+        <a:ln w="25400" cap="flat" cmpd="sng" algn="ctr">
+          <a:solidFill>
+            <a:schemeClr val="phClr"/>
+          </a:solidFill>
+          <a:prstDash val="solid"/>
+        </a:ln>
+        <a:ln w="38100" cap="flat" cmpd="sng" algn="ctr">
+          <a:solidFill>
+            <a:schemeClr val="phClr"/>
+          </a:solidFill>
+          <a:prstDash val="solid"/>
+        </a:ln>
+      </a:lnStyleLst>
+      <a:effectStyleLst>
+        <a:effectStyle>
+          <a:effectLst>
+            <a:outerShdw blurRad="40000" dist="20000" dir="5400000" rotWithShape="0">
+              <a:srgbClr val="000000">
+                <a:alpha val="38000"/>
+              </a:srgbClr>
+            </a:outerShdw>
+          </a:effectLst>
+        </a:effectStyle>
+        <a:effectStyle>
+          <a:effectLst>
+            <a:outerShdw blurRad="40000" dist="23000" dir="5400000" rotWithShape="0">
+              <a:srgbClr val="000000">
+                <a:alpha val="35000"/>
+              </a:srgbClr>
+            </a:outerShdw>
+          </a:effectLst>
+        </a:effectStyle>
+        <a:effectStyle>
+          <a:effectLst>
+            <a:outerShdw blurRad="40000" dist="23000" dir="5400000" rotWithShape="0">
+              <a:srgbClr val="000000">
+                <a:alpha val="35000"/>
+              </a:srgbClr>
+            </a:outerShdw>
+          </a:effectLst>
+          <a:scene3d>
+            <a:camera prst="orthographicFront">
+              <a:rot lat="0" lon="0" rev="0"/>
+            </a:camera>
+            <a:lightRig rig="threePt" dir="t">
+              <a:rot lat="0" lon="0" rev="1200000"/>
+            </a:lightRig>
+          </a:scene3d>
+          <a:sp3d>
+            <a:bevelT w="63500" h="25400"/>
+          </a:sp3d>
+        </a:effectStyle>
+      </a:effectStyleLst>
+      <a:bgFillStyleLst>
+        <a:solidFill>
+          <a:schemeClr val="phClr"/>
+        </a:solidFill>
+        <a:gradFill rotWithShape="1">
+          <a:gsLst>
+            <a:gs pos="0">
+              <a:schemeClr val="phClr">
+                <a:tint val="40000"/>
+                <a:satMod val="350000"/>
+              </a:schemeClr>
+            </a:gs>
+            <a:gs pos="40000">
+              <a:schemeClr val="phClr">
+                <a:tint val="45000"/>
+                <a:shade val="99000"/>
+                <a:satMod val="350000"/>
+              </a:schemeClr>
+            </a:gs>
+            <a:gs pos="100000">
+              <a:schemeClr val="phClr">
+                <a:shade val="20000"/>
+                <a:satMod val="255000"/>
+              </a:schemeClr>
+            </a:gs>
+          </a:gsLst>
+          <a:path path="circle">
+            <a:fillToRect l="50000" t="-80000" r="50000" b="180000"/>
+          </a:path>
+        </a:gradFill>
+        <a:gradFill rotWithShape="1">
+          <a:gsLst>
+            <a:gs pos="0">
+              <a:schemeClr val="phClr">
+                <a:tint val="80000"/>
+                <a:satMod val="300000"/>
+              </a:schemeClr>
+            </a:gs>
+            <a:gs pos="100000">
+              <a:schemeClr val="phClr">
+                <a:shade val="30000"/>
+                <a:satMod val="200000"/>
+              </a:schemeClr>
+            </a:gs>
+          </a:gsLst>
+          <a:path path="circle">
+            <a:fillToRect l="50000" t="50000" r="50000" b="50000"/>
+          </a:path>
+        </a:gradFill>
+      </a:bgFillStyleLst>
+    </a:fmtScheme>
+  </a:themeElements>
+  <a:objectDefaults>
+    <a:spDef>
+      <a:spPr/>
+      <a:bodyPr/>
+      <a:lstStyle/>
+      <a:style>
+        <a:lnRef idx="1">
+          <a:schemeClr val="accent1"/>
+        </a:lnRef>
+        <a:fillRef idx="3">
+          <a:schemeClr val="accent1"/>
+        </a:fillRef>
+        <a:effectRef idx="2">
+          <a:schemeClr val="accent1"/>
+        </a:effectRef>
+        <a:fontRef idx="minor">
+          <a:schemeClr val="lt1"/>
+        </a:fontRef>
+      </a:style>
+    </a:spDef>
+    <a:lnDef>
+      <a:spPr/>
+      <a:bodyPr/>
+      <a:lstStyle/>
+      <a:style>
+        <a:lnRef idx="2">
+          <a:schemeClr val="accent1"/>
+        </a:lnRef>
+        <a:fillRef idx="0">
+          <a:schemeClr val="accent1"/>
+        </a:fillRef>
+        <a:effectRef idx="1">
+          <a:schemeClr val="accent1"/>
+        </a:effectRef>
+        <a:fontRef idx="minor">
+          <a:schemeClr val="tx1"/>
+        </a:fontRef>
+      </a:style>
+    </a:lnDef>
+  </a:objectDefaults>
+  <a:extraClrSchemeLst/>
+</a:theme>
 </file>
--- a/visor/public/entregables/Pitch_El_miedo_que_no_baja_The_data_squad.pptx
+++ b/visor/public/entregables/Pitch_El_miedo_que_no_baja_The_data_squad.pptx
@@ -1002,7 +1002,7 @@
           <a:lstStyle/>
           <a:p>
             <a:r>
-              <a:t>Rafael (2:25-3:05): Primer hallazgo: por cada delito registrado hay 5,6 víctimas según la Encuesta Mundial de Valores; en Bosa, 10,6 (cambien el selector). (→) Y donde hay más miedo que registro, hay más delito sin registrar: correlación de 0,72. (→) ¿Casualidad? Probamos siete relaciones y solo esta sobrevive a la corrección por pruebas múltiples. El miedo de la periferia no es exagerado: es delito que no llega a las cifras.</a:t>
+              <a:t>Rafael (2:25-3:05): Primer hallazgo. Hagamos la cuenta en tres pasos (señálenlos): el 24,6 % de los adultos dice haber sido víctima de un delito en el último año, unos 1,5 millones de personas; la Secretaría registró unos 275 mil delitos. Por cada 100 víctimas, el registro tiene 18 delitos. (Cambien el selector a Bosa: 9 de cada 100.) (→) Y donde hay más miedo que registro, más delito se queda sin registrar: correlación de 0,72. (→) ¿Casualidad? Probamos siete relaciones y solo esta sobrevive a la corrección por pruebas múltiples. El miedo de la periferia no es exagerado: es delito que no llega a las cifras.</a:t>
             </a:r>
           </a:p>
         </p:txBody>

--- a/visor/public/entregables/Pitch_El_miedo_que_no_baja_The_data_squad.pptx
+++ b/visor/public/entregables/Pitch_El_miedo_que_no_baja_The_data_squad.pptx
@@ -16,6 +16,7 @@
     <p:sldId id="264" r:id="rId16"/>
     <p:sldId id="265" r:id="rId17"/>
     <p:sldId id="266" r:id="rId18"/>
+    <p:sldId id="267" r:id="rId19"/>
   </p:sldIdLst>
   <p:sldSz cx="12191695" cy="6858000" type="screen4x3"/>
   <p:notesSz cx="6858000" cy="9144000"/>
@@ -512,7 +513,7 @@
           <a:lstStyle/>
           <a:p>
             <a:r>
-              <a:t>Brandow (0:00-0:15): Somos The data squad. Venimos a explicar una paradoja de Bogotá: el delito registrado baja, pero el miedo no. ¿Por qué pasa, y dónde debe actuar primero el Distrito?</a:t>
+              <a:t>Brandow (0:00-0:10): Somos The data squad. Les vamos a contar algo que encontramos en los datos de Bogotá y que no cuadra.</a:t>
             </a:r>
           </a:p>
         </p:txBody>
@@ -582,7 +583,7 @@
           <a:lstStyle/>
           <a:p>
             <a:r>
-              <a:t>Brandow (4:40-5:15): Proponemos un indicador para toda la ciudad: el Índice de Brecha, con fuentes que ya existen, cada semestre y por UPL. (→) Y cuatro decisiones: medir con victimización; priorizar entornos con la regla del índice, que hoy señala a Usme, Ciudad Bolívar, Bosa, Kennedy y San Cristóbal; medir la autonomía de las mujeres; y abrir los datos para evaluar.</a:t>
+              <a:t>Samuel (4:00-4:35): Con las mujeres es más fuerte. Denuncian menos que los hombres. (→) Pero tienen mucho más miedo al acoso y dejan de salir de noche. (→) Comparando mujeres y hombres de igual edad, estrato y victimización: +18 puntos de temor al acoso. El miedo les cuesta libertad.</a:t>
             </a:r>
           </a:p>
         </p:txBody>
@@ -652,7 +653,77 @@
           <a:lstStyle/>
           <a:p>
             <a:r>
-              <a:t>Brandow (5:15-5:25): Bogotá ya produce los datos para cerrar esta brecha. Hay que leerlos juntos. Gracias.</a:t>
+              <a:t>Brandow (4:35-5:15): ¿Por qué importa? Porque le decimos al Distrito dónde actuar primero: estas cinco localidades. (→) Qué arreglar: lo que la gente ve en su barrio, parques, convivencia y alumbrado, pensando en las mujeres. (→) Y cómo saber si de verdad la gente se siente más segura, no solo si bajan las denuncias: este índice cada semestre. Todo con datos que el Distrito ya tiene.</a:t>
+            </a:r>
+          </a:p>
+        </p:txBody>
+      </p:sp>
+      <p:sp>
+        <p:nvSpPr>
+          <p:cNvPr id="4" name="Slide Number Placeholder 3"/>
+          <p:cNvSpPr>
+            <a:spLocks noGrp="1"/>
+          </p:cNvSpPr>
+          <p:nvPr>
+            <p:ph type="sldNum" idx="5" sz="quarter"/>
+          </p:nvPr>
+        </p:nvSpPr>
+        <p:spPr/>
+      </p:sp>
+    </p:spTree>
+  </p:cSld>
+  <p:clrMapOvr>
+    <a:masterClrMapping/>
+  </p:clrMapOvr>
+</p:notes>
+</file>
+
+<file path=ppt/notesSlides/notesSlide12.xml><?xml version="1.0" encoding="utf-8"?>
+<p:notes xmlns:a="http://schemas.openxmlformats.org/drawingml/2006/main" xmlns:p="http://schemas.openxmlformats.org/presentationml/2006/main" xmlns:r="http://schemas.openxmlformats.org/officeDocument/2006/relationships">
+  <p:cSld>
+    <p:spTree>
+      <p:nvGrpSpPr>
+        <p:cNvPr id="1" name=""/>
+        <p:cNvGrpSpPr/>
+        <p:nvPr/>
+      </p:nvGrpSpPr>
+      <p:grpSpPr>
+        <a:xfrm>
+          <a:off x="0" y="0"/>
+          <a:ext cx="0" cy="0"/>
+          <a:chOff x="0" y="0"/>
+          <a:chExt cx="0" cy="0"/>
+        </a:xfrm>
+      </p:grpSpPr>
+      <p:sp>
+        <p:nvSpPr>
+          <p:cNvPr id="2" name="Slide Image Placeholder 1"/>
+          <p:cNvSpPr>
+            <a:spLocks noGrp="1"/>
+          </p:cNvSpPr>
+          <p:nvPr>
+            <p:ph type="sldImg" idx="2"/>
+          </p:nvPr>
+        </p:nvSpPr>
+        <p:spPr/>
+      </p:sp>
+      <p:sp>
+        <p:nvSpPr>
+          <p:cNvPr id="3" name="Notes Placeholder 2"/>
+          <p:cNvSpPr>
+            <a:spLocks noGrp="1"/>
+          </p:cNvSpPr>
+          <p:nvPr>
+            <p:ph type="body" idx="3" sz="quarter"/>
+          </p:nvPr>
+        </p:nvSpPr>
+        <p:spPr/>
+        <p:txBody>
+          <a:bodyPr/>
+          <a:lstStyle/>
+          <a:p>
+            <a:r>
+              <a:t>Brandow (5:15-5:25): Bogotá ya tiene los datos para cerrar esta brecha. Solo hay que leerlos juntos. Gracias.</a:t>
             </a:r>
           </a:p>
         </p:txBody>
@@ -722,7 +793,7 @@
           <a:lstStyle/>
           <a:p>
             <a:r>
-              <a:t>Brandow (0:15-0:45): (Aparece la línea azul) El hurto a personas registrado cayó 65 % entre 2019 y 2026. (→) Pero no todo baja: la violencia intrafamiliar y los delitos sexuales suben, y pasan sobre todo en la casa. (→) Y el 74 % de los adultos siente insegura la ciudad. Lo que se cuenta baja; lo que se siente, no.</a:t>
+              <a:t>Brandow (0:10-0:45): Resulta que estuvimos revisando los datos de la Secretaría de Seguridad y el hurto viene bajando muchísimo: −65 % desde 2019. (→) Pero hay hechos violentos que van al revés: la violencia intrafamiliar y los delitos sexuales subieron cerca de 45 %. (→) Y cuando lo cruzamos con las encuestas, 3 de cada 4 personas dicen que Bogotá es insegura. O sea: en el papel la ciudad mejora, pero la gente no lo siente.</a:t>
             </a:r>
           </a:p>
         </p:txBody>
@@ -792,7 +863,7 @@
           <a:lstStyle/>
           <a:p>
             <a:r>
-              <a:t>Brandow (0:45-1:15): Pregúntenle al público antes de mostrar: si el miedo siguiera al delito, ¿dónde esperarían más miedo? (→) Donde más se registra: esta diagonal. (→) Pero no: Usme y Ciudad Bolívar registran poco y tienen el miedo más alto; Teusaquillo y Los Mártires registran mucho y tienen menos. La correlación es −0,25: ninguna. El registro no dice dónde está el miedo.</a:t>
+              <a:t>Brandow (0:45-1:15): Y nos dimos cuenta de que mucho delito ni siquiera llega a las cifras. Hagan la cuenta con nosotros (señalen los tres pasos): el 24,6 % de los adultos dice haber sido víctima en el último año, unos 1,5 millones de personas; la Secretaría registró unos 275 mil delitos. Por cada 100 víctimas, solo 18 quedan en el registro. (Cambien el selector a Bosa: 9.)</a:t>
             </a:r>
           </a:p>
         </p:txBody>
@@ -862,7 +933,7 @@
           <a:lstStyle/>
           <a:p>
             <a:r>
-              <a:t>Rafael (1:15-1:40): ¿Cómo lo sabemos? Unimos siete fuentes públicas: dos encuestas para lo que se siente, la Secretaría de Seguridad para lo que se registra y cuatro de contexto. (→) Cada fuente escribe la localidad distinto: todo se lleva al código oficial. (→) Y siempre comparamos por habitante: en casos gana Suba porque es enorme; por habitante, el centro.</a:t>
+              <a:t>Brandow (1:15-1:40): Pregúntenle al público: si el miedo siguiera al delito registrado, ¿dónde esperarían más miedo? (→) Donde más se registra: esta diagonal. (→) Pero no: Usme y Ciudad Bolívar registran poco y tienen el miedo más alto. El Distrito está tomando decisiones con un mapa al que le falta más de la mitad.</a:t>
             </a:r>
           </a:p>
         </p:txBody>
@@ -932,7 +1003,7 @@
           <a:lstStyle/>
           <a:p>
             <a:r>
-              <a:t>Rafael (1:40-2:25): Para medir la brecha con una sola cifra construimos el Índice de Brecha. Primero el miedo en una regla común: desviaciones frente al promedio de la ciudad. (→) Luego el registro en la misma regla. (→) Y restamos: Usme tiene +1,40 de miedo y −1,27 de registro, brecha de +2,67. (→) Como toda estimación tiene margen de error, la repetimos 1.000 veces: Usme y Ciudad Bolívar quedan en el top 5 en todas, Bosa en el 99,5 %.</a:t>
+              <a:t>Rafael (1:40-2:00): ¿Qué hicimos? Juntamos todo: lo que la gente siente, de dos encuestas; lo que el Estado registra, de la Secretaría de Seguridad; y población, parques y alumbrado. (→) Cada fuente escribe la localidad distinto, así que todo lo llevamos al mismo código. (→) Y comparamos por habitante, para que Suba no gane solo por ser grande.</a:t>
             </a:r>
           </a:p>
         </p:txBody>
@@ -1002,7 +1073,7 @@
           <a:lstStyle/>
           <a:p>
             <a:r>
-              <a:t>Rafael (2:25-3:05): Primer hallazgo. Hagamos la cuenta en tres pasos (señálenlos): el 24,6 % de los adultos dice haber sido víctima de un delito en el último año, unos 1,5 millones de personas; la Secretaría registró unos 275 mil delitos. Por cada 100 víctimas, el registro tiene 18 delitos. (Cambien el selector a Bosa: 9 de cada 100.) (→) Y donde hay más miedo que registro, más delito se queda sin registrar: correlación de 0,72. (→) ¿Casualidad? Probamos siete relaciones y solo esta sobrevive a la corrección por pruebas múltiples. El miedo de la periferia no es exagerado: es delito que no llega a las cifras.</a:t>
+              <a:t>Rafael (2:00-2:40): Con eso armamos un índice que dice en qué localidades hay más miedo del que muestran las cifras. Pasamos el miedo y el delito a la misma regla, cuánto se alejan del promedio de la ciudad, (→ →) y los restamos: Usme tiene +1,40 de miedo y −1,27 de registro, brecha de +2,67. (→) Las que más brecha tienen: Usme, Ciudad Bolívar, Bosa, Kennedy y San Cristóbal. Lo repetimos 1.000 veces y casi siempre son las mismas.</a:t>
             </a:r>
           </a:p>
         </p:txBody>
@@ -1072,7 +1143,7 @@
           <a:lstStyle/>
           <a:p>
             <a:r>
-              <a:t>Samuel (3:05-3:45): ¿Qué hace que alguien sienta insegura su zona? Comparemos personas iguales en todo menos en una cosa. Esta vecina parte de 39 %. (→ muevan el deslizador de hurtos de punta a punta) Del menor al mayor hurto registrado: casi nada. Los homicidios sí pesan algo. (→ activen «atracos en el parque» y suban los conflictos) Ver atracos en el parque: +14 puntos. Conflictos con vecinos: hasta +16. El barrio se siente por lo que pasa en él.</a:t>
+              <a:t>Rafael (2:40-3:05): ¿Y eso es real? Donde el índice marca más miedo, más delito se queda sin denunciar: correlación de 0,72. (→) Probamos siete relaciones distintas y esta es la única que pasa la corrección por azar. O sea: el miedo de la periferia no es exagerado, es delito que no llega a las cifras.</a:t>
             </a:r>
           </a:p>
         </p:txBody>
@@ -1142,7 +1213,7 @@
           <a:lstStyle/>
           <a:p>
             <a:r>
-              <a:t>Samuel (3:45-4:05): ¿Y si fue suerte? Repetimos el análisis 300 veces sorteando localidades. (Los puntos caen) Los atracos en el parque nunca tocan el cero. (→) El hurto registrado cae a los dos lados del cero: no se distingue de nada.</a:t>
+              <a:t>Samuel (3:05-3:45): ¿Qué es lo que de verdad le da miedo a la gente? Comparamos personas iguales en todo menos en una cosa. Esta vecina parte de 39 %. (→ muevan el hurto de punta a punta) Las estadísticas de hurto de su localidad: casi nada. (→ activen atracos y suban los conflictos) Ver atracos en el parque: +14 puntos. Peleas entre vecinos: hasta +16. Lo que da miedo es lo que se ve en el barrio.</a:t>
             </a:r>
           </a:p>
         </p:txBody>
@@ -1212,7 +1283,7 @@
           <a:lstStyle/>
           <a:p>
             <a:r>
-              <a:t>Samuel (4:05-4:40): Tercer hallazgo. Las mujeres dicen haber sido víctimas menos que los hombres. (→) Pero temen más el acoso y evitan más salir de noche. (→) Comparando iguales, con la misma edad, estrato y victimización, ser mujer suma 18 puntos de temor al acoso sexual. El costo del miedo se paga en autonomía.</a:t>
+              <a:t>Samuel (3:45-4:00): Y no fue suerte: repetimos el análisis 300 veces sorteando las localidades. (Los puntos caen) Los atracos nunca bajan de cero. (→) El hurto registrado cae a los dos lados: no explica nada.</a:t>
             </a:r>
           </a:p>
         </p:txBody>
@@ -4262,6 +4333,48 @@
       <p:grpSpPr/>
       <p:pic>
         <p:nvPicPr>
+          <p:cNvPr id="2" name="Picture 1" descr="genero_pptx.png"/>
+          <p:cNvPicPr>
+            <a:picLocks noChangeAspect="1"/>
+          </p:cNvPicPr>
+          <p:nvPr/>
+        </p:nvPicPr>
+        <p:blipFill>
+          <a:blip r:embed="rId2"/>
+          <a:stretch>
+            <a:fillRect/>
+          </a:stretch>
+        </p:blipFill>
+        <p:spPr>
+          <a:xfrm>
+            <a:off x="0" y="0"/>
+            <a:ext cx="12191695" cy="6858000"/>
+          </a:xfrm>
+          <a:prstGeom prst="rect">
+            <a:avLst/>
+          </a:prstGeom>
+        </p:spPr>
+      </p:pic>
+    </p:spTree>
+  </p:cSld>
+  <p:clrMapOvr>
+    <a:masterClrMapping/>
+  </p:clrMapOvr>
+</p:sld>
+</file>
+
+<file path=ppt/slides/slide11.xml><?xml version="1.0" encoding="utf-8"?>
+<p:sld xmlns:a="http://schemas.openxmlformats.org/drawingml/2006/main" xmlns:p="http://schemas.openxmlformats.org/presentationml/2006/main" xmlns:r="http://schemas.openxmlformats.org/officeDocument/2006/relationships">
+  <p:cSld>
+    <p:spTree>
+      <p:nvGrpSpPr>
+        <p:cNvPr id="1" name=""/>
+        <p:cNvGrpSpPr/>
+        <p:nvPr/>
+      </p:nvGrpSpPr>
+      <p:grpSpPr/>
+      <p:pic>
+        <p:nvPicPr>
           <p:cNvPr id="2" name="Picture 1" descr="propuesta_pptx.png"/>
           <p:cNvPicPr>
             <a:picLocks noChangeAspect="1"/>
@@ -4292,7 +4405,7 @@
 </p:sld>
 </file>
 
-<file path=ppt/slides/slide11.xml><?xml version="1.0" encoding="utf-8"?>
+<file path=ppt/slides/slide12.xml><?xml version="1.0" encoding="utf-8"?>
 <p:sld xmlns:a="http://schemas.openxmlformats.org/drawingml/2006/main" xmlns:p="http://schemas.openxmlformats.org/presentationml/2006/main" xmlns:r="http://schemas.openxmlformats.org/officeDocument/2006/relationships">
   <p:cSld>
     <p:spTree>
@@ -4388,7 +4501,7 @@
       <p:grpSpPr/>
       <p:pic>
         <p:nvPicPr>
-          <p:cNvPr id="2" name="Picture 1" descr="termometros_pptx.png"/>
+          <p:cNvPr id="2" name="Picture 1" descr="cifra-oculta_pptx.png"/>
           <p:cNvPicPr>
             <a:picLocks noChangeAspect="1"/>
           </p:cNvPicPr>
@@ -4430,7 +4543,7 @@
       <p:grpSpPr/>
       <p:pic>
         <p:nvPicPr>
-          <p:cNvPr id="2" name="Picture 1" descr="datos_pptx.png"/>
+          <p:cNvPr id="2" name="Picture 1" descr="termometros_pptx.png"/>
           <p:cNvPicPr>
             <a:picLocks noChangeAspect="1"/>
           </p:cNvPicPr>
@@ -4472,7 +4585,7 @@
       <p:grpSpPr/>
       <p:pic>
         <p:nvPicPr>
-          <p:cNvPr id="2" name="Picture 1" descr="indice_pptx.png"/>
+          <p:cNvPr id="2" name="Picture 1" descr="datos_pptx.png"/>
           <p:cNvPicPr>
             <a:picLocks noChangeAspect="1"/>
           </p:cNvPicPr>
@@ -4514,7 +4627,7 @@
       <p:grpSpPr/>
       <p:pic>
         <p:nvPicPr>
-          <p:cNvPr id="2" name="Picture 1" descr="cifra-oculta_pptx.png"/>
+          <p:cNvPr id="2" name="Picture 1" descr="indice_pptx.png"/>
           <p:cNvPicPr>
             <a:picLocks noChangeAspect="1"/>
           </p:cNvPicPr>
@@ -4556,7 +4669,7 @@
       <p:grpSpPr/>
       <p:pic>
         <p:nvPicPr>
-          <p:cNvPr id="2" name="Picture 1" descr="vecinos_pptx.png"/>
+          <p:cNvPr id="2" name="Picture 1" descr="prueba_pptx.png"/>
           <p:cNvPicPr>
             <a:picLocks noChangeAspect="1"/>
           </p:cNvPicPr>
@@ -4598,7 +4711,7 @@
       <p:grpSpPr/>
       <p:pic>
         <p:nvPicPr>
-          <p:cNvPr id="2" name="Picture 1" descr="repeticiones_pptx.png"/>
+          <p:cNvPr id="2" name="Picture 1" descr="vecinos_pptx.png"/>
           <p:cNvPicPr>
             <a:picLocks noChangeAspect="1"/>
           </p:cNvPicPr>
@@ -4640,7 +4753,7 @@
       <p:grpSpPr/>
       <p:pic>
         <p:nvPicPr>
-          <p:cNvPr id="2" name="Picture 1" descr="genero_pptx.png"/>
+          <p:cNvPr id="2" name="Picture 1" descr="repeticiones_pptx.png"/>
           <p:cNvPicPr>
             <a:picLocks noChangeAspect="1"/>
           </p:cNvPicPr>

--- a/visor/public/entregables/Pitch_El_miedo_que_no_baja_The_data_squad.pptx
+++ b/visor/public/entregables/Pitch_El_miedo_que_no_baja_The_data_squad.pptx
@@ -793,7 +793,7 @@
           <a:lstStyle/>
           <a:p>
             <a:r>
-              <a:t>Brandow (0:10-0:45): Resulta que estuvimos revisando los datos de la Secretaría de Seguridad y el hurto viene bajando muchísimo: −65 % desde 2019. (→) Pero hay hechos violentos que van al revés: la violencia intrafamiliar y los delitos sexuales subieron cerca de 45 %. (→) Y cuando lo cruzamos con las encuestas, 3 de cada 4 personas dicen que Bogotá es insegura. O sea: en el papel la ciudad mejora, pero la gente no lo siente.</a:t>
+              <a:t>Brandow (0:10-0:45): Resulta que estuvimos revisando los datos de la Secretaría de Seguridad y el hurto viene bajando muchísimo: −65 % desde 2019. Ojo, ahí está la pandemia (la franja gris): en 2020 cayó por el encierro, pero en 2022 volvió casi a lo de antes y desde entonces bajó 59 %. No es solo la pandemia. (→) Pero hay hechos violentos que van al revés: la violencia intrafamiliar y los delitos sexuales subieron cerca de 45 %. (→) Y cuando lo cruzamos con las encuestas, 3 de cada 4 personas dicen que Bogotá es insegura. O sea: en el papel la ciudad mejora, pero la gente no lo siente.</a:t>
             </a:r>
           </a:p>
         </p:txBody>

--- a/visor/public/entregables/Pitch_El_miedo_que_no_baja_The_data_squad.pptx
+++ b/visor/public/entregables/Pitch_El_miedo_que_no_baja_The_data_squad.pptx
@@ -17,6 +17,8 @@
     <p:sldId id="265" r:id="rId17"/>
     <p:sldId id="266" r:id="rId18"/>
     <p:sldId id="267" r:id="rId19"/>
+    <p:sldId id="268" r:id="rId20"/>
+    <p:sldId id="269" r:id="rId21"/>
   </p:sldIdLst>
   <p:sldSz cx="12191695" cy="6858000" type="screen4x3"/>
   <p:notesSz cx="6858000" cy="9144000"/>
@@ -513,7 +515,7 @@
           <a:lstStyle/>
           <a:p>
             <a:r>
-              <a:t>Brandow (0:00-0:10): Somos The data squad. Les vamos a contar algo que encontramos en los datos de Bogotá y que no cuadra.</a:t>
+              <a:t>Brandow (0:00-0:10): Somos The data squad. ¿Qué tan segura es Bogotá? Depende de a quién le preguntes. Y una de las respuestas que más circula tiene un problema que encontramos en los datos.</a:t>
             </a:r>
           </a:p>
         </p:txBody>
@@ -583,7 +585,7 @@
           <a:lstStyle/>
           <a:p>
             <a:r>
-              <a:t>Samuel (4:00-4:35): Con las mujeres es más fuerte. Denuncian menos que los hombres. (→) Pero tienen mucho más miedo al acoso y dejan de salir de noche. (→) Comparando mujeres y hombres de igual edad, estrato y victimización: +18 puntos de temor al acoso. El miedo les cuesta libertad.</a:t>
+              <a:t>Samuel (3:35-3:55): Con eso armamos un índice que dice en qué localidades hay más miedo del que muestran las cifras. Pasamos el miedo y el delito a la misma regla, cuánto se alejan del promedio de la ciudad, (→ →) y los restamos: Usme tiene +1,40 de miedo y −1,27 de registro, brecha de +2,67. (→) Las que más brecha tienen: Usme, Ciudad Bolívar, Bosa, Kennedy y San Cristóbal. Lo repetimos 1.000 veces y casi siempre son las mismas.</a:t>
             </a:r>
           </a:p>
         </p:txBody>
@@ -653,7 +655,7 @@
           <a:lstStyle/>
           <a:p>
             <a:r>
-              <a:t>Brandow (4:35-5:15): ¿Por qué importa? Porque le decimos al Distrito dónde actuar primero: estas cinco localidades. (→) Qué arreglar: lo que la gente ve en su barrio, parques, convivencia y alumbrado, pensando en las mujeres. (→) Y cómo saber si de verdad la gente se siente más segura, no solo si bajan las denuncias: este índice cada semestre. Todo con datos que el Distrito ya tiene.</a:t>
+              <a:t>Samuel (3:55-4:20): Con las mujeres hay dos problemas distintos. En la calle: 5 de cada 10 mujeres fueron acosadas el último año, y casi ninguna denuncia. (→) En la casa: la violencia contra ellas que llega a Salud subió 43 % desde 2019, y 8 de cada 10 casos pasan en la vivienda. Las más afectadas son niñas y adolescentes. (→) Son dos problemas distintos: una luminaria no resuelve la violencia en la casa.</a:t>
             </a:r>
           </a:p>
         </p:txBody>
@@ -723,7 +725,147 @@
           <a:lstStyle/>
           <a:p>
             <a:r>
-              <a:t>Brandow (5:15-5:25): Bogotá ya tiene los datos para cerrar esta brecha. Solo hay que leerlos juntos. Gracias.</a:t>
+              <a:t>Samuel (4:20-4:40): Probamos ocho hipótesis, incluidas las que cualquiera daría por ciertas. (→) Cinco no se sostienen: la serie de hurto no era comparable, el delito registrado no explica el miedo, peor alumbrado o peores vías no traen más hurto, y más luz o internet no se asocian con menos violencia contra ellas. Tres sí: el entorno del barrio, la cifra oculta y el miedo de las mujeres. (→) Un nulo también es evidencia: evita gastar en lo que no mueve la aguja.</a:t>
+            </a:r>
+          </a:p>
+        </p:txBody>
+      </p:sp>
+      <p:sp>
+        <p:nvSpPr>
+          <p:cNvPr id="4" name="Slide Number Placeholder 3"/>
+          <p:cNvSpPr>
+            <a:spLocks noGrp="1"/>
+          </p:cNvSpPr>
+          <p:nvPr>
+            <p:ph type="sldNum" idx="5" sz="quarter"/>
+          </p:nvPr>
+        </p:nvSpPr>
+        <p:spPr/>
+      </p:sp>
+    </p:spTree>
+  </p:cSld>
+  <p:clrMapOvr>
+    <a:masterClrMapping/>
+  </p:clrMapOvr>
+</p:notes>
+</file>
+
+<file path=ppt/notesSlides/notesSlide13.xml><?xml version="1.0" encoding="utf-8"?>
+<p:notes xmlns:a="http://schemas.openxmlformats.org/drawingml/2006/main" xmlns:p="http://schemas.openxmlformats.org/presentationml/2006/main" xmlns:r="http://schemas.openxmlformats.org/officeDocument/2006/relationships">
+  <p:cSld>
+    <p:spTree>
+      <p:nvGrpSpPr>
+        <p:cNvPr id="1" name=""/>
+        <p:cNvGrpSpPr/>
+        <p:nvPr/>
+      </p:nvGrpSpPr>
+      <p:grpSpPr>
+        <a:xfrm>
+          <a:off x="0" y="0"/>
+          <a:ext cx="0" cy="0"/>
+          <a:chOff x="0" y="0"/>
+          <a:chExt cx="0" cy="0"/>
+        </a:xfrm>
+      </p:grpSpPr>
+      <p:sp>
+        <p:nvSpPr>
+          <p:cNvPr id="2" name="Slide Image Placeholder 1"/>
+          <p:cNvSpPr>
+            <a:spLocks noGrp="1"/>
+          </p:cNvSpPr>
+          <p:nvPr>
+            <p:ph type="sldImg" idx="2"/>
+          </p:nvPr>
+        </p:nvSpPr>
+        <p:spPr/>
+      </p:sp>
+      <p:sp>
+        <p:nvSpPr>
+          <p:cNvPr id="3" name="Notes Placeholder 2"/>
+          <p:cNvSpPr>
+            <a:spLocks noGrp="1"/>
+          </p:cNvSpPr>
+          <p:nvPr>
+            <p:ph type="body" idx="3" sz="quarter"/>
+          </p:nvPr>
+        </p:nvSpPr>
+        <p:spPr/>
+        <p:txBody>
+          <a:bodyPr/>
+          <a:lstStyle/>
+          <a:p>
+            <a:r>
+              <a:t>Brandow (4:40-5:35): Y aquí está lo que ninguna fuente sola deja ver. Cada estrategia trae el dato que la sostiene, su nivel de evidencia y cómo se mide. (→ recorran de a dos)</a:t>
+            </a:r>
+          </a:p>
+        </p:txBody>
+      </p:sp>
+      <p:sp>
+        <p:nvSpPr>
+          <p:cNvPr id="4" name="Slide Number Placeholder 3"/>
+          <p:cNvSpPr>
+            <a:spLocks noGrp="1"/>
+          </p:cNvSpPr>
+          <p:nvPr>
+            <p:ph type="sldNum" idx="5" sz="quarter"/>
+          </p:nvPr>
+        </p:nvSpPr>
+        <p:spPr/>
+      </p:sp>
+    </p:spTree>
+  </p:cSld>
+  <p:clrMapOvr>
+    <a:masterClrMapping/>
+  </p:clrMapOvr>
+</p:notes>
+</file>
+
+<file path=ppt/notesSlides/notesSlide14.xml><?xml version="1.0" encoding="utf-8"?>
+<p:notes xmlns:a="http://schemas.openxmlformats.org/drawingml/2006/main" xmlns:p="http://schemas.openxmlformats.org/presentationml/2006/main" xmlns:r="http://schemas.openxmlformats.org/officeDocument/2006/relationships">
+  <p:cSld>
+    <p:spTree>
+      <p:nvGrpSpPr>
+        <p:cNvPr id="1" name=""/>
+        <p:cNvGrpSpPr/>
+        <p:nvPr/>
+      </p:nvGrpSpPr>
+      <p:grpSpPr>
+        <a:xfrm>
+          <a:off x="0" y="0"/>
+          <a:ext cx="0" cy="0"/>
+          <a:chOff x="0" y="0"/>
+          <a:chExt cx="0" cy="0"/>
+        </a:xfrm>
+      </p:grpSpPr>
+      <p:sp>
+        <p:nvSpPr>
+          <p:cNvPr id="2" name="Slide Image Placeholder 1"/>
+          <p:cNvSpPr>
+            <a:spLocks noGrp="1"/>
+          </p:cNvSpPr>
+          <p:nvPr>
+            <p:ph type="sldImg" idx="2"/>
+          </p:nvPr>
+        </p:nvSpPr>
+        <p:spPr/>
+      </p:sp>
+      <p:sp>
+        <p:nvSpPr>
+          <p:cNvPr id="3" name="Notes Placeholder 2"/>
+          <p:cNvSpPr>
+            <a:spLocks noGrp="1"/>
+          </p:cNvSpPr>
+          <p:nvPr>
+            <p:ph type="body" idx="3" sz="quarter"/>
+          </p:nvPr>
+        </p:nvSpPr>
+        <p:spPr/>
+        <p:txBody>
+          <a:bodyPr/>
+          <a:lstStyle/>
+          <a:p>
+            <a:r>
+              <a:t>Brandow (5:35-5:45): Bogotá ya tiene los datos para cerrar esta brecha. Solo hay que validarlos y leerlos juntos. Gracias.</a:t>
             </a:r>
           </a:p>
         </p:txBody>
@@ -793,7 +935,7 @@
           <a:lstStyle/>
           <a:p>
             <a:r>
-              <a:t>Brandow (0:10-0:45): Resulta que estuvimos revisando los datos de la Secretaría de Seguridad y el hurto viene bajando muchísimo: −65 % desde 2019. Ojo, ahí está la pandemia (la franja gris): en 2020 cayó por el encierro, pero en 2022 volvió casi a lo de antes y desde entonces bajó 59 %. No es solo la pandemia. (→) Pero hay hechos violentos que van al revés: la violencia intrafamiliar y los delitos sexuales subieron cerca de 45 %. (→) Y cuando lo cruzamos con las encuestas, 3 de cada 4 personas dicen que Bogotá es insegura. O sea: en el papel la ciudad mejora, pero la gente no lo siente.</a:t>
+              <a:t>Brandow (0:10-0:30): La seguridad se mide desde cuatro frentes: lo que se registra, lo que la gente vive, lo que siente y las condiciones del entorno. (→) Cada fuente lleva un score de confiabilidad de 0 a 100: años comparables, actualidad, precisión, detalle territorial, validez y si cuadra con otra fuente. No todas pesan igual. (→) Y ninguna, sola, cubre los cuatro frentes.</a:t>
             </a:r>
           </a:p>
         </p:txBody>
@@ -863,7 +1005,7 @@
           <a:lstStyle/>
           <a:p>
             <a:r>
-              <a:t>Brandow (0:45-1:15): Y nos dimos cuenta de que mucho delito ni siquiera llega a las cifras. Hagan la cuenta con nosotros (señalen los tres pasos): el 24,6 % de los adultos dice haber sido víctima en el último año, unos 1,5 millones de personas; la Secretaría registró unos 275 mil delitos. Por cada 100 víctimas, solo 18 quedan en el registro. (Cambien el selector a Bosa: 9.)</a:t>
+              <a:t>Brandow (0:30-1:25): Leamos cada fuente sola y qué concluiríamos con ella. (en cada →, lean la conclusión) La capa abierta de la Secretaría: el hurto cayó −58 % desde 2022, «Bogotá es mucho más segura». Pero la Policía, el mismo hurto y los mismos meses: −4 %, «el hurto casi no bajó». Los homicidios suben 3,3 % al año y la violencia intrafamiliar 11 %, «la violencia sube». Entre 54 y 57 % de las víctimas no denuncia, «la mayoría no denuncia». Y 3 de cada 4 dicen que la ciudad es insegura. (→) El miedo no contradice los datos.</a:t>
             </a:r>
           </a:p>
         </p:txBody>
@@ -933,7 +1075,7 @@
           <a:lstStyle/>
           <a:p>
             <a:r>
-              <a:t>Brandow (1:15-1:40): Pregúntenle al público: si el miedo siguiera al delito registrado, ¿dónde esperarían más miedo? (→) Donde más se registra: esta diagonal. (→) Pero no: Usme y Ciudad Bolívar registran poco y tienen el miedo más alto. El Distrito está tomando decisiones con un mapa al que le falta más de la mitad.</a:t>
+              <a:t>Rafael (1:25-1:40): Por eso unimos las fuentes para responder cuatro preguntas: quién es más vulnerable, dónde y en qué crece la inseguridad, si la percepción y las cifras cuadran, y qué hacer primero. (→) Con una sola llave territorial, tasas por habitante, los factores de expansión de cada encuesta y el mismo corte de meses. (→) Y con tres modelos. Pero antes de modelar, validamos.</a:t>
             </a:r>
           </a:p>
         </p:txBody>
@@ -1003,7 +1145,7 @@
           <a:lstStyle/>
           <a:p>
             <a:r>
-              <a:t>Rafael (1:40-2:00): ¿Qué hicimos? Juntamos todo: lo que la gente siente, de dos encuestas; lo que el Estado registra, de la Secretaría de Seguridad; y población, parques y alumbrado. (→) Cada fuente escribe la localidad distinto, así que todo lo llevamos al mismo código. (→) Y comparamos por habitante, para que Suba no gane solo por ser grande.</a:t>
+              <a:t>Rafael (1:40-2:10): Antes de modelar comparamos cada serie con una fuente independiente. La capa abierta dice −58 % en hurto desde 2022. (→) La Policía, −4 %. De 2018 a 2022 la capa contaba 2,3 a 2,6 veces más; desde 2023 coinciden caso por caso. En homicidios, lesiones, delitos sexuales y violencia intrafamiliar coinciden todos los años, y los homicidios cuadran con Medicina Legal. (→) ¿Y si cayó la denuncia? La encuesta del DANE dice que no: la denuncia subió. Para que la caída fuera real, la denuncia habría tenido que desplomarse. Cambió cómo se arma la serie, no la calle.</a:t>
             </a:r>
           </a:p>
         </p:txBody>
@@ -1073,7 +1215,7 @@
           <a:lstStyle/>
           <a:p>
             <a:r>
-              <a:t>Rafael (2:00-2:40): Con eso armamos un índice que dice en qué localidades hay más miedo del que muestran las cifras. Pasamos el miedo y el delito a la misma regla, cuánto se alejan del promedio de la ciudad, (→ →) y los restamos: Usme tiene +1,40 de miedo y −1,27 de registro, brecha de +2,67. (→) Las que más brecha tienen: Usme, Ciudad Bolívar, Bosa, Kennedy y San Cristóbal. Lo repetimos 1.000 veces y casi siempre son las mismas.</a:t>
+              <a:t>Rafael (2:10-2:30): Primer modelo, ya con series comparables: los hurtos bajan desde 2023, −9 % al año, pero 2023 fue un pico. Frente a 2022 la Policía registra −4 %. (→) Y la violencia sube: homicidios +3,3 % al año, delitos sexuales +7,5 % y violencia intrafamiliar +11,2 %. (→) El modelo controla tamaño, localidad y sobredispersión, y deja la pandemia fuera.</a:t>
             </a:r>
           </a:p>
         </p:txBody>
@@ -1143,7 +1285,7 @@
           <a:lstStyle/>
           <a:p>
             <a:r>
-              <a:t>Rafael (2:40-3:05): ¿Y eso es real? Donde el índice marca más miedo, más delito se queda sin denunciar: correlación de 0,72. (→) Probamos siete relaciones distintas y esta es la única que pasa la corrección por azar. O sea: el miedo de la periferia no es exagerado, es delito que no llega a las cifras.</a:t>
+              <a:t>Rafael (2:30-2:55): Segundo modelo: entrenamos tres modelos para predecir quién siente insegura su zona y los probamos con personas que no vieron. Aciertan hasta 85 de cada 100. (→) Lo que más explica es lo que pasa en el barrio: atracos, conflictos, parques. (→) Y la prueba clave: el delito registrado no agrega nada a saber en qué localidad vive la persona: 0,722 frente a 0,726. El miedo sigue a lo que la gente vive, no a la estadística.</a:t>
             </a:r>
           </a:p>
         </p:txBody>
@@ -1213,7 +1355,7 @@
           <a:lstStyle/>
           <a:p>
             <a:r>
-              <a:t>Samuel (3:05-3:45): ¿Qué es lo que de verdad le da miedo a la gente? Comparamos personas iguales en todo menos en una cosa. Esta vecina parte de 39 %. (→ muevan el hurto de punta a punta) Las estadísticas de hurto de su localidad: casi nada. (→ activen atracos y suban los conflictos) Ver atracos en el parque: +14 puntos. Peleas entre vecinos: hasta +16. Lo que da miedo es lo que se ve en el barrio.</a:t>
+              <a:t>Samuel (2:55-3:15): Tercer modelo, sin variable objetivo: agrupamos las 19 localidades por sus cuatro frentes a la vez. (→) Salen cinco perfiles. Por ejemplo, San Cristóbal, Usme y Ciudad Bolívar: «Miedo alto, poca luz, más homicidios». Bosa, Kennedy, Suba: «Más víctimas que denuncias». Cada perfil pide una estrategia distinta.</a:t>
             </a:r>
           </a:p>
         </p:txBody>
@@ -1283,7 +1425,7 @@
           <a:lstStyle/>
           <a:p>
             <a:r>
-              <a:t>Samuel (3:45-4:00): Y no fue suerte: repetimos el análisis 300 veces sorteando las localidades. (Los puntos caen) Los atracos nunca bajan de cero. (→) El hurto registrado cae a los dos lados: no explica nada.</a:t>
+              <a:t>Samuel (3:15-3:35): Y nos dimos cuenta de que mucho delito ni siquiera llega a las cifras. Hagan la cuenta con nosotros (señalen los tres pasos): el 24,6 % de los adultos dice haber sido víctima en el último año, unos 1,5 millones de personas; la Secretaría registró unos 275 mil delitos. De cada 10 víctimas, 1,8 quedan en el registro. Con las encuestas del DANE y de la Cámara de Comercio la cuenta da cerca de 3 de cada 10: cambia el nivel, no la conclusión. (Cambien el selector a Bosa: 0,9.)</a:t>
             </a:r>
           </a:p>
         </p:txBody>
@@ -4333,7 +4475,7 @@
       <p:grpSpPr/>
       <p:pic>
         <p:nvPicPr>
-          <p:cNvPr id="2" name="Picture 1" descr="genero_pptx.png"/>
+          <p:cNvPr id="2" name="Picture 1" descr="indice_pptx.png"/>
           <p:cNvPicPr>
             <a:picLocks noChangeAspect="1"/>
           </p:cNvPicPr>
@@ -4375,7 +4517,7 @@
       <p:grpSpPr/>
       <p:pic>
         <p:nvPicPr>
-          <p:cNvPr id="2" name="Picture 1" descr="propuesta_pptx.png"/>
+          <p:cNvPr id="2" name="Picture 1" descr="genero_pptx.png"/>
           <p:cNvPicPr>
             <a:picLocks noChangeAspect="1"/>
           </p:cNvPicPr>
@@ -4406,6 +4548,90 @@
 </file>
 
 <file path=ppt/slides/slide12.xml><?xml version="1.0" encoding="utf-8"?>
+<p:sld xmlns:a="http://schemas.openxmlformats.org/drawingml/2006/main" xmlns:p="http://schemas.openxmlformats.org/presentationml/2006/main" xmlns:r="http://schemas.openxmlformats.org/officeDocument/2006/relationships">
+  <p:cSld>
+    <p:spTree>
+      <p:nvGrpSpPr>
+        <p:cNvPr id="1" name=""/>
+        <p:cNvGrpSpPr/>
+        <p:nvPr/>
+      </p:nvGrpSpPr>
+      <p:grpSpPr/>
+      <p:pic>
+        <p:nvPicPr>
+          <p:cNvPr id="2" name="Picture 1" descr="hipotesis_pptx.png"/>
+          <p:cNvPicPr>
+            <a:picLocks noChangeAspect="1"/>
+          </p:cNvPicPr>
+          <p:nvPr/>
+        </p:nvPicPr>
+        <p:blipFill>
+          <a:blip r:embed="rId2"/>
+          <a:stretch>
+            <a:fillRect/>
+          </a:stretch>
+        </p:blipFill>
+        <p:spPr>
+          <a:xfrm>
+            <a:off x="0" y="0"/>
+            <a:ext cx="12191695" cy="6858000"/>
+          </a:xfrm>
+          <a:prstGeom prst="rect">
+            <a:avLst/>
+          </a:prstGeom>
+        </p:spPr>
+      </p:pic>
+    </p:spTree>
+  </p:cSld>
+  <p:clrMapOvr>
+    <a:masterClrMapping/>
+  </p:clrMapOvr>
+</p:sld>
+</file>
+
+<file path=ppt/slides/slide13.xml><?xml version="1.0" encoding="utf-8"?>
+<p:sld xmlns:a="http://schemas.openxmlformats.org/drawingml/2006/main" xmlns:p="http://schemas.openxmlformats.org/presentationml/2006/main" xmlns:r="http://schemas.openxmlformats.org/officeDocument/2006/relationships">
+  <p:cSld>
+    <p:spTree>
+      <p:nvGrpSpPr>
+        <p:cNvPr id="1" name=""/>
+        <p:cNvGrpSpPr/>
+        <p:nvPr/>
+      </p:nvGrpSpPr>
+      <p:grpSpPr/>
+      <p:pic>
+        <p:nvPicPr>
+          <p:cNvPr id="2" name="Picture 1" descr="estrategias_pptx.png"/>
+          <p:cNvPicPr>
+            <a:picLocks noChangeAspect="1"/>
+          </p:cNvPicPr>
+          <p:nvPr/>
+        </p:nvPicPr>
+        <p:blipFill>
+          <a:blip r:embed="rId2"/>
+          <a:stretch>
+            <a:fillRect/>
+          </a:stretch>
+        </p:blipFill>
+        <p:spPr>
+          <a:xfrm>
+            <a:off x="0" y="0"/>
+            <a:ext cx="12191695" cy="6858000"/>
+          </a:xfrm>
+          <a:prstGeom prst="rect">
+            <a:avLst/>
+          </a:prstGeom>
+        </p:spPr>
+      </p:pic>
+    </p:spTree>
+  </p:cSld>
+  <p:clrMapOvr>
+    <a:masterClrMapping/>
+  </p:clrMapOvr>
+</p:sld>
+</file>
+
+<file path=ppt/slides/slide14.xml><?xml version="1.0" encoding="utf-8"?>
 <p:sld xmlns:a="http://schemas.openxmlformats.org/drawingml/2006/main" xmlns:p="http://schemas.openxmlformats.org/presentationml/2006/main" xmlns:r="http://schemas.openxmlformats.org/officeDocument/2006/relationships">
   <p:cSld>
     <p:spTree>
@@ -4459,7 +4685,7 @@
       <p:grpSpPr/>
       <p:pic>
         <p:nvPicPr>
-          <p:cNvPr id="2" name="Picture 1" descr="paradoja_pptx.png"/>
+          <p:cNvPr id="2" name="Picture 1" descr="frentes_pptx.png"/>
           <p:cNvPicPr>
             <a:picLocks noChangeAspect="1"/>
           </p:cNvPicPr>
@@ -4501,7 +4727,7 @@
       <p:grpSpPr/>
       <p:pic>
         <p:nvPicPr>
-          <p:cNvPr id="2" name="Picture 1" descr="cifra-oculta_pptx.png"/>
+          <p:cNvPr id="2" name="Picture 1" descr="lecturas_pptx.png"/>
           <p:cNvPicPr>
             <a:picLocks noChangeAspect="1"/>
           </p:cNvPicPr>
@@ -4543,7 +4769,7 @@
       <p:grpSpPr/>
       <p:pic>
         <p:nvPicPr>
-          <p:cNvPr id="2" name="Picture 1" descr="termometros_pptx.png"/>
+          <p:cNvPr id="2" name="Picture 1" descr="union_pptx.png"/>
           <p:cNvPicPr>
             <a:picLocks noChangeAspect="1"/>
           </p:cNvPicPr>
@@ -4585,7 +4811,7 @@
       <p:grpSpPr/>
       <p:pic>
         <p:nvPicPr>
-          <p:cNvPr id="2" name="Picture 1" descr="datos_pptx.png"/>
+          <p:cNvPr id="2" name="Picture 1" descr="validacion_pptx.png"/>
           <p:cNvPicPr>
             <a:picLocks noChangeAspect="1"/>
           </p:cNvPicPr>
@@ -4627,7 +4853,7 @@
       <p:grpSpPr/>
       <p:pic>
         <p:nvPicPr>
-          <p:cNvPr id="2" name="Picture 1" descr="indice_pptx.png"/>
+          <p:cNvPr id="2" name="Picture 1" descr="tendencias_pptx.png"/>
           <p:cNvPicPr>
             <a:picLocks noChangeAspect="1"/>
           </p:cNvPicPr>
@@ -4669,7 +4895,7 @@
       <p:grpSpPr/>
       <p:pic>
         <p:nvPicPr>
-          <p:cNvPr id="2" name="Picture 1" descr="prueba_pptx.png"/>
+          <p:cNvPr id="2" name="Picture 1" descr="modelos_pptx.png"/>
           <p:cNvPicPr>
             <a:picLocks noChangeAspect="1"/>
           </p:cNvPicPr>
@@ -4711,7 +4937,7 @@
       <p:grpSpPr/>
       <p:pic>
         <p:nvPicPr>
-          <p:cNvPr id="2" name="Picture 1" descr="vecinos_pptx.png"/>
+          <p:cNvPr id="2" name="Picture 1" descr="tipologia_pptx.png"/>
           <p:cNvPicPr>
             <a:picLocks noChangeAspect="1"/>
           </p:cNvPicPr>
@@ -4753,7 +4979,7 @@
       <p:grpSpPr/>
       <p:pic>
         <p:nvPicPr>
-          <p:cNvPr id="2" name="Picture 1" descr="repeticiones_pptx.png"/>
+          <p:cNvPr id="2" name="Picture 1" descr="cifra-oculta_pptx.png"/>
           <p:cNvPicPr>
             <a:picLocks noChangeAspect="1"/>
           </p:cNvPicPr>

--- a/visor/public/entregables/Pitch_El_miedo_que_no_baja_The_data_squad.pptx
+++ b/visor/public/entregables/Pitch_El_miedo_que_no_baja_The_data_squad.pptx
@@ -725,7 +725,7 @@
           <a:lstStyle/>
           <a:p>
             <a:r>
-              <a:t>Samuel (4:20-4:40): Probamos ocho hipótesis, incluidas las que cualquiera daría por ciertas. (→) Cinco no se sostienen: la serie de hurto no era comparable, el delito registrado no explica el miedo, peor alumbrado o peores vías no traen más hurto, y más luz o internet no se asocian con menos violencia contra ellas. Tres sí: el entorno del barrio, la cifra oculta y el miedo de las mujeres. (→) Un nulo también es evidencia: evita gastar en lo que no mueve la aguja.</a:t>
+              <a:t>Samuel (4:20-4:40): Probamos ocho hipótesis, incluidas las que cualquiera daría por ciertas. (→) Seis no se sostienen: la serie de hurto no era comparable, el delito registrado no explica el miedo, peor alumbrado o peores vías no traen más hurto, más luz o internet no se asocian con menos violencia contra ellas, y la relación entre miedo y cifra oculta era mecánica. Dos sí: el entorno del barrio y el miedo de las mujeres. (→) Un nulo también es evidencia: evita gastar en lo que no mueve la aguja.</a:t>
             </a:r>
           </a:p>
         </p:txBody>
@@ -1285,7 +1285,7 @@
           <a:lstStyle/>
           <a:p>
             <a:r>
-              <a:t>Rafael (2:30-2:55): Segundo modelo: entrenamos tres modelos para predecir quién siente insegura su zona y los probamos con personas que no vieron. Aciertan hasta 85 de cada 100. (→) Lo que más explica es lo que pasa en el barrio: atracos, conflictos, parques. (→) Y la prueba clave: el delito registrado no agrega nada a saber en qué localidad vive la persona: 0,722 frente a 0,726. El miedo sigue a lo que la gente vive, no a la estadística.</a:t>
+              <a:t>Rafael (2:30-2:55): Segundo modelo: entrenamos tres modelos para predecir quién siente insegura su zona y los probamos con personas que no vieron. Con hechos y contexto ordenan bien 72 de cada 100 parejas; con las calificaciones del barrio, 85. (→) Lo que más explica es lo que pasa en el barrio: atracos, conflictos, parques. (→) Y la prueba clave: el delito registrado no agrega nada a saber en qué localidad vive la persona: 0,722 frente a 0,726. El miedo sigue a lo que la gente vive, no a la estadística.</a:t>
             </a:r>
           </a:p>
         </p:txBody>
